--- a/media/exports/reports/2026-03/program-cost.pptx
+++ b/media/exports/reports/2026-03/program-cost.pptx
@@ -301,7 +301,9 @@
     <a:lstStyle/>
     <a:p>
       <a:pPr>
-        <a:defRPr sz="1800"/>
+        <a:defRPr sz="1800">
+          <a:latin typeface="Roboto"/>
+        </a:defRPr>
       </a:pPr>
       <a:endParaRPr lang="en-US"/>
     </a:p>
@@ -497,7 +499,9 @@
     <a:lstStyle/>
     <a:p>
       <a:pPr>
-        <a:defRPr sz="1800"/>
+        <a:defRPr sz="1800">
+          <a:latin typeface="Roboto"/>
+        </a:defRPr>
       </a:pPr>
       <a:endParaRPr lang="en-US"/>
     </a:p>
@@ -757,7 +761,9 @@
     <a:lstStyle/>
     <a:p>
       <a:pPr>
-        <a:defRPr sz="1800"/>
+        <a:defRPr sz="1800">
+          <a:latin typeface="Roboto"/>
+        </a:defRPr>
       </a:pPr>
       <a:endParaRPr/>
     </a:p>
@@ -3788,11 +3794,17 @@
           <a:bodyPr rtlCol="0" anchor="ctr"/>
           <a:lstStyle/>
           <a:p>
+            <a:pPr>
+              <a:defRPr>
+                <a:latin typeface="Roboto"/>
+              </a:defRPr>
+            </a:pPr>
             <a:r>
               <a:rPr sz="1600" b="1">
                 <a:solidFill>
                   <a:srgbClr val="FFFFFF"/>
                 </a:solidFill>
+                <a:latin typeface="Roboto"/>
               </a:rPr>
               <a:t>4th</a:t>
             </a:r>
@@ -3821,14 +3833,19 @@
           </a:bodyPr>
           <a:lstStyle/>
           <a:p>
+            <a:pPr>
+              <a:defRPr>
+                <a:latin typeface="Roboto"/>
+              </a:defRPr>
+            </a:pPr>
             <a:r>
               <a:rPr sz="1800" b="1">
                 <a:solidFill>
                   <a:srgbClr val="25342A"/>
                 </a:solidFill>
-                <a:latin typeface="Arial"/>
+                <a:latin typeface="Roboto"/>
               </a:rPr>
-              <a:t>The 4th Sheet</a:t>
+              <a:t>The Fourth Sheet</a:t>
             </a:r>
           </a:p>
         </p:txBody>
@@ -3855,12 +3872,17 @@
           </a:bodyPr>
           <a:lstStyle/>
           <a:p>
+            <a:pPr>
+              <a:defRPr>
+                <a:latin typeface="Roboto"/>
+              </a:defRPr>
+            </a:pPr>
             <a:r>
               <a:rPr sz="1100" b="1">
                 <a:solidFill>
                   <a:srgbClr val="8A7A52"/>
                 </a:solidFill>
-                <a:latin typeface="Arial"/>
+                <a:latin typeface="Roboto"/>
               </a:rPr>
               <a:t>SAMPLE DATA · invented figures for demonstration</a:t>
             </a:r>
@@ -3889,12 +3911,17 @@
           </a:bodyPr>
           <a:lstStyle/>
           <a:p>
+            <a:pPr>
+              <a:defRPr>
+                <a:latin typeface="Roboto"/>
+              </a:defRPr>
+            </a:pPr>
             <a:r>
               <a:rPr sz="3400" b="1">
                 <a:solidFill>
                   <a:srgbClr val="25342A"/>
                 </a:solidFill>
-                <a:latin typeface="Arial"/>
+                <a:latin typeface="Roboto"/>
               </a:rPr>
               <a:t>What does each program really cost?</a:t>
             </a:r>
@@ -3923,12 +3950,17 @@
           </a:bodyPr>
           <a:lstStyle/>
           <a:p>
+            <a:pPr>
+              <a:defRPr>
+                <a:latin typeface="Roboto"/>
+              </a:defRPr>
+            </a:pPr>
             <a:r>
               <a:rPr sz="1600" b="0">
                 <a:solidFill>
                   <a:srgbClr val="5F6F63"/>
                 </a:solidFill>
-                <a:latin typeface="Arial"/>
+                <a:latin typeface="Roboto"/>
               </a:rPr>
               <a:t>Sample Community Services Ltd</a:t>
             </a:r>
@@ -3957,12 +3989,17 @@
           </a:bodyPr>
           <a:lstStyle/>
           <a:p>
+            <a:pPr>
+              <a:defRPr>
+                <a:latin typeface="Roboto"/>
+              </a:defRPr>
+            </a:pPr>
             <a:r>
               <a:rPr sz="1400" b="0">
                 <a:solidFill>
                   <a:srgbClr val="25342A"/>
                 </a:solidFill>
-                <a:latin typeface="Arial"/>
+                <a:latin typeface="Roboto"/>
               </a:rPr>
               <a:t>Period: March 2026. Each program's full cost: what its grant pays for, plus its fair share of the costs no single grant covers (untied program costs and administration, shared by grant spending). Pick a program and every chart and note follows it.</a:t>
             </a:r>
@@ -3991,45 +4028,65 @@
           </a:bodyPr>
           <a:lstStyle/>
           <a:p>
+            <a:pPr>
+              <a:defRPr>
+                <a:latin typeface="Roboto"/>
+              </a:defRPr>
+            </a:pPr>
             <a:r>
               <a:rPr sz="1100" b="0">
                 <a:solidFill>
                   <a:srgbClr val="5F6F63"/>
                 </a:solidFill>
-                <a:latin typeface="Arial"/>
+                <a:latin typeface="Roboto"/>
               </a:rPr>
               <a:t>How final is this data?</a:t>
             </a:r>
           </a:p>
           <a:p>
+            <a:pPr>
+              <a:defRPr>
+                <a:latin typeface="Roboto"/>
+              </a:defRPr>
+            </a:pPr>
             <a:r>
               <a:rPr sz="1100" b="0">
                 <a:solidFill>
                   <a:srgbClr val="5F6F63"/>
                 </a:solidFill>
-                <a:latin typeface="Arial"/>
+                <a:latin typeface="Roboto"/>
               </a:rPr>
               <a:t>February 2026: Locked. February 2026 is locked (closed 3 Mar 2026). These numbers won't change.</a:t>
             </a:r>
           </a:p>
           <a:p>
+            <a:pPr>
+              <a:defRPr>
+                <a:latin typeface="Roboto"/>
+              </a:defRPr>
+            </a:pPr>
             <a:r>
               <a:rPr sz="1100" b="0">
                 <a:solidFill>
                   <a:srgbClr val="5F6F63"/>
                 </a:solidFill>
-                <a:latin typeface="Arial"/>
+                <a:latin typeface="Roboto"/>
               </a:rPr>
               <a:t>March 2026: Locked. March 2026 is locked (closed 2 Apr 2026). These numbers won't change.</a:t>
             </a:r>
           </a:p>
           <a:p>
+            <a:pPr>
+              <a:defRPr>
+                <a:latin typeface="Roboto"/>
+              </a:defRPr>
+            </a:pPr>
             <a:r>
               <a:rPr sz="1100" b="0">
                 <a:solidFill>
                   <a:srgbClr val="5F6F63"/>
                 </a:solidFill>
-                <a:latin typeface="Arial"/>
+                <a:latin typeface="Roboto"/>
               </a:rPr>
               <a:t>October 2026: Incomplete. October 2026 is still in progress: figures to 6 Oct only.</a:t>
             </a:r>
@@ -4058,12 +4115,17 @@
           </a:bodyPr>
           <a:lstStyle/>
           <a:p>
+            <a:pPr>
+              <a:defRPr>
+                <a:latin typeface="Roboto"/>
+              </a:defRPr>
+            </a:pPr>
             <a:r>
               <a:rPr sz="900" b="0">
                 <a:solidFill>
                   <a:srgbClr val="5F6F63"/>
                 </a:solidFill>
-                <a:latin typeface="Arial"/>
+                <a:latin typeface="Roboto"/>
               </a:rPr>
               <a:t>program-cost.pptx</a:t>
             </a:r>
@@ -4092,13 +4154,17 @@
           </a:bodyPr>
           <a:lstStyle/>
           <a:p>
-            <a:pPr algn="ctr"/>
+            <a:pPr algn="ctr">
+              <a:defRPr>
+                <a:latin typeface="Roboto"/>
+              </a:defRPr>
+            </a:pPr>
             <a:r>
               <a:rPr sz="900" b="0">
                 <a:solidFill>
                   <a:srgbClr val="5F6F63"/>
                 </a:solidFill>
-                <a:latin typeface="Arial"/>
+                <a:latin typeface="Roboto"/>
               </a:rPr>
               <a:t>Data retrieved 2pm, Tue 6 Oct 2026 · Sample data</a:t>
             </a:r>
@@ -4127,13 +4193,17 @@
           </a:bodyPr>
           <a:lstStyle/>
           <a:p>
-            <a:pPr algn="r"/>
+            <a:pPr algn="r">
+              <a:defRPr>
+                <a:latin typeface="Roboto"/>
+              </a:defRPr>
+            </a:pPr>
             <a:r>
               <a:rPr sz="900" b="0">
                 <a:solidFill>
                   <a:srgbClr val="5F6F63"/>
                 </a:solidFill>
-                <a:latin typeface="Arial"/>
+                <a:latin typeface="Roboto"/>
               </a:rPr>
               <a:t>Slide 1 of 10</a:t>
             </a:r>
@@ -4197,7 +4267,11 @@
           <a:bodyPr rtlCol="0" anchor="ctr"/>
           <a:lstStyle/>
           <a:p>
-            <a:pPr algn="ctr"/>
+            <a:pPr algn="ctr">
+              <a:defRPr>
+                <a:latin typeface="Roboto"/>
+              </a:defRPr>
+            </a:pPr>
           </a:p>
         </p:txBody>
       </p:sp>
@@ -4223,12 +4297,17 @@
           </a:bodyPr>
           <a:lstStyle/>
           <a:p>
+            <a:pPr>
+              <a:defRPr>
+                <a:latin typeface="Roboto"/>
+              </a:defRPr>
+            </a:pPr>
             <a:r>
               <a:rPr sz="1000" b="0">
                 <a:solidFill>
                   <a:srgbClr val="5F6F63"/>
                 </a:solidFill>
-                <a:latin typeface="Arial"/>
+                <a:latin typeface="Roboto"/>
               </a:rPr>
               <a:t>Sample Community Services Ltd · What does each program really cost?</a:t>
             </a:r>
@@ -4257,12 +4336,17 @@
           </a:bodyPr>
           <a:lstStyle/>
           <a:p>
+            <a:pPr>
+              <a:defRPr>
+                <a:latin typeface="Roboto"/>
+              </a:defRPr>
+            </a:pPr>
             <a:r>
               <a:rPr sz="2400" b="1">
                 <a:solidFill>
                   <a:srgbClr val="25342A"/>
                 </a:solidFill>
-                <a:latin typeface="Arial"/>
+                <a:latin typeface="Roboto"/>
               </a:rPr>
               <a:t>Grant spending, by month · Spend $ · Every program at once</a:t>
             </a:r>
@@ -4291,12 +4375,17 @@
           </a:bodyPr>
           <a:lstStyle/>
           <a:p>
+            <a:pPr>
+              <a:defRPr>
+                <a:latin typeface="Roboto"/>
+              </a:defRPr>
+            </a:pPr>
             <a:r>
               <a:rPr sz="1200" b="0">
                 <a:solidFill>
                   <a:srgbClr val="5F6F63"/>
                 </a:solidFill>
-                <a:latin typeface="Arial"/>
+                <a:latin typeface="Roboto"/>
               </a:rPr>
               <a:t>Grant spending only (the program's direct cost). All programs includes grants that have finished.</a:t>
             </a:r>
@@ -4343,12 +4432,17 @@
           </a:bodyPr>
           <a:lstStyle/>
           <a:p>
+            <a:pPr>
+              <a:defRPr>
+                <a:latin typeface="Roboto"/>
+              </a:defRPr>
+            </a:pPr>
             <a:r>
               <a:rPr sz="900" b="0">
                 <a:solidFill>
                   <a:srgbClr val="5F6F63"/>
                 </a:solidFill>
-                <a:latin typeface="Arial"/>
+                <a:latin typeface="Roboto"/>
               </a:rPr>
               <a:t>program-cost.pptx</a:t>
             </a:r>
@@ -4377,13 +4471,17 @@
           </a:bodyPr>
           <a:lstStyle/>
           <a:p>
-            <a:pPr algn="ctr"/>
+            <a:pPr algn="ctr">
+              <a:defRPr>
+                <a:latin typeface="Roboto"/>
+              </a:defRPr>
+            </a:pPr>
             <a:r>
               <a:rPr sz="900" b="0">
                 <a:solidFill>
                   <a:srgbClr val="5F6F63"/>
                 </a:solidFill>
-                <a:latin typeface="Arial"/>
+                <a:latin typeface="Roboto"/>
               </a:rPr>
               <a:t>Data retrieved 2pm, Tue 6 Oct 2026 · Sample data</a:t>
             </a:r>
@@ -4412,13 +4510,17 @@
           </a:bodyPr>
           <a:lstStyle/>
           <a:p>
-            <a:pPr algn="r"/>
+            <a:pPr algn="r">
+              <a:defRPr>
+                <a:latin typeface="Roboto"/>
+              </a:defRPr>
+            </a:pPr>
             <a:r>
               <a:rPr sz="900" b="0">
                 <a:solidFill>
                   <a:srgbClr val="5F6F63"/>
                 </a:solidFill>
-                <a:latin typeface="Arial"/>
+                <a:latin typeface="Roboto"/>
               </a:rPr>
               <a:t>Slide 10 of 10</a:t>
             </a:r>
@@ -4482,7 +4584,11 @@
           <a:bodyPr rtlCol="0" anchor="ctr"/>
           <a:lstStyle/>
           <a:p>
-            <a:pPr algn="ctr"/>
+            <a:pPr algn="ctr">
+              <a:defRPr>
+                <a:latin typeface="Roboto"/>
+              </a:defRPr>
+            </a:pPr>
           </a:p>
         </p:txBody>
       </p:sp>
@@ -4508,12 +4614,17 @@
           </a:bodyPr>
           <a:lstStyle/>
           <a:p>
+            <a:pPr>
+              <a:defRPr>
+                <a:latin typeface="Roboto"/>
+              </a:defRPr>
+            </a:pPr>
             <a:r>
               <a:rPr sz="1000" b="0">
                 <a:solidFill>
                   <a:srgbClr val="5F6F63"/>
                 </a:solidFill>
-                <a:latin typeface="Arial"/>
+                <a:latin typeface="Roboto"/>
               </a:rPr>
               <a:t>Sample Community Services Ltd · What does each program really cost?</a:t>
             </a:r>
@@ -4542,12 +4653,17 @@
           </a:bodyPr>
           <a:lstStyle/>
           <a:p>
+            <a:pPr>
+              <a:defRPr>
+                <a:latin typeface="Roboto"/>
+              </a:defRPr>
+            </a:pPr>
             <a:r>
               <a:rPr sz="2400" b="1">
                 <a:solidFill>
                   <a:srgbClr val="25342A"/>
                 </a:solidFill>
-                <a:latin typeface="Arial"/>
+                <a:latin typeface="Roboto"/>
               </a:rPr>
               <a:t>Full cost of each program, March 2026 · $ · Program: All programs</a:t>
             </a:r>
@@ -4594,12 +4710,17 @@
           </a:bodyPr>
           <a:lstStyle/>
           <a:p>
+            <a:pPr>
+              <a:defRPr>
+                <a:latin typeface="Roboto"/>
+              </a:defRPr>
+            </a:pPr>
             <a:r>
               <a:rPr sz="900" b="0">
                 <a:solidFill>
                   <a:srgbClr val="5F6F63"/>
                 </a:solidFill>
-                <a:latin typeface="Arial"/>
+                <a:latin typeface="Roboto"/>
               </a:rPr>
               <a:t>program-cost.pptx</a:t>
             </a:r>
@@ -4628,13 +4749,17 @@
           </a:bodyPr>
           <a:lstStyle/>
           <a:p>
-            <a:pPr algn="ctr"/>
+            <a:pPr algn="ctr">
+              <a:defRPr>
+                <a:latin typeface="Roboto"/>
+              </a:defRPr>
+            </a:pPr>
             <a:r>
               <a:rPr sz="900" b="0">
                 <a:solidFill>
                   <a:srgbClr val="5F6F63"/>
                 </a:solidFill>
-                <a:latin typeface="Arial"/>
+                <a:latin typeface="Roboto"/>
               </a:rPr>
               <a:t>Data retrieved 2pm, Tue 6 Oct 2026 · Sample data</a:t>
             </a:r>
@@ -4663,13 +4788,17 @@
           </a:bodyPr>
           <a:lstStyle/>
           <a:p>
-            <a:pPr algn="r"/>
+            <a:pPr algn="r">
+              <a:defRPr>
+                <a:latin typeface="Roboto"/>
+              </a:defRPr>
+            </a:pPr>
             <a:r>
               <a:rPr sz="900" b="0">
                 <a:solidFill>
                   <a:srgbClr val="5F6F63"/>
                 </a:solidFill>
-                <a:latin typeface="Arial"/>
+                <a:latin typeface="Roboto"/>
               </a:rPr>
               <a:t>Slide 2 of 10</a:t>
             </a:r>
@@ -4733,7 +4862,11 @@
           <a:bodyPr rtlCol="0" anchor="ctr"/>
           <a:lstStyle/>
           <a:p>
-            <a:pPr algn="ctr"/>
+            <a:pPr algn="ctr">
+              <a:defRPr>
+                <a:latin typeface="Roboto"/>
+              </a:defRPr>
+            </a:pPr>
           </a:p>
         </p:txBody>
       </p:sp>
@@ -4759,12 +4892,17 @@
           </a:bodyPr>
           <a:lstStyle/>
           <a:p>
+            <a:pPr>
+              <a:defRPr>
+                <a:latin typeface="Roboto"/>
+              </a:defRPr>
+            </a:pPr>
             <a:r>
               <a:rPr sz="1000" b="0">
                 <a:solidFill>
                   <a:srgbClr val="5F6F63"/>
                 </a:solidFill>
-                <a:latin typeface="Arial"/>
+                <a:latin typeface="Roboto"/>
               </a:rPr>
               <a:t>Sample Community Services Ltd · What does each program really cost?</a:t>
             </a:r>
@@ -4793,12 +4931,17 @@
           </a:bodyPr>
           <a:lstStyle/>
           <a:p>
+            <a:pPr>
+              <a:defRPr>
+                <a:latin typeface="Roboto"/>
+              </a:defRPr>
+            </a:pPr>
             <a:r>
               <a:rPr sz="2400" b="1">
                 <a:solidFill>
                   <a:srgbClr val="25342A"/>
                 </a:solidFill>
-                <a:latin typeface="Arial"/>
+                <a:latin typeface="Roboto"/>
               </a:rPr>
               <a:t>Full cost of each program, March 2026 · % of total · Program: All programs</a:t>
             </a:r>
@@ -4845,12 +4988,17 @@
           </a:bodyPr>
           <a:lstStyle/>
           <a:p>
+            <a:pPr>
+              <a:defRPr>
+                <a:latin typeface="Roboto"/>
+              </a:defRPr>
+            </a:pPr>
             <a:r>
               <a:rPr sz="900" b="0">
                 <a:solidFill>
                   <a:srgbClr val="5F6F63"/>
                 </a:solidFill>
-                <a:latin typeface="Arial"/>
+                <a:latin typeface="Roboto"/>
               </a:rPr>
               <a:t>program-cost.pptx</a:t>
             </a:r>
@@ -4879,13 +5027,17 @@
           </a:bodyPr>
           <a:lstStyle/>
           <a:p>
-            <a:pPr algn="ctr"/>
+            <a:pPr algn="ctr">
+              <a:defRPr>
+                <a:latin typeface="Roboto"/>
+              </a:defRPr>
+            </a:pPr>
             <a:r>
               <a:rPr sz="900" b="0">
                 <a:solidFill>
                   <a:srgbClr val="5F6F63"/>
                 </a:solidFill>
-                <a:latin typeface="Arial"/>
+                <a:latin typeface="Roboto"/>
               </a:rPr>
               <a:t>Data retrieved 2pm, Tue 6 Oct 2026 · Sample data</a:t>
             </a:r>
@@ -4914,13 +5066,17 @@
           </a:bodyPr>
           <a:lstStyle/>
           <a:p>
-            <a:pPr algn="r"/>
+            <a:pPr algn="r">
+              <a:defRPr>
+                <a:latin typeface="Roboto"/>
+              </a:defRPr>
+            </a:pPr>
             <a:r>
               <a:rPr sz="900" b="0">
                 <a:solidFill>
                   <a:srgbClr val="5F6F63"/>
                 </a:solidFill>
-                <a:latin typeface="Arial"/>
+                <a:latin typeface="Roboto"/>
               </a:rPr>
               <a:t>Slide 3 of 10</a:t>
             </a:r>
@@ -4984,7 +5140,11 @@
           <a:bodyPr rtlCol="0" anchor="ctr"/>
           <a:lstStyle/>
           <a:p>
-            <a:pPr algn="ctr"/>
+            <a:pPr algn="ctr">
+              <a:defRPr>
+                <a:latin typeface="Roboto"/>
+              </a:defRPr>
+            </a:pPr>
           </a:p>
         </p:txBody>
       </p:sp>
@@ -5010,12 +5170,17 @@
           </a:bodyPr>
           <a:lstStyle/>
           <a:p>
+            <a:pPr>
+              <a:defRPr>
+                <a:latin typeface="Roboto"/>
+              </a:defRPr>
+            </a:pPr>
             <a:r>
               <a:rPr sz="1000" b="0">
                 <a:solidFill>
                   <a:srgbClr val="5F6F63"/>
                 </a:solidFill>
-                <a:latin typeface="Arial"/>
+                <a:latin typeface="Roboto"/>
               </a:rPr>
               <a:t>Sample Community Services Ltd · What does each program really cost?</a:t>
             </a:r>
@@ -5044,12 +5209,17 @@
           </a:bodyPr>
           <a:lstStyle/>
           <a:p>
+            <a:pPr>
+              <a:defRPr>
+                <a:latin typeface="Roboto"/>
+              </a:defRPr>
+            </a:pPr>
             <a:r>
               <a:rPr sz="2400" b="1">
                 <a:solidFill>
                   <a:srgbClr val="25342A"/>
                 </a:solidFill>
-                <a:latin typeface="Arial"/>
+                <a:latin typeface="Roboto"/>
               </a:rPr>
               <a:t>What it shows · Program: All programs</a:t>
             </a:r>
@@ -5097,7 +5267,11 @@
           <a:bodyPr rtlCol="0" anchor="ctr"/>
           <a:lstStyle/>
           <a:p>
-            <a:pPr algn="ctr"/>
+            <a:pPr algn="ctr">
+              <a:defRPr>
+                <a:latin typeface="Roboto"/>
+              </a:defRPr>
+            </a:pPr>
           </a:p>
         </p:txBody>
       </p:sp>
@@ -5123,12 +5297,17 @@
           </a:bodyPr>
           <a:lstStyle/>
           <a:p>
+            <a:pPr>
+              <a:defRPr>
+                <a:latin typeface="Roboto"/>
+              </a:defRPr>
+            </a:pPr>
             <a:r>
               <a:rPr sz="1100" b="1">
                 <a:solidFill>
                   <a:srgbClr val="5F6F63"/>
                 </a:solidFill>
-                <a:latin typeface="Arial"/>
+                <a:latin typeface="Roboto"/>
               </a:rPr>
               <a:t>WHAT IT SHOWS</a:t>
             </a:r>
@@ -5157,12 +5336,17 @@
           </a:bodyPr>
           <a:lstStyle/>
           <a:p>
+            <a:pPr>
+              <a:defRPr>
+                <a:latin typeface="Roboto"/>
+              </a:defRPr>
+            </a:pPr>
             <a:r>
               <a:rPr sz="1600" b="0">
                 <a:solidFill>
                   <a:srgbClr val="25342A"/>
                 </a:solidFill>
-                <a:latin typeface="Arial"/>
+                <a:latin typeface="Roboto"/>
               </a:rPr>
               <a:t>Housing support is the biggest program: $49,107 in March once its share of untied program costs and administration is added to $24,832 of grant spending. Shared costs add 97.8% on top of grant spending across all programs.</a:t>
             </a:r>
@@ -5210,7 +5394,11 @@
           <a:bodyPr rtlCol="0" anchor="ctr"/>
           <a:lstStyle/>
           <a:p>
-            <a:pPr algn="ctr"/>
+            <a:pPr algn="ctr">
+              <a:defRPr>
+                <a:latin typeface="Roboto"/>
+              </a:defRPr>
+            </a:pPr>
           </a:p>
         </p:txBody>
       </p:sp>
@@ -5236,12 +5424,17 @@
           </a:bodyPr>
           <a:lstStyle/>
           <a:p>
+            <a:pPr>
+              <a:defRPr>
+                <a:latin typeface="Roboto"/>
+              </a:defRPr>
+            </a:pPr>
             <a:r>
               <a:rPr sz="1100" b="1">
                 <a:solidFill>
                   <a:srgbClr val="5F6F63"/>
                 </a:solidFill>
-                <a:latin typeface="Arial"/>
+                <a:latin typeface="Roboto"/>
               </a:rPr>
               <a:t>WHAT YOU'D DO ABOUT IT</a:t>
             </a:r>
@@ -5270,12 +5463,17 @@
           </a:bodyPr>
           <a:lstStyle/>
           <a:p>
+            <a:pPr>
+              <a:defRPr>
+                <a:latin typeface="Roboto"/>
+              </a:defRPr>
+            </a:pPr>
             <a:r>
               <a:rPr sz="1600" b="0">
                 <a:solidFill>
                   <a:srgbClr val="25342A"/>
                 </a:solidFill>
-                <a:latin typeface="Arial"/>
+                <a:latin typeface="Roboto"/>
               </a:rPr>
               <a:t>The full cost (not just the grant line) is the number for renewal applications, where the funder lets you recover a share of overheads. Pick a program above to see it on its own.</a:t>
             </a:r>
@@ -5304,12 +5502,17 @@
           </a:bodyPr>
           <a:lstStyle/>
           <a:p>
+            <a:pPr>
+              <a:defRPr>
+                <a:latin typeface="Roboto"/>
+              </a:defRPr>
+            </a:pPr>
             <a:r>
               <a:rPr sz="900" b="0">
                 <a:solidFill>
                   <a:srgbClr val="5F6F63"/>
                 </a:solidFill>
-                <a:latin typeface="Arial"/>
+                <a:latin typeface="Roboto"/>
               </a:rPr>
               <a:t>program-cost.pptx</a:t>
             </a:r>
@@ -5338,13 +5541,17 @@
           </a:bodyPr>
           <a:lstStyle/>
           <a:p>
-            <a:pPr algn="ctr"/>
+            <a:pPr algn="ctr">
+              <a:defRPr>
+                <a:latin typeface="Roboto"/>
+              </a:defRPr>
+            </a:pPr>
             <a:r>
               <a:rPr sz="900" b="0">
                 <a:solidFill>
                   <a:srgbClr val="5F6F63"/>
                 </a:solidFill>
-                <a:latin typeface="Arial"/>
+                <a:latin typeface="Roboto"/>
               </a:rPr>
               <a:t>Data retrieved 2pm, Tue 6 Oct 2026 · Sample data</a:t>
             </a:r>
@@ -5373,13 +5580,17 @@
           </a:bodyPr>
           <a:lstStyle/>
           <a:p>
-            <a:pPr algn="r"/>
+            <a:pPr algn="r">
+              <a:defRPr>
+                <a:latin typeface="Roboto"/>
+              </a:defRPr>
+            </a:pPr>
             <a:r>
               <a:rPr sz="900" b="0">
                 <a:solidFill>
                   <a:srgbClr val="5F6F63"/>
                 </a:solidFill>
-                <a:latin typeface="Arial"/>
+                <a:latin typeface="Roboto"/>
               </a:rPr>
               <a:t>Slide 4 of 10</a:t>
             </a:r>
@@ -5443,7 +5654,11 @@
           <a:bodyPr rtlCol="0" anchor="ctr"/>
           <a:lstStyle/>
           <a:p>
-            <a:pPr algn="ctr"/>
+            <a:pPr algn="ctr">
+              <a:defRPr>
+                <a:latin typeface="Roboto"/>
+              </a:defRPr>
+            </a:pPr>
           </a:p>
         </p:txBody>
       </p:sp>
@@ -5469,12 +5684,17 @@
           </a:bodyPr>
           <a:lstStyle/>
           <a:p>
+            <a:pPr>
+              <a:defRPr>
+                <a:latin typeface="Roboto"/>
+              </a:defRPr>
+            </a:pPr>
             <a:r>
               <a:rPr sz="1000" b="0">
                 <a:solidFill>
                   <a:srgbClr val="5F6F63"/>
                 </a:solidFill>
-                <a:latin typeface="Arial"/>
+                <a:latin typeface="Roboto"/>
               </a:rPr>
               <a:t>Sample Community Services Ltd · What does each program really cost?</a:t>
             </a:r>
@@ -5503,12 +5723,17 @@
           </a:bodyPr>
           <a:lstStyle/>
           <a:p>
+            <a:pPr>
+              <a:defRPr>
+                <a:latin typeface="Roboto"/>
+              </a:defRPr>
+            </a:pPr>
             <a:r>
               <a:rPr sz="2400" b="1">
                 <a:solidFill>
                   <a:srgbClr val="25342A"/>
                 </a:solidFill>
-                <a:latin typeface="Arial"/>
+                <a:latin typeface="Roboto"/>
               </a:rPr>
               <a:t>What it shows · Program: Housing support</a:t>
             </a:r>
@@ -5556,7 +5781,11 @@
           <a:bodyPr rtlCol="0" anchor="ctr"/>
           <a:lstStyle/>
           <a:p>
-            <a:pPr algn="ctr"/>
+            <a:pPr algn="ctr">
+              <a:defRPr>
+                <a:latin typeface="Roboto"/>
+              </a:defRPr>
+            </a:pPr>
           </a:p>
         </p:txBody>
       </p:sp>
@@ -5582,12 +5811,17 @@
           </a:bodyPr>
           <a:lstStyle/>
           <a:p>
+            <a:pPr>
+              <a:defRPr>
+                <a:latin typeface="Roboto"/>
+              </a:defRPr>
+            </a:pPr>
             <a:r>
               <a:rPr sz="1100" b="1">
                 <a:solidFill>
                   <a:srgbClr val="5F6F63"/>
                 </a:solidFill>
-                <a:latin typeface="Arial"/>
+                <a:latin typeface="Roboto"/>
               </a:rPr>
               <a:t>WHAT IT SHOWS</a:t>
             </a:r>
@@ -5616,12 +5850,17 @@
           </a:bodyPr>
           <a:lstStyle/>
           <a:p>
+            <a:pPr>
+              <a:defRPr>
+                <a:latin typeface="Roboto"/>
+              </a:defRPr>
+            </a:pPr>
             <a:r>
               <a:rPr sz="1600" b="0">
                 <a:solidFill>
                   <a:srgbClr val="25342A"/>
                 </a:solidFill>
-                <a:latin typeface="Arial"/>
+                <a:latin typeface="Roboto"/>
               </a:rPr>
               <a:t>Housing support cost $49,107 in full in March: $24,832 paid by the State Housing Program grant, and $24,275 of shared costs no grant covers. It has spent 90.9% of its budget to date, with $278,158 left and 9 months to go.</a:t>
             </a:r>
@@ -5669,7 +5908,11 @@
           <a:bodyPr rtlCol="0" anchor="ctr"/>
           <a:lstStyle/>
           <a:p>
-            <a:pPr algn="ctr"/>
+            <a:pPr algn="ctr">
+              <a:defRPr>
+                <a:latin typeface="Roboto"/>
+              </a:defRPr>
+            </a:pPr>
           </a:p>
         </p:txBody>
       </p:sp>
@@ -5695,12 +5938,17 @@
           </a:bodyPr>
           <a:lstStyle/>
           <a:p>
+            <a:pPr>
+              <a:defRPr>
+                <a:latin typeface="Roboto"/>
+              </a:defRPr>
+            </a:pPr>
             <a:r>
               <a:rPr sz="1100" b="1">
                 <a:solidFill>
                   <a:srgbClr val="5F6F63"/>
                 </a:solidFill>
-                <a:latin typeface="Arial"/>
+                <a:latin typeface="Roboto"/>
               </a:rPr>
               <a:t>WHAT YOU'D DO ABOUT IT</a:t>
             </a:r>
@@ -5729,12 +5977,17 @@
           </a:bodyPr>
           <a:lstStyle/>
           <a:p>
+            <a:pPr>
+              <a:defRPr>
+                <a:latin typeface="Roboto"/>
+              </a:defRPr>
+            </a:pPr>
             <a:r>
               <a:rPr sz="1600" b="0">
                 <a:solidFill>
                   <a:srgbClr val="25342A"/>
                 </a:solidFill>
-                <a:latin typeface="Arial"/>
+                <a:latin typeface="Roboto"/>
               </a:rPr>
               <a:t>The full cost is $49,107 a month; $24,275 of it is shared cost the grant doesn't pay for. Worth asking for as much of it as the funder allows at renewal.</a:t>
             </a:r>
@@ -5763,12 +6016,17 @@
           </a:bodyPr>
           <a:lstStyle/>
           <a:p>
+            <a:pPr>
+              <a:defRPr>
+                <a:latin typeface="Roboto"/>
+              </a:defRPr>
+            </a:pPr>
             <a:r>
               <a:rPr sz="900" b="0">
                 <a:solidFill>
                   <a:srgbClr val="5F6F63"/>
                 </a:solidFill>
-                <a:latin typeface="Arial"/>
+                <a:latin typeface="Roboto"/>
               </a:rPr>
               <a:t>program-cost.pptx</a:t>
             </a:r>
@@ -5797,13 +6055,17 @@
           </a:bodyPr>
           <a:lstStyle/>
           <a:p>
-            <a:pPr algn="ctr"/>
+            <a:pPr algn="ctr">
+              <a:defRPr>
+                <a:latin typeface="Roboto"/>
+              </a:defRPr>
+            </a:pPr>
             <a:r>
               <a:rPr sz="900" b="0">
                 <a:solidFill>
                   <a:srgbClr val="5F6F63"/>
                 </a:solidFill>
-                <a:latin typeface="Arial"/>
+                <a:latin typeface="Roboto"/>
               </a:rPr>
               <a:t>Data retrieved 2pm, Tue 6 Oct 2026 · Sample data</a:t>
             </a:r>
@@ -5832,13 +6094,17 @@
           </a:bodyPr>
           <a:lstStyle/>
           <a:p>
-            <a:pPr algn="r"/>
+            <a:pPr algn="r">
+              <a:defRPr>
+                <a:latin typeface="Roboto"/>
+              </a:defRPr>
+            </a:pPr>
             <a:r>
               <a:rPr sz="900" b="0">
                 <a:solidFill>
                   <a:srgbClr val="5F6F63"/>
                 </a:solidFill>
-                <a:latin typeface="Arial"/>
+                <a:latin typeface="Roboto"/>
               </a:rPr>
               <a:t>Slide 5 of 10</a:t>
             </a:r>
@@ -5902,7 +6168,11 @@
           <a:bodyPr rtlCol="0" anchor="ctr"/>
           <a:lstStyle/>
           <a:p>
-            <a:pPr algn="ctr"/>
+            <a:pPr algn="ctr">
+              <a:defRPr>
+                <a:latin typeface="Roboto"/>
+              </a:defRPr>
+            </a:pPr>
           </a:p>
         </p:txBody>
       </p:sp>
@@ -5928,12 +6198,17 @@
           </a:bodyPr>
           <a:lstStyle/>
           <a:p>
+            <a:pPr>
+              <a:defRPr>
+                <a:latin typeface="Roboto"/>
+              </a:defRPr>
+            </a:pPr>
             <a:r>
               <a:rPr sz="1000" b="0">
                 <a:solidFill>
                   <a:srgbClr val="5F6F63"/>
                 </a:solidFill>
-                <a:latin typeface="Arial"/>
+                <a:latin typeface="Roboto"/>
               </a:rPr>
               <a:t>Sample Community Services Ltd · What does each program really cost?</a:t>
             </a:r>
@@ -5962,12 +6237,17 @@
           </a:bodyPr>
           <a:lstStyle/>
           <a:p>
+            <a:pPr>
+              <a:defRPr>
+                <a:latin typeface="Roboto"/>
+              </a:defRPr>
+            </a:pPr>
             <a:r>
               <a:rPr sz="2400" b="1">
                 <a:solidFill>
                   <a:srgbClr val="25342A"/>
                 </a:solidFill>
-                <a:latin typeface="Arial"/>
+                <a:latin typeface="Roboto"/>
               </a:rPr>
               <a:t>What it shows · Program: Youth outreach</a:t>
             </a:r>
@@ -6015,7 +6295,11 @@
           <a:bodyPr rtlCol="0" anchor="ctr"/>
           <a:lstStyle/>
           <a:p>
-            <a:pPr algn="ctr"/>
+            <a:pPr algn="ctr">
+              <a:defRPr>
+                <a:latin typeface="Roboto"/>
+              </a:defRPr>
+            </a:pPr>
           </a:p>
         </p:txBody>
       </p:sp>
@@ -6041,12 +6325,17 @@
           </a:bodyPr>
           <a:lstStyle/>
           <a:p>
+            <a:pPr>
+              <a:defRPr>
+                <a:latin typeface="Roboto"/>
+              </a:defRPr>
+            </a:pPr>
             <a:r>
               <a:rPr sz="1100" b="1">
                 <a:solidFill>
                   <a:srgbClr val="5F6F63"/>
                 </a:solidFill>
-                <a:latin typeface="Arial"/>
+                <a:latin typeface="Roboto"/>
               </a:rPr>
               <a:t>WHAT IT SHOWS</a:t>
             </a:r>
@@ -6075,12 +6364,17 @@
           </a:bodyPr>
           <a:lstStyle/>
           <a:p>
+            <a:pPr>
+              <a:defRPr>
+                <a:latin typeface="Roboto"/>
+              </a:defRPr>
+            </a:pPr>
             <a:r>
               <a:rPr sz="1600" b="0">
                 <a:solidFill>
                   <a:srgbClr val="25342A"/>
                 </a:solidFill>
-                <a:latin typeface="Arial"/>
+                <a:latin typeface="Roboto"/>
               </a:rPr>
               <a:t>Youth outreach cost $32,660 in full in March: $16,515 paid by the State Department of Families grant, and $16,145 of shared costs no grant covers. It has spent 98.2% of its budget to date, with $303,265 left and 15 months to go.</a:t>
             </a:r>
@@ -6128,7 +6422,11 @@
           <a:bodyPr rtlCol="0" anchor="ctr"/>
           <a:lstStyle/>
           <a:p>
-            <a:pPr algn="ctr"/>
+            <a:pPr algn="ctr">
+              <a:defRPr>
+                <a:latin typeface="Roboto"/>
+              </a:defRPr>
+            </a:pPr>
           </a:p>
         </p:txBody>
       </p:sp>
@@ -6154,12 +6452,17 @@
           </a:bodyPr>
           <a:lstStyle/>
           <a:p>
+            <a:pPr>
+              <a:defRPr>
+                <a:latin typeface="Roboto"/>
+              </a:defRPr>
+            </a:pPr>
             <a:r>
               <a:rPr sz="1100" b="1">
                 <a:solidFill>
                   <a:srgbClr val="5F6F63"/>
                 </a:solidFill>
-                <a:latin typeface="Arial"/>
+                <a:latin typeface="Roboto"/>
               </a:rPr>
               <a:t>WHAT YOU'D DO ABOUT IT</a:t>
             </a:r>
@@ -6188,12 +6491,17 @@
           </a:bodyPr>
           <a:lstStyle/>
           <a:p>
+            <a:pPr>
+              <a:defRPr>
+                <a:latin typeface="Roboto"/>
+              </a:defRPr>
+            </a:pPr>
             <a:r>
               <a:rPr sz="1600" b="0">
                 <a:solidFill>
                   <a:srgbClr val="25342A"/>
                 </a:solidFill>
-                <a:latin typeface="Arial"/>
+                <a:latin typeface="Roboto"/>
               </a:rPr>
               <a:t>The full cost is $32,660 a month; $16,145 of it is shared cost the grant doesn't pay for. Worth asking for as much of it as the funder allows at renewal.</a:t>
             </a:r>
@@ -6222,12 +6530,17 @@
           </a:bodyPr>
           <a:lstStyle/>
           <a:p>
+            <a:pPr>
+              <a:defRPr>
+                <a:latin typeface="Roboto"/>
+              </a:defRPr>
+            </a:pPr>
             <a:r>
               <a:rPr sz="900" b="0">
                 <a:solidFill>
                   <a:srgbClr val="5F6F63"/>
                 </a:solidFill>
-                <a:latin typeface="Arial"/>
+                <a:latin typeface="Roboto"/>
               </a:rPr>
               <a:t>program-cost.pptx</a:t>
             </a:r>
@@ -6256,13 +6569,17 @@
           </a:bodyPr>
           <a:lstStyle/>
           <a:p>
-            <a:pPr algn="ctr"/>
+            <a:pPr algn="ctr">
+              <a:defRPr>
+                <a:latin typeface="Roboto"/>
+              </a:defRPr>
+            </a:pPr>
             <a:r>
               <a:rPr sz="900" b="0">
                 <a:solidFill>
                   <a:srgbClr val="5F6F63"/>
                 </a:solidFill>
-                <a:latin typeface="Arial"/>
+                <a:latin typeface="Roboto"/>
               </a:rPr>
               <a:t>Data retrieved 2pm, Tue 6 Oct 2026 · Sample data</a:t>
             </a:r>
@@ -6291,13 +6608,17 @@
           </a:bodyPr>
           <a:lstStyle/>
           <a:p>
-            <a:pPr algn="r"/>
+            <a:pPr algn="r">
+              <a:defRPr>
+                <a:latin typeface="Roboto"/>
+              </a:defRPr>
+            </a:pPr>
             <a:r>
               <a:rPr sz="900" b="0">
                 <a:solidFill>
                   <a:srgbClr val="5F6F63"/>
                 </a:solidFill>
-                <a:latin typeface="Arial"/>
+                <a:latin typeface="Roboto"/>
               </a:rPr>
               <a:t>Slide 6 of 10</a:t>
             </a:r>
@@ -6361,7 +6682,11 @@
           <a:bodyPr rtlCol="0" anchor="ctr"/>
           <a:lstStyle/>
           <a:p>
-            <a:pPr algn="ctr"/>
+            <a:pPr algn="ctr">
+              <a:defRPr>
+                <a:latin typeface="Roboto"/>
+              </a:defRPr>
+            </a:pPr>
           </a:p>
         </p:txBody>
       </p:sp>
@@ -6387,12 +6712,17 @@
           </a:bodyPr>
           <a:lstStyle/>
           <a:p>
+            <a:pPr>
+              <a:defRPr>
+                <a:latin typeface="Roboto"/>
+              </a:defRPr>
+            </a:pPr>
             <a:r>
               <a:rPr sz="1000" b="0">
                 <a:solidFill>
                   <a:srgbClr val="5F6F63"/>
                 </a:solidFill>
-                <a:latin typeface="Arial"/>
+                <a:latin typeface="Roboto"/>
               </a:rPr>
               <a:t>Sample Community Services Ltd · What does each program really cost?</a:t>
             </a:r>
@@ -6421,12 +6751,17 @@
           </a:bodyPr>
           <a:lstStyle/>
           <a:p>
+            <a:pPr>
+              <a:defRPr>
+                <a:latin typeface="Roboto"/>
+              </a:defRPr>
+            </a:pPr>
             <a:r>
               <a:rPr sz="2400" b="1">
                 <a:solidFill>
                   <a:srgbClr val="25342A"/>
                 </a:solidFill>
-                <a:latin typeface="Arial"/>
+                <a:latin typeface="Roboto"/>
               </a:rPr>
               <a:t>What it shows · Program: Digital literacy</a:t>
             </a:r>
@@ -6474,7 +6809,11 @@
           <a:bodyPr rtlCol="0" anchor="ctr"/>
           <a:lstStyle/>
           <a:p>
-            <a:pPr algn="ctr"/>
+            <a:pPr algn="ctr">
+              <a:defRPr>
+                <a:latin typeface="Roboto"/>
+              </a:defRPr>
+            </a:pPr>
           </a:p>
         </p:txBody>
       </p:sp>
@@ -6500,12 +6839,17 @@
           </a:bodyPr>
           <a:lstStyle/>
           <a:p>
+            <a:pPr>
+              <a:defRPr>
+                <a:latin typeface="Roboto"/>
+              </a:defRPr>
+            </a:pPr>
             <a:r>
               <a:rPr sz="1100" b="1">
                 <a:solidFill>
                   <a:srgbClr val="5F6F63"/>
                 </a:solidFill>
-                <a:latin typeface="Arial"/>
+                <a:latin typeface="Roboto"/>
               </a:rPr>
               <a:t>WHAT IT SHOWS</a:t>
             </a:r>
@@ -6534,12 +6878,17 @@
           </a:bodyPr>
           <a:lstStyle/>
           <a:p>
+            <a:pPr>
+              <a:defRPr>
+                <a:latin typeface="Roboto"/>
+              </a:defRPr>
+            </a:pPr>
             <a:r>
               <a:rPr sz="1600" b="0">
                 <a:solidFill>
                   <a:srgbClr val="25342A"/>
                 </a:solidFill>
-                <a:latin typeface="Arial"/>
+                <a:latin typeface="Roboto"/>
               </a:rPr>
               <a:t>Digital literacy cost $10,732 in full in March: $5,427 paid by the Philanthropic foundation grant, and $5,305 of shared costs no grant covers. It has spent 100.8% of its budget to date, with $59,773 left and 12 months to go.</a:t>
             </a:r>
@@ -6587,7 +6936,11 @@
           <a:bodyPr rtlCol="0" anchor="ctr"/>
           <a:lstStyle/>
           <a:p>
-            <a:pPr algn="ctr"/>
+            <a:pPr algn="ctr">
+              <a:defRPr>
+                <a:latin typeface="Roboto"/>
+              </a:defRPr>
+            </a:pPr>
           </a:p>
         </p:txBody>
       </p:sp>
@@ -6613,12 +6966,17 @@
           </a:bodyPr>
           <a:lstStyle/>
           <a:p>
+            <a:pPr>
+              <a:defRPr>
+                <a:latin typeface="Roboto"/>
+              </a:defRPr>
+            </a:pPr>
             <a:r>
               <a:rPr sz="1100" b="1">
                 <a:solidFill>
                   <a:srgbClr val="5F6F63"/>
                 </a:solidFill>
-                <a:latin typeface="Arial"/>
+                <a:latin typeface="Roboto"/>
               </a:rPr>
               <a:t>WHAT YOU'D DO ABOUT IT</a:t>
             </a:r>
@@ -6647,12 +7005,17 @@
           </a:bodyPr>
           <a:lstStyle/>
           <a:p>
+            <a:pPr>
+              <a:defRPr>
+                <a:latin typeface="Roboto"/>
+              </a:defRPr>
+            </a:pPr>
             <a:r>
               <a:rPr sz="1600" b="0">
                 <a:solidFill>
                   <a:srgbClr val="25342A"/>
                 </a:solidFill>
-                <a:latin typeface="Arial"/>
+                <a:latin typeface="Roboto"/>
               </a:rPr>
               <a:t>The full cost is $10,732 a month; $5,305 of it is shared cost the grant doesn't pay for. Worth asking for as much of it as the funder allows at renewal.</a:t>
             </a:r>
@@ -6681,12 +7044,17 @@
           </a:bodyPr>
           <a:lstStyle/>
           <a:p>
+            <a:pPr>
+              <a:defRPr>
+                <a:latin typeface="Roboto"/>
+              </a:defRPr>
+            </a:pPr>
             <a:r>
               <a:rPr sz="900" b="0">
                 <a:solidFill>
                   <a:srgbClr val="5F6F63"/>
                 </a:solidFill>
-                <a:latin typeface="Arial"/>
+                <a:latin typeface="Roboto"/>
               </a:rPr>
               <a:t>program-cost.pptx</a:t>
             </a:r>
@@ -6715,13 +7083,17 @@
           </a:bodyPr>
           <a:lstStyle/>
           <a:p>
-            <a:pPr algn="ctr"/>
+            <a:pPr algn="ctr">
+              <a:defRPr>
+                <a:latin typeface="Roboto"/>
+              </a:defRPr>
+            </a:pPr>
             <a:r>
               <a:rPr sz="900" b="0">
                 <a:solidFill>
                   <a:srgbClr val="5F6F63"/>
                 </a:solidFill>
-                <a:latin typeface="Arial"/>
+                <a:latin typeface="Roboto"/>
               </a:rPr>
               <a:t>Data retrieved 2pm, Tue 6 Oct 2026 · Sample data</a:t>
             </a:r>
@@ -6750,13 +7122,17 @@
           </a:bodyPr>
           <a:lstStyle/>
           <a:p>
-            <a:pPr algn="r"/>
+            <a:pPr algn="r">
+              <a:defRPr>
+                <a:latin typeface="Roboto"/>
+              </a:defRPr>
+            </a:pPr>
             <a:r>
               <a:rPr sz="900" b="0">
                 <a:solidFill>
                   <a:srgbClr val="5F6F63"/>
                 </a:solidFill>
-                <a:latin typeface="Arial"/>
+                <a:latin typeface="Roboto"/>
               </a:rPr>
               <a:t>Slide 7 of 10</a:t>
             </a:r>
@@ -6820,7 +7196,11 @@
           <a:bodyPr rtlCol="0" anchor="ctr"/>
           <a:lstStyle/>
           <a:p>
-            <a:pPr algn="ctr"/>
+            <a:pPr algn="ctr">
+              <a:defRPr>
+                <a:latin typeface="Roboto"/>
+              </a:defRPr>
+            </a:pPr>
           </a:p>
         </p:txBody>
       </p:sp>
@@ -6846,12 +7226,17 @@
           </a:bodyPr>
           <a:lstStyle/>
           <a:p>
+            <a:pPr>
+              <a:defRPr>
+                <a:latin typeface="Roboto"/>
+              </a:defRPr>
+            </a:pPr>
             <a:r>
               <a:rPr sz="1000" b="0">
                 <a:solidFill>
                   <a:srgbClr val="5F6F63"/>
                 </a:solidFill>
-                <a:latin typeface="Arial"/>
+                <a:latin typeface="Roboto"/>
               </a:rPr>
               <a:t>Sample Community Services Ltd · What does each program really cost?</a:t>
             </a:r>
@@ -6880,12 +7265,17 @@
           </a:bodyPr>
           <a:lstStyle/>
           <a:p>
+            <a:pPr>
+              <a:defRPr>
+                <a:latin typeface="Roboto"/>
+              </a:defRPr>
+            </a:pPr>
             <a:r>
               <a:rPr sz="2400" b="1">
                 <a:solidFill>
                   <a:srgbClr val="25342A"/>
                 </a:solidFill>
-                <a:latin typeface="Arial"/>
+                <a:latin typeface="Roboto"/>
               </a:rPr>
               <a:t>What it shows · Program: Community meals (2025-26)</a:t>
             </a:r>
@@ -6933,7 +7323,11 @@
           <a:bodyPr rtlCol="0" anchor="ctr"/>
           <a:lstStyle/>
           <a:p>
-            <a:pPr algn="ctr"/>
+            <a:pPr algn="ctr">
+              <a:defRPr>
+                <a:latin typeface="Roboto"/>
+              </a:defRPr>
+            </a:pPr>
           </a:p>
         </p:txBody>
       </p:sp>
@@ -6959,12 +7353,17 @@
           </a:bodyPr>
           <a:lstStyle/>
           <a:p>
+            <a:pPr>
+              <a:defRPr>
+                <a:latin typeface="Roboto"/>
+              </a:defRPr>
+            </a:pPr>
             <a:r>
               <a:rPr sz="1100" b="1">
                 <a:solidFill>
                   <a:srgbClr val="5F6F63"/>
                 </a:solidFill>
-                <a:latin typeface="Arial"/>
+                <a:latin typeface="Roboto"/>
               </a:rPr>
               <a:t>WHAT IT SHOWS</a:t>
             </a:r>
@@ -6993,12 +7392,17 @@
           </a:bodyPr>
           <a:lstStyle/>
           <a:p>
+            <a:pPr>
+              <a:defRPr>
+                <a:latin typeface="Roboto"/>
+              </a:defRPr>
+            </a:pPr>
             <a:r>
               <a:rPr sz="1600" b="0">
                 <a:solidFill>
                   <a:srgbClr val="25342A"/>
                 </a:solidFill>
-                <a:latin typeface="Arial"/>
+                <a:latin typeface="Roboto"/>
               </a:rPr>
               <a:t>Community meals (2025-26) cost $8,108 in full in March: $4,100 paid by the Local council community grant grant, and $4,008 of shared costs no grant covers. It has spent 96.7% of its budget to date, with $12,100 left and 3 months to go.</a:t>
             </a:r>
@@ -7046,7 +7450,11 @@
           <a:bodyPr rtlCol="0" anchor="ctr"/>
           <a:lstStyle/>
           <a:p>
-            <a:pPr algn="ctr"/>
+            <a:pPr algn="ctr">
+              <a:defRPr>
+                <a:latin typeface="Roboto"/>
+              </a:defRPr>
+            </a:pPr>
           </a:p>
         </p:txBody>
       </p:sp>
@@ -7072,12 +7480,17 @@
           </a:bodyPr>
           <a:lstStyle/>
           <a:p>
+            <a:pPr>
+              <a:defRPr>
+                <a:latin typeface="Roboto"/>
+              </a:defRPr>
+            </a:pPr>
             <a:r>
               <a:rPr sz="1100" b="1">
                 <a:solidFill>
                   <a:srgbClr val="5F6F63"/>
                 </a:solidFill>
-                <a:latin typeface="Arial"/>
+                <a:latin typeface="Roboto"/>
               </a:rPr>
               <a:t>WHAT YOU'D DO ABOUT IT</a:t>
             </a:r>
@@ -7106,12 +7519,17 @@
           </a:bodyPr>
           <a:lstStyle/>
           <a:p>
+            <a:pPr>
+              <a:defRPr>
+                <a:latin typeface="Roboto"/>
+              </a:defRPr>
+            </a:pPr>
             <a:r>
               <a:rPr sz="1600" b="0">
                 <a:solidFill>
                   <a:srgbClr val="25342A"/>
                 </a:solidFill>
-                <a:latin typeface="Arial"/>
+                <a:latin typeface="Roboto"/>
               </a:rPr>
               <a:t>The full cost is $8,108 a month; $4,008 of it is shared cost the grant doesn't pay for. Worth asking for as much of it as the funder allows at renewal.</a:t>
             </a:r>
@@ -7140,12 +7558,17 @@
           </a:bodyPr>
           <a:lstStyle/>
           <a:p>
+            <a:pPr>
+              <a:defRPr>
+                <a:latin typeface="Roboto"/>
+              </a:defRPr>
+            </a:pPr>
             <a:r>
               <a:rPr sz="900" b="0">
                 <a:solidFill>
                   <a:srgbClr val="5F6F63"/>
                 </a:solidFill>
-                <a:latin typeface="Arial"/>
+                <a:latin typeface="Roboto"/>
               </a:rPr>
               <a:t>program-cost.pptx</a:t>
             </a:r>
@@ -7174,13 +7597,17 @@
           </a:bodyPr>
           <a:lstStyle/>
           <a:p>
-            <a:pPr algn="ctr"/>
+            <a:pPr algn="ctr">
+              <a:defRPr>
+                <a:latin typeface="Roboto"/>
+              </a:defRPr>
+            </a:pPr>
             <a:r>
               <a:rPr sz="900" b="0">
                 <a:solidFill>
                   <a:srgbClr val="5F6F63"/>
                 </a:solidFill>
-                <a:latin typeface="Arial"/>
+                <a:latin typeface="Roboto"/>
               </a:rPr>
               <a:t>Data retrieved 2pm, Tue 6 Oct 2026 · Sample data</a:t>
             </a:r>
@@ -7209,13 +7636,17 @@
           </a:bodyPr>
           <a:lstStyle/>
           <a:p>
-            <a:pPr algn="r"/>
+            <a:pPr algn="r">
+              <a:defRPr>
+                <a:latin typeface="Roboto"/>
+              </a:defRPr>
+            </a:pPr>
             <a:r>
               <a:rPr sz="900" b="0">
                 <a:solidFill>
                   <a:srgbClr val="5F6F63"/>
                 </a:solidFill>
-                <a:latin typeface="Arial"/>
+                <a:latin typeface="Roboto"/>
               </a:rPr>
               <a:t>Slide 8 of 10</a:t>
             </a:r>
@@ -7279,7 +7710,11 @@
           <a:bodyPr rtlCol="0" anchor="ctr"/>
           <a:lstStyle/>
           <a:p>
-            <a:pPr algn="ctr"/>
+            <a:pPr algn="ctr">
+              <a:defRPr>
+                <a:latin typeface="Roboto"/>
+              </a:defRPr>
+            </a:pPr>
           </a:p>
         </p:txBody>
       </p:sp>
@@ -7305,12 +7740,17 @@
           </a:bodyPr>
           <a:lstStyle/>
           <a:p>
+            <a:pPr>
+              <a:defRPr>
+                <a:latin typeface="Roboto"/>
+              </a:defRPr>
+            </a:pPr>
             <a:r>
               <a:rPr sz="1000" b="0">
                 <a:solidFill>
                   <a:srgbClr val="5F6F63"/>
                 </a:solidFill>
-                <a:latin typeface="Arial"/>
+                <a:latin typeface="Roboto"/>
               </a:rPr>
               <a:t>Sample Community Services Ltd · What does each program really cost?</a:t>
             </a:r>
@@ -7339,12 +7779,17 @@
           </a:bodyPr>
           <a:lstStyle/>
           <a:p>
+            <a:pPr>
+              <a:defRPr>
+                <a:latin typeface="Roboto"/>
+              </a:defRPr>
+            </a:pPr>
             <a:r>
               <a:rPr sz="2400" b="1">
                 <a:solidFill>
                   <a:srgbClr val="25342A"/>
                 </a:solidFill>
-                <a:latin typeface="Arial"/>
+                <a:latin typeface="Roboto"/>
               </a:rPr>
               <a:t>What it shows · Program: Volunteer coordinator</a:t>
             </a:r>
@@ -7392,7 +7837,11 @@
           <a:bodyPr rtlCol="0" anchor="ctr"/>
           <a:lstStyle/>
           <a:p>
-            <a:pPr algn="ctr"/>
+            <a:pPr algn="ctr">
+              <a:defRPr>
+                <a:latin typeface="Roboto"/>
+              </a:defRPr>
+            </a:pPr>
           </a:p>
         </p:txBody>
       </p:sp>
@@ -7418,12 +7867,17 @@
           </a:bodyPr>
           <a:lstStyle/>
           <a:p>
+            <a:pPr>
+              <a:defRPr>
+                <a:latin typeface="Roboto"/>
+              </a:defRPr>
+            </a:pPr>
             <a:r>
               <a:rPr sz="1100" b="1">
                 <a:solidFill>
                   <a:srgbClr val="5F6F63"/>
                 </a:solidFill>
-                <a:latin typeface="Arial"/>
+                <a:latin typeface="Roboto"/>
               </a:rPr>
               <a:t>WHAT IT SHOWS</a:t>
             </a:r>
@@ -7452,12 +7906,17 @@
           </a:bodyPr>
           <a:lstStyle/>
           <a:p>
+            <a:pPr>
+              <a:defRPr>
+                <a:latin typeface="Roboto"/>
+              </a:defRPr>
+            </a:pPr>
             <a:r>
               <a:rPr sz="1600" b="0">
                 <a:solidFill>
                   <a:srgbClr val="25342A"/>
                 </a:solidFill>
-                <a:latin typeface="Arial"/>
+                <a:latin typeface="Roboto"/>
               </a:rPr>
               <a:t>Volunteer coordinator cost $5,798 in full in March: $2,932 paid by the State volunteering grant grant, and $2,866 of shared costs no grant covers. It has spent 97.7% of its budget to date, with $33,068 left and 11 months to go.</a:t>
             </a:r>
@@ -7505,7 +7964,11 @@
           <a:bodyPr rtlCol="0" anchor="ctr"/>
           <a:lstStyle/>
           <a:p>
-            <a:pPr algn="ctr"/>
+            <a:pPr algn="ctr">
+              <a:defRPr>
+                <a:latin typeface="Roboto"/>
+              </a:defRPr>
+            </a:pPr>
           </a:p>
         </p:txBody>
       </p:sp>
@@ -7531,12 +7994,17 @@
           </a:bodyPr>
           <a:lstStyle/>
           <a:p>
+            <a:pPr>
+              <a:defRPr>
+                <a:latin typeface="Roboto"/>
+              </a:defRPr>
+            </a:pPr>
             <a:r>
               <a:rPr sz="1100" b="1">
                 <a:solidFill>
                   <a:srgbClr val="5F6F63"/>
                 </a:solidFill>
-                <a:latin typeface="Arial"/>
+                <a:latin typeface="Roboto"/>
               </a:rPr>
               <a:t>WHAT YOU'D DO ABOUT IT</a:t>
             </a:r>
@@ -7565,12 +8033,17 @@
           </a:bodyPr>
           <a:lstStyle/>
           <a:p>
+            <a:pPr>
+              <a:defRPr>
+                <a:latin typeface="Roboto"/>
+              </a:defRPr>
+            </a:pPr>
             <a:r>
               <a:rPr sz="1600" b="0">
                 <a:solidFill>
                   <a:srgbClr val="25342A"/>
                 </a:solidFill>
-                <a:latin typeface="Arial"/>
+                <a:latin typeface="Roboto"/>
               </a:rPr>
               <a:t>The full cost is $5,798 a month; $2,866 of it is shared cost the grant doesn't pay for. Worth asking for as much of it as the funder allows at renewal.</a:t>
             </a:r>
@@ -7599,12 +8072,17 @@
           </a:bodyPr>
           <a:lstStyle/>
           <a:p>
+            <a:pPr>
+              <a:defRPr>
+                <a:latin typeface="Roboto"/>
+              </a:defRPr>
+            </a:pPr>
             <a:r>
               <a:rPr sz="900" b="0">
                 <a:solidFill>
                   <a:srgbClr val="5F6F63"/>
                 </a:solidFill>
-                <a:latin typeface="Arial"/>
+                <a:latin typeface="Roboto"/>
               </a:rPr>
               <a:t>program-cost.pptx</a:t>
             </a:r>
@@ -7633,13 +8111,17 @@
           </a:bodyPr>
           <a:lstStyle/>
           <a:p>
-            <a:pPr algn="ctr"/>
+            <a:pPr algn="ctr">
+              <a:defRPr>
+                <a:latin typeface="Roboto"/>
+              </a:defRPr>
+            </a:pPr>
             <a:r>
               <a:rPr sz="900" b="0">
                 <a:solidFill>
                   <a:srgbClr val="5F6F63"/>
                 </a:solidFill>
-                <a:latin typeface="Arial"/>
+                <a:latin typeface="Roboto"/>
               </a:rPr>
               <a:t>Data retrieved 2pm, Tue 6 Oct 2026 · Sample data</a:t>
             </a:r>
@@ -7668,13 +8150,17 @@
           </a:bodyPr>
           <a:lstStyle/>
           <a:p>
-            <a:pPr algn="r"/>
+            <a:pPr algn="r">
+              <a:defRPr>
+                <a:latin typeface="Roboto"/>
+              </a:defRPr>
+            </a:pPr>
             <a:r>
               <a:rPr sz="900" b="0">
                 <a:solidFill>
                   <a:srgbClr val="5F6F63"/>
                 </a:solidFill>
-                <a:latin typeface="Arial"/>
+                <a:latin typeface="Roboto"/>
               </a:rPr>
               <a:t>Slide 9 of 10</a:t>
             </a:r>

--- a/media/exports/reports/2026-03/program-cost.pptx
+++ b/media/exports/reports/2026-03/program-cost.pptx
@@ -6,15 +6,12 @@
   </p:sldMasterIdLst>
   <p:sldIdLst>
     <p:sldId id="256" r:id="rId7"/>
-    <p:sldId id="257" r:id="rId8"/>
-    <p:sldId id="258" r:id="rId9"/>
-    <p:sldId id="259" r:id="rId10"/>
-    <p:sldId id="260" r:id="rId11"/>
-    <p:sldId id="261" r:id="rId12"/>
-    <p:sldId id="262" r:id="rId13"/>
-    <p:sldId id="263" r:id="rId14"/>
-    <p:sldId id="264" r:id="rId15"/>
-    <p:sldId id="265" r:id="rId16"/>
+    <p:sldId id="257" r:id="rId9"/>
+    <p:sldId id="258" r:id="rId10"/>
+    <p:sldId id="259" r:id="rId11"/>
+    <p:sldId id="260" r:id="rId12"/>
+    <p:sldId id="261" r:id="rId13"/>
+    <p:sldId id="262" r:id="rId14"/>
   </p:sldIdLst>
   <p:sldSz cx="12191695" cy="6858000" type="screen4x3"/>
   <p:notesSz cx="6858000" cy="9144000"/>
@@ -120,8 +117,19 @@
 <c:chartSpace xmlns:c="http://schemas.openxmlformats.org/drawingml/2006/chart" xmlns:a="http://schemas.openxmlformats.org/drawingml/2006/main" xmlns:r="http://schemas.openxmlformats.org/officeDocument/2006/relationships">
   <c:date1904 val="0"/>
   <c:chart>
-    <c:autoTitleDeleted val="0"/>
+    <c:autoTitleDeleted val="1"/>
     <c:plotArea>
+      <c:layout>
+        <c:manualLayout>
+          <c:layoutTarget val="inner"/>
+          <c:xMode val="edge"/>
+          <c:yMode val="edge"/>
+          <c:x val="0.3"/>
+          <c:y val="0.03"/>
+          <c:w val="0.58"/>
+          <c:h val="0.88"/>
+        </c:manualLayout>
+      </c:layout>
       <c:barChart>
         <c:barDir val="bar"/>
         <c:grouping val="clustered"/>
@@ -134,7 +142,7 @@
               <c:strCache>
                 <c:ptCount val="1"/>
                 <c:pt idx="0">
-                  <c:v>Value</c:v>
+                  <c:v>$</c:v>
                 </c:pt>
               </c:strCache>
             </c:strRef>
@@ -234,7 +242,7 @@
             <a:lstStyle/>
             <a:p>
               <a:pPr>
-                <a:defRPr sz="1100"/>
+                <a:defRPr sz="1000"/>
               </a:pPr>
             </a:p>
           </c:txPr>
@@ -271,7 +279,7 @@
           <a:lstStyle/>
           <a:p>
             <a:pPr>
-              <a:defRPr sz="1200"/>
+              <a:defRPr sz="1100"/>
             </a:pPr>
           </a:p>
         </c:txPr>
@@ -284,7 +292,10 @@
       </c:catAx>
       <c:valAx>
         <c:axId val="-2113994440"/>
-        <c:scaling/>
+        <c:scaling>
+          <c:max val="56473.049999999996"/>
+          <c:min val="0.0"/>
+        </c:scaling>
         <c:delete/>
         <c:axPos val="b"/>
         <c:majorTickMark val="out"/>
@@ -317,209 +328,21 @@
 <file path=ppt/charts/chart2.xml><?xml version="1.0" encoding="utf-8"?>
 <c:chartSpace xmlns:c="http://schemas.openxmlformats.org/drawingml/2006/chart" xmlns:a="http://schemas.openxmlformats.org/drawingml/2006/main" xmlns:r="http://schemas.openxmlformats.org/officeDocument/2006/relationships">
   <c:date1904 val="0"/>
-  <c:chart>
-    <c:autoTitleDeleted val="0"/>
-    <c:plotArea>
-      <c:barChart>
-        <c:barDir val="bar"/>
-        <c:grouping val="clustered"/>
-        <c:ser>
-          <c:idx val="0"/>
-          <c:order val="0"/>
-          <c:tx>
-            <c:strRef>
-              <c:f>Sheet1!$B$1</c:f>
-              <c:strCache>
-                <c:ptCount val="1"/>
-                <c:pt idx="0">
-                  <c:v>Value</c:v>
-                </c:pt>
-              </c:strCache>
-            </c:strRef>
-          </c:tx>
-          <c:dPt>
-            <c:idx val="0"/>
-            <c:spPr>
-              <a:solidFill>
-                <a:srgbClr val="0E9F6E"/>
-              </a:solidFill>
-            </c:spPr>
-          </c:dPt>
-          <c:dPt>
-            <c:idx val="1"/>
-            <c:spPr>
-              <a:solidFill>
-                <a:srgbClr val="0E9F6E"/>
-              </a:solidFill>
-            </c:spPr>
-          </c:dPt>
-          <c:dPt>
-            <c:idx val="2"/>
-            <c:spPr>
-              <a:solidFill>
-                <a:srgbClr val="0E9F6E"/>
-              </a:solidFill>
-            </c:spPr>
-          </c:dPt>
-          <c:dPt>
-            <c:idx val="3"/>
-            <c:spPr>
-              <a:solidFill>
-                <a:srgbClr val="0E9F6E"/>
-              </a:solidFill>
-            </c:spPr>
-          </c:dPt>
-          <c:dPt>
-            <c:idx val="4"/>
-            <c:spPr>
-              <a:solidFill>
-                <a:srgbClr val="0E9F6E"/>
-              </a:solidFill>
-            </c:spPr>
-          </c:dPt>
-          <c:cat>
-            <c:strRef>
-              <c:f>Sheet1!$A$2:$A$6</c:f>
-              <c:strCache>
-                <c:ptCount val="5"/>
-                <c:pt idx="0">
-                  <c:v>Volunteer coordinator</c:v>
-                </c:pt>
-                <c:pt idx="1">
-                  <c:v>Community meals (2025-26)</c:v>
-                </c:pt>
-                <c:pt idx="2">
-                  <c:v>Digital literacy</c:v>
-                </c:pt>
-                <c:pt idx="3">
-                  <c:v>Youth outreach</c:v>
-                </c:pt>
-                <c:pt idx="4">
-                  <c:v>Housing support</c:v>
-                </c:pt>
-              </c:strCache>
-            </c:strRef>
-          </c:cat>
-          <c:val>
-            <c:numRef>
-              <c:f>Sheet1!$B$2:$B$6</c:f>
-              <c:numCache>
-                <c:formatCode>0.0"%";[Red](0.0"%")</c:formatCode>
-                <c:ptCount val="5"/>
-                <c:pt idx="0">
-                  <c:v>5.4</c:v>
-                </c:pt>
-                <c:pt idx="1">
-                  <c:v>7.6</c:v>
-                </c:pt>
-                <c:pt idx="2">
-                  <c:v>10.1</c:v>
-                </c:pt>
-                <c:pt idx="3">
-                  <c:v>30.7</c:v>
-                </c:pt>
-                <c:pt idx="4">
-                  <c:v>46.2</c:v>
-                </c:pt>
-              </c:numCache>
-            </c:numRef>
-          </c:val>
-        </c:ser>
-        <c:dLbls>
-          <c:numFmt formatCode="0.0&quot;%&quot;;[Red](0.0&quot;%&quot;)" sourceLinked="0"/>
-          <c:txPr>
-            <a:bodyPr/>
-            <a:lstStyle/>
-            <a:p>
-              <a:pPr>
-                <a:defRPr sz="1100"/>
-              </a:pPr>
-            </a:p>
-          </c:txPr>
-          <c:dLblPos val="outEnd"/>
-          <c:showLegendKey val="0"/>
-          <c:showVal val="1"/>
-          <c:showCatName val="0"/>
-          <c:showSerName val="0"/>
-          <c:showPercent val="0"/>
-          <c:showBubbleSize val="0"/>
-          <c:showLeaderLines val="1"/>
-        </c:dLbls>
-        <c:gapWidth val="60"/>
-        <c:axId val="-2068027336"/>
-        <c:axId val="-2113994440"/>
-      </c:barChart>
-      <c:catAx>
-        <c:axId val="-2068027336"/>
-        <c:scaling>
-          <c:orientation val="minMax"/>
-        </c:scaling>
-        <c:delete val="0"/>
-        <c:axPos val="l"/>
-        <c:majorTickMark val="out"/>
-        <c:minorTickMark val="none"/>
-        <c:tickLblPos val="nextTo"/>
-        <c:spPr>
-          <a:ln>
-            <a:noFill/>
-          </a:ln>
-        </c:spPr>
-        <c:txPr>
-          <a:bodyPr/>
-          <a:lstStyle/>
-          <a:p>
-            <a:pPr>
-              <a:defRPr sz="1200"/>
-            </a:pPr>
-          </a:p>
-        </c:txPr>
-        <c:crossAx val="-2113994440"/>
-        <c:crosses val="autoZero"/>
-        <c:auto val="1"/>
-        <c:lblAlgn val="ctr"/>
-        <c:lblOffset val="100"/>
-        <c:noMultiLvlLbl val="0"/>
-      </c:catAx>
-      <c:valAx>
-        <c:axId val="-2113994440"/>
-        <c:scaling/>
-        <c:delete/>
-        <c:axPos val="b"/>
-        <c:majorTickMark val="out"/>
-        <c:minorTickMark val="none"/>
-        <c:tickLblPos val="nextTo"/>
-        <c:crossAx val="-2068027336"/>
-        <c:crosses val="autoZero"/>
-      </c:valAx>
-    </c:plotArea>
-    <c:dispBlanksAs val="gap"/>
-  </c:chart>
-  <c:txPr>
-    <a:bodyPr/>
-    <a:lstStyle/>
-    <a:p>
-      <a:pPr>
-        <a:defRPr sz="1800">
-          <a:latin typeface="Roboto"/>
-        </a:defRPr>
-      </a:pPr>
-      <a:endParaRPr lang="en-US"/>
-    </a:p>
-  </c:txPr>
-  <c:externalData r:id="rId1">
-    <c:autoUpdate val="0"/>
-  </c:externalData>
-</c:chartSpace>
-</file>
-
-<file path=ppt/charts/chart3.xml><?xml version="1.0" encoding="utf-8"?>
-<c:chartSpace xmlns:c="http://schemas.openxmlformats.org/drawingml/2006/chart" xmlns:a="http://schemas.openxmlformats.org/drawingml/2006/main" xmlns:r="http://schemas.openxmlformats.org/officeDocument/2006/relationships">
-  <c:date1904 val="0"/>
   <c:roundedCorners val="0"/>
   <c:chart>
-    <c:autoTitleDeleted val="0"/>
+    <c:autoTitleDeleted val="1"/>
     <c:plotArea>
-      <c:layout/>
+      <c:layout>
+        <c:manualLayout>
+          <c:layoutTarget val="inner"/>
+          <c:xMode val="edge"/>
+          <c:yMode val="edge"/>
+          <c:x val="0.11"/>
+          <c:y val="0.05"/>
+          <c:w val="0.86"/>
+          <c:h val="0.8"/>
+        </c:manualLayout>
+      </c:layout>
       <c:areaChart>
         <c:grouping val="standard"/>
         <c:varyColors val="0"/>
@@ -532,7 +355,7 @@
               <c:strCache>
                 <c:ptCount val="1"/>
                 <c:pt idx="0">
-                  <c:v>Value</c:v>
+                  <c:v>Spend $</c:v>
                 </c:pt>
               </c:strCache>
             </c:strRef>
@@ -618,58 +441,58 @@
                 <c:formatCode>$#,##0;[Red]($#,##0);"-"</c:formatCode>
                 <c:ptCount val="18"/>
                 <c:pt idx="0">
-                  <c:v>26600</c:v>
+                  <c:v>0</c:v>
                 </c:pt>
                 <c:pt idx="1">
-                  <c:v>31800</c:v>
+                  <c:v>0</c:v>
                 </c:pt>
                 <c:pt idx="2">
-                  <c:v>29700</c:v>
+                  <c:v>0</c:v>
                 </c:pt>
                 <c:pt idx="3">
-                  <c:v>62700</c:v>
+                  <c:v>0</c:v>
                 </c:pt>
                 <c:pt idx="4">
-                  <c:v>61700</c:v>
+                  <c:v>0</c:v>
                 </c:pt>
                 <c:pt idx="5">
-                  <c:v>54500</c:v>
+                  <c:v>0</c:v>
                 </c:pt>
                 <c:pt idx="6">
-                  <c:v>61500</c:v>
+                  <c:v>0</c:v>
                 </c:pt>
                 <c:pt idx="7">
-                  <c:v>61700</c:v>
+                  <c:v>0</c:v>
                 </c:pt>
                 <c:pt idx="8">
-                  <c:v>52200</c:v>
+                  <c:v>0</c:v>
                 </c:pt>
                 <c:pt idx="9">
-                  <c:v>59063</c:v>
+                  <c:v>0</c:v>
                 </c:pt>
                 <c:pt idx="10">
-                  <c:v>61544</c:v>
+                  <c:v>0</c:v>
                 </c:pt>
                 <c:pt idx="11">
-                  <c:v>62137</c:v>
+                  <c:v>0</c:v>
                 </c:pt>
                 <c:pt idx="12">
-                  <c:v>69185</c:v>
+                  <c:v>0</c:v>
                 </c:pt>
                 <c:pt idx="13">
-                  <c:v>70164</c:v>
+                  <c:v>0</c:v>
                 </c:pt>
                 <c:pt idx="14">
-                  <c:v>68793</c:v>
+                  <c:v>0</c:v>
                 </c:pt>
                 <c:pt idx="15">
-                  <c:v>59785</c:v>
+                  <c:v>30502</c:v>
                 </c:pt>
                 <c:pt idx="16">
-                  <c:v>55759</c:v>
+                  <c:v>26508</c:v>
                 </c:pt>
                 <c:pt idx="17">
-                  <c:v>53806</c:v>
+                  <c:v>24832</c:v>
                 </c:pt>
               </c:numCache>
             </c:numRef>
@@ -711,12 +534,15 @@
         <c:auto val="1"/>
         <c:lblAlgn val="ctr"/>
         <c:lblOffset val="100"/>
+        <c:tickLblSkip val="2"/>
         <c:noMultiLvlLbl val="0"/>
       </c:catAx>
       <c:valAx>
         <c:axId val="-2100718248"/>
         <c:scaling>
           <c:orientation val="minMax"/>
+          <c:max val="40000.0"/>
+          <c:min val="0.0"/>
         </c:scaling>
         <c:delete val="0"/>
         <c:axPos val="l"/>
@@ -750,6 +576,7 @@
         <c:crossAx val="-2101159928"/>
         <c:crosses val="autoZero"/>
         <c:crossBetween val="midCat"/>
+        <c:majorUnit val="10000.0"/>
       </c:valAx>
     </c:plotArea>
     <c:plotVisOnly val="1"/>
@@ -772,6 +599,1950 @@
     <c:autoUpdate val="0"/>
   </c:externalData>
 </c:chartSpace>
+</file>
+
+<file path=ppt/charts/chart3.xml><?xml version="1.0" encoding="utf-8"?>
+<c:chartSpace xmlns:c="http://schemas.openxmlformats.org/drawingml/2006/chart" xmlns:a="http://schemas.openxmlformats.org/drawingml/2006/main" xmlns:r="http://schemas.openxmlformats.org/officeDocument/2006/relationships">
+  <c:date1904 val="0"/>
+  <c:roundedCorners val="0"/>
+  <c:chart>
+    <c:autoTitleDeleted val="1"/>
+    <c:plotArea>
+      <c:layout>
+        <c:manualLayout>
+          <c:layoutTarget val="inner"/>
+          <c:xMode val="edge"/>
+          <c:yMode val="edge"/>
+          <c:x val="0.11"/>
+          <c:y val="0.05"/>
+          <c:w val="0.86"/>
+          <c:h val="0.8"/>
+        </c:manualLayout>
+      </c:layout>
+      <c:areaChart>
+        <c:grouping val="standard"/>
+        <c:varyColors val="0"/>
+        <c:ser>
+          <c:idx val="0"/>
+          <c:order val="0"/>
+          <c:tx>
+            <c:strRef>
+              <c:f>Sheet1!$B$1</c:f>
+              <c:strCache>
+                <c:ptCount val="1"/>
+                <c:pt idx="0">
+                  <c:v>Spend $</c:v>
+                </c:pt>
+              </c:strCache>
+            </c:strRef>
+          </c:tx>
+          <c:spPr>
+            <a:solidFill>
+              <a:srgbClr val="0E9F6E">
+                <a:alpha val="25000"/>
+              </a:srgbClr>
+            </a:solidFill>
+            <a:ln w="31750">
+              <a:solidFill>
+                <a:srgbClr val="0E9F6E"/>
+              </a:solidFill>
+            </a:ln>
+          </c:spPr>
+          <c:cat>
+            <c:strRef>
+              <c:f>Sheet1!$A$2:$A$19</c:f>
+              <c:strCache>
+                <c:ptCount val="18"/>
+                <c:pt idx="0">
+                  <c:v>Oct 24</c:v>
+                </c:pt>
+                <c:pt idx="1">
+                  <c:v>Nov 24</c:v>
+                </c:pt>
+                <c:pt idx="2">
+                  <c:v>Dec 24</c:v>
+                </c:pt>
+                <c:pt idx="3">
+                  <c:v>Jan 25</c:v>
+                </c:pt>
+                <c:pt idx="4">
+                  <c:v>Feb 25</c:v>
+                </c:pt>
+                <c:pt idx="5">
+                  <c:v>Mar 25</c:v>
+                </c:pt>
+                <c:pt idx="6">
+                  <c:v>Apr 25</c:v>
+                </c:pt>
+                <c:pt idx="7">
+                  <c:v>May 25</c:v>
+                </c:pt>
+                <c:pt idx="8">
+                  <c:v>Jun 25</c:v>
+                </c:pt>
+                <c:pt idx="9">
+                  <c:v>Jul 25</c:v>
+                </c:pt>
+                <c:pt idx="10">
+                  <c:v>Aug 25</c:v>
+                </c:pt>
+                <c:pt idx="11">
+                  <c:v>Sep 25</c:v>
+                </c:pt>
+                <c:pt idx="12">
+                  <c:v>Oct 25</c:v>
+                </c:pt>
+                <c:pt idx="13">
+                  <c:v>Nov 25</c:v>
+                </c:pt>
+                <c:pt idx="14">
+                  <c:v>Dec 25</c:v>
+                </c:pt>
+                <c:pt idx="15">
+                  <c:v>Jan 26</c:v>
+                </c:pt>
+                <c:pt idx="16">
+                  <c:v>Feb 26</c:v>
+                </c:pt>
+                <c:pt idx="17">
+                  <c:v>Mar 26</c:v>
+                </c:pt>
+              </c:strCache>
+            </c:strRef>
+          </c:cat>
+          <c:val>
+            <c:numRef>
+              <c:f>Sheet1!$B$2:$B$19</c:f>
+              <c:numCache>
+                <c:formatCode>$#,##0;[Red]($#,##0);"-"</c:formatCode>
+                <c:ptCount val="18"/>
+                <c:pt idx="0">
+                  <c:v>0</c:v>
+                </c:pt>
+                <c:pt idx="1">
+                  <c:v>0</c:v>
+                </c:pt>
+                <c:pt idx="2">
+                  <c:v>0</c:v>
+                </c:pt>
+                <c:pt idx="3">
+                  <c:v>0</c:v>
+                </c:pt>
+                <c:pt idx="4">
+                  <c:v>0</c:v>
+                </c:pt>
+                <c:pt idx="5">
+                  <c:v>0</c:v>
+                </c:pt>
+                <c:pt idx="6">
+                  <c:v>0</c:v>
+                </c:pt>
+                <c:pt idx="7">
+                  <c:v>0</c:v>
+                </c:pt>
+                <c:pt idx="8">
+                  <c:v>0</c:v>
+                </c:pt>
+                <c:pt idx="9">
+                  <c:v>17363</c:v>
+                </c:pt>
+                <c:pt idx="10">
+                  <c:v>21144</c:v>
+                </c:pt>
+                <c:pt idx="11">
+                  <c:v>17537</c:v>
+                </c:pt>
+                <c:pt idx="12">
+                  <c:v>21925</c:v>
+                </c:pt>
+                <c:pt idx="13">
+                  <c:v>21079</c:v>
+                </c:pt>
+                <c:pt idx="14">
+                  <c:v>19272</c:v>
+                </c:pt>
+                <c:pt idx="15">
+                  <c:v>21157</c:v>
+                </c:pt>
+                <c:pt idx="16">
+                  <c:v>20743</c:v>
+                </c:pt>
+                <c:pt idx="17">
+                  <c:v>16515</c:v>
+                </c:pt>
+              </c:numCache>
+            </c:numRef>
+          </c:val>
+        </c:ser>
+        <c:dLbls>
+          <c:showLegendKey val="0"/>
+          <c:showVal val="0"/>
+          <c:showCatName val="0"/>
+          <c:showSerName val="0"/>
+          <c:showPercent val="0"/>
+          <c:showBubbleSize val="0"/>
+        </c:dLbls>
+        <c:axId val="-2101159928"/>
+        <c:axId val="-2100718248"/>
+      </c:areaChart>
+      <c:catAx>
+        <c:axId val="-2101159928"/>
+        <c:scaling>
+          <c:orientation val="minMax"/>
+        </c:scaling>
+        <c:delete val="0"/>
+        <c:axPos val="b"/>
+        <c:numFmt formatCode="General" sourceLinked="1"/>
+        <c:majorTickMark val="out"/>
+        <c:minorTickMark val="none"/>
+        <c:tickLblPos val="nextTo"/>
+        <c:txPr>
+          <a:bodyPr/>
+          <a:lstStyle/>
+          <a:p>
+            <a:pPr>
+              <a:defRPr sz="1000"/>
+            </a:pPr>
+          </a:p>
+        </c:txPr>
+        <c:crossAx val="-2100718248"/>
+        <c:crosses val="autoZero"/>
+        <c:auto val="1"/>
+        <c:lblAlgn val="ctr"/>
+        <c:lblOffset val="100"/>
+        <c:tickLblSkip val="2"/>
+        <c:noMultiLvlLbl val="0"/>
+      </c:catAx>
+      <c:valAx>
+        <c:axId val="-2100718248"/>
+        <c:scaling>
+          <c:orientation val="minMax"/>
+          <c:max val="25000.0"/>
+          <c:min val="0.0"/>
+        </c:scaling>
+        <c:delete val="0"/>
+        <c:axPos val="l"/>
+        <c:majorGridlines>
+          <c:spPr>
+            <a:ln>
+              <a:solidFill>
+                <a:srgbClr val="E6EAE7"/>
+              </a:solidFill>
+            </a:ln>
+          </c:spPr>
+        </c:majorGridlines>
+        <c:numFmt formatCode="$#,##0;[Red]($#,##0);&quot;-&quot;" sourceLinked="0"/>
+        <c:majorTickMark val="out"/>
+        <c:minorTickMark val="none"/>
+        <c:tickLblPos val="nextTo"/>
+        <c:spPr>
+          <a:ln>
+            <a:noFill/>
+          </a:ln>
+        </c:spPr>
+        <c:txPr>
+          <a:bodyPr/>
+          <a:lstStyle/>
+          <a:p>
+            <a:pPr>
+              <a:defRPr sz="1000"/>
+            </a:pPr>
+          </a:p>
+        </c:txPr>
+        <c:crossAx val="-2101159928"/>
+        <c:crosses val="autoZero"/>
+        <c:crossBetween val="midCat"/>
+        <c:majorUnit val="5000.0"/>
+      </c:valAx>
+    </c:plotArea>
+    <c:plotVisOnly val="1"/>
+    <c:dispBlanksAs val="zero"/>
+    <c:showDLblsOverMax val="0"/>
+  </c:chart>
+  <c:txPr>
+    <a:bodyPr/>
+    <a:lstStyle/>
+    <a:p>
+      <a:pPr>
+        <a:defRPr sz="1800">
+          <a:latin typeface="Roboto"/>
+        </a:defRPr>
+      </a:pPr>
+      <a:endParaRPr/>
+    </a:p>
+  </c:txPr>
+  <c:externalData r:id="rId1">
+    <c:autoUpdate val="0"/>
+  </c:externalData>
+</c:chartSpace>
+</file>
+
+<file path=ppt/charts/chart4.xml><?xml version="1.0" encoding="utf-8"?>
+<c:chartSpace xmlns:c="http://schemas.openxmlformats.org/drawingml/2006/chart" xmlns:a="http://schemas.openxmlformats.org/drawingml/2006/main" xmlns:r="http://schemas.openxmlformats.org/officeDocument/2006/relationships">
+  <c:date1904 val="0"/>
+  <c:roundedCorners val="0"/>
+  <c:chart>
+    <c:autoTitleDeleted val="1"/>
+    <c:plotArea>
+      <c:layout>
+        <c:manualLayout>
+          <c:layoutTarget val="inner"/>
+          <c:xMode val="edge"/>
+          <c:yMode val="edge"/>
+          <c:x val="0.11"/>
+          <c:y val="0.05"/>
+          <c:w val="0.86"/>
+          <c:h val="0.8"/>
+        </c:manualLayout>
+      </c:layout>
+      <c:areaChart>
+        <c:grouping val="standard"/>
+        <c:varyColors val="0"/>
+        <c:ser>
+          <c:idx val="0"/>
+          <c:order val="0"/>
+          <c:tx>
+            <c:strRef>
+              <c:f>Sheet1!$B$1</c:f>
+              <c:strCache>
+                <c:ptCount val="1"/>
+                <c:pt idx="0">
+                  <c:v>Spend $</c:v>
+                </c:pt>
+              </c:strCache>
+            </c:strRef>
+          </c:tx>
+          <c:spPr>
+            <a:solidFill>
+              <a:srgbClr val="0E9F6E">
+                <a:alpha val="25000"/>
+              </a:srgbClr>
+            </a:solidFill>
+            <a:ln w="31750">
+              <a:solidFill>
+                <a:srgbClr val="0E9F6E"/>
+              </a:solidFill>
+            </a:ln>
+          </c:spPr>
+          <c:cat>
+            <c:strRef>
+              <c:f>Sheet1!$A$2:$A$19</c:f>
+              <c:strCache>
+                <c:ptCount val="18"/>
+                <c:pt idx="0">
+                  <c:v>Oct 24</c:v>
+                </c:pt>
+                <c:pt idx="1">
+                  <c:v>Nov 24</c:v>
+                </c:pt>
+                <c:pt idx="2">
+                  <c:v>Dec 24</c:v>
+                </c:pt>
+                <c:pt idx="3">
+                  <c:v>Jan 25</c:v>
+                </c:pt>
+                <c:pt idx="4">
+                  <c:v>Feb 25</c:v>
+                </c:pt>
+                <c:pt idx="5">
+                  <c:v>Mar 25</c:v>
+                </c:pt>
+                <c:pt idx="6">
+                  <c:v>Apr 25</c:v>
+                </c:pt>
+                <c:pt idx="7">
+                  <c:v>May 25</c:v>
+                </c:pt>
+                <c:pt idx="8">
+                  <c:v>Jun 25</c:v>
+                </c:pt>
+                <c:pt idx="9">
+                  <c:v>Jul 25</c:v>
+                </c:pt>
+                <c:pt idx="10">
+                  <c:v>Aug 25</c:v>
+                </c:pt>
+                <c:pt idx="11">
+                  <c:v>Sep 25</c:v>
+                </c:pt>
+                <c:pt idx="12">
+                  <c:v>Oct 25</c:v>
+                </c:pt>
+                <c:pt idx="13">
+                  <c:v>Nov 25</c:v>
+                </c:pt>
+                <c:pt idx="14">
+                  <c:v>Dec 25</c:v>
+                </c:pt>
+                <c:pt idx="15">
+                  <c:v>Jan 26</c:v>
+                </c:pt>
+                <c:pt idx="16">
+                  <c:v>Feb 26</c:v>
+                </c:pt>
+                <c:pt idx="17">
+                  <c:v>Mar 26</c:v>
+                </c:pt>
+              </c:strCache>
+            </c:strRef>
+          </c:cat>
+          <c:val>
+            <c:numRef>
+              <c:f>Sheet1!$B$2:$B$19</c:f>
+              <c:numCache>
+                <c:formatCode>$#,##0;[Red]($#,##0);"-"</c:formatCode>
+                <c:ptCount val="18"/>
+                <c:pt idx="0">
+                  <c:v>0</c:v>
+                </c:pt>
+                <c:pt idx="1">
+                  <c:v>0</c:v>
+                </c:pt>
+                <c:pt idx="2">
+                  <c:v>0</c:v>
+                </c:pt>
+                <c:pt idx="3">
+                  <c:v>0</c:v>
+                </c:pt>
+                <c:pt idx="4">
+                  <c:v>0</c:v>
+                </c:pt>
+                <c:pt idx="5">
+                  <c:v>0</c:v>
+                </c:pt>
+                <c:pt idx="6">
+                  <c:v>0</c:v>
+                </c:pt>
+                <c:pt idx="7">
+                  <c:v>0</c:v>
+                </c:pt>
+                <c:pt idx="8">
+                  <c:v>0</c:v>
+                </c:pt>
+                <c:pt idx="9">
+                  <c:v>0</c:v>
+                </c:pt>
+                <c:pt idx="10">
+                  <c:v>0</c:v>
+                </c:pt>
+                <c:pt idx="11">
+                  <c:v>0</c:v>
+                </c:pt>
+                <c:pt idx="12">
+                  <c:v>5160</c:v>
+                </c:pt>
+                <c:pt idx="13">
+                  <c:v>4585</c:v>
+                </c:pt>
+                <c:pt idx="14">
+                  <c:v>5221</c:v>
+                </c:pt>
+                <c:pt idx="15">
+                  <c:v>4426</c:v>
+                </c:pt>
+                <c:pt idx="16">
+                  <c:v>5408</c:v>
+                </c:pt>
+                <c:pt idx="17">
+                  <c:v>5427</c:v>
+                </c:pt>
+              </c:numCache>
+            </c:numRef>
+          </c:val>
+        </c:ser>
+        <c:dLbls>
+          <c:showLegendKey val="0"/>
+          <c:showVal val="0"/>
+          <c:showCatName val="0"/>
+          <c:showSerName val="0"/>
+          <c:showPercent val="0"/>
+          <c:showBubbleSize val="0"/>
+        </c:dLbls>
+        <c:axId val="-2101159928"/>
+        <c:axId val="-2100718248"/>
+      </c:areaChart>
+      <c:catAx>
+        <c:axId val="-2101159928"/>
+        <c:scaling>
+          <c:orientation val="minMax"/>
+        </c:scaling>
+        <c:delete val="0"/>
+        <c:axPos val="b"/>
+        <c:numFmt formatCode="General" sourceLinked="1"/>
+        <c:majorTickMark val="out"/>
+        <c:minorTickMark val="none"/>
+        <c:tickLblPos val="nextTo"/>
+        <c:txPr>
+          <a:bodyPr/>
+          <a:lstStyle/>
+          <a:p>
+            <a:pPr>
+              <a:defRPr sz="1000"/>
+            </a:pPr>
+          </a:p>
+        </c:txPr>
+        <c:crossAx val="-2100718248"/>
+        <c:crosses val="autoZero"/>
+        <c:auto val="1"/>
+        <c:lblAlgn val="ctr"/>
+        <c:lblOffset val="100"/>
+        <c:tickLblSkip val="2"/>
+        <c:noMultiLvlLbl val="0"/>
+      </c:catAx>
+      <c:valAx>
+        <c:axId val="-2100718248"/>
+        <c:scaling>
+          <c:orientation val="minMax"/>
+          <c:max val="6000.0"/>
+          <c:min val="0.0"/>
+        </c:scaling>
+        <c:delete val="0"/>
+        <c:axPos val="l"/>
+        <c:majorGridlines>
+          <c:spPr>
+            <a:ln>
+              <a:solidFill>
+                <a:srgbClr val="E6EAE7"/>
+              </a:solidFill>
+            </a:ln>
+          </c:spPr>
+        </c:majorGridlines>
+        <c:numFmt formatCode="$#,##0;[Red]($#,##0);&quot;-&quot;" sourceLinked="0"/>
+        <c:majorTickMark val="out"/>
+        <c:minorTickMark val="none"/>
+        <c:tickLblPos val="nextTo"/>
+        <c:spPr>
+          <a:ln>
+            <a:noFill/>
+          </a:ln>
+        </c:spPr>
+        <c:txPr>
+          <a:bodyPr/>
+          <a:lstStyle/>
+          <a:p>
+            <a:pPr>
+              <a:defRPr sz="1000"/>
+            </a:pPr>
+          </a:p>
+        </c:txPr>
+        <c:crossAx val="-2101159928"/>
+        <c:crosses val="autoZero"/>
+        <c:crossBetween val="midCat"/>
+        <c:majorUnit val="2000.0"/>
+      </c:valAx>
+    </c:plotArea>
+    <c:plotVisOnly val="1"/>
+    <c:dispBlanksAs val="zero"/>
+    <c:showDLblsOverMax val="0"/>
+  </c:chart>
+  <c:txPr>
+    <a:bodyPr/>
+    <a:lstStyle/>
+    <a:p>
+      <a:pPr>
+        <a:defRPr sz="1800">
+          <a:latin typeface="Roboto"/>
+        </a:defRPr>
+      </a:pPr>
+      <a:endParaRPr/>
+    </a:p>
+  </c:txPr>
+  <c:externalData r:id="rId1">
+    <c:autoUpdate val="0"/>
+  </c:externalData>
+</c:chartSpace>
+</file>
+
+<file path=ppt/charts/chart5.xml><?xml version="1.0" encoding="utf-8"?>
+<c:chartSpace xmlns:c="http://schemas.openxmlformats.org/drawingml/2006/chart" xmlns:a="http://schemas.openxmlformats.org/drawingml/2006/main" xmlns:r="http://schemas.openxmlformats.org/officeDocument/2006/relationships">
+  <c:date1904 val="0"/>
+  <c:roundedCorners val="0"/>
+  <c:chart>
+    <c:autoTitleDeleted val="1"/>
+    <c:plotArea>
+      <c:layout>
+        <c:manualLayout>
+          <c:layoutTarget val="inner"/>
+          <c:xMode val="edge"/>
+          <c:yMode val="edge"/>
+          <c:x val="0.11"/>
+          <c:y val="0.05"/>
+          <c:w val="0.86"/>
+          <c:h val="0.8"/>
+        </c:manualLayout>
+      </c:layout>
+      <c:areaChart>
+        <c:grouping val="standard"/>
+        <c:varyColors val="0"/>
+        <c:ser>
+          <c:idx val="0"/>
+          <c:order val="0"/>
+          <c:tx>
+            <c:strRef>
+              <c:f>Sheet1!$B$1</c:f>
+              <c:strCache>
+                <c:ptCount val="1"/>
+                <c:pt idx="0">
+                  <c:v>Spend $</c:v>
+                </c:pt>
+              </c:strCache>
+            </c:strRef>
+          </c:tx>
+          <c:spPr>
+            <a:solidFill>
+              <a:srgbClr val="0E9F6E">
+                <a:alpha val="25000"/>
+              </a:srgbClr>
+            </a:solidFill>
+            <a:ln w="31750">
+              <a:solidFill>
+                <a:srgbClr val="0E9F6E"/>
+              </a:solidFill>
+            </a:ln>
+          </c:spPr>
+          <c:cat>
+            <c:strRef>
+              <c:f>Sheet1!$A$2:$A$19</c:f>
+              <c:strCache>
+                <c:ptCount val="18"/>
+                <c:pt idx="0">
+                  <c:v>Oct 24</c:v>
+                </c:pt>
+                <c:pt idx="1">
+                  <c:v>Nov 24</c:v>
+                </c:pt>
+                <c:pt idx="2">
+                  <c:v>Dec 24</c:v>
+                </c:pt>
+                <c:pt idx="3">
+                  <c:v>Jan 25</c:v>
+                </c:pt>
+                <c:pt idx="4">
+                  <c:v>Feb 25</c:v>
+                </c:pt>
+                <c:pt idx="5">
+                  <c:v>Mar 25</c:v>
+                </c:pt>
+                <c:pt idx="6">
+                  <c:v>Apr 25</c:v>
+                </c:pt>
+                <c:pt idx="7">
+                  <c:v>May 25</c:v>
+                </c:pt>
+                <c:pt idx="8">
+                  <c:v>Jun 25</c:v>
+                </c:pt>
+                <c:pt idx="9">
+                  <c:v>Jul 25</c:v>
+                </c:pt>
+                <c:pt idx="10">
+                  <c:v>Aug 25</c:v>
+                </c:pt>
+                <c:pt idx="11">
+                  <c:v>Sep 25</c:v>
+                </c:pt>
+                <c:pt idx="12">
+                  <c:v>Oct 25</c:v>
+                </c:pt>
+                <c:pt idx="13">
+                  <c:v>Nov 25</c:v>
+                </c:pt>
+                <c:pt idx="14">
+                  <c:v>Dec 25</c:v>
+                </c:pt>
+                <c:pt idx="15">
+                  <c:v>Jan 26</c:v>
+                </c:pt>
+                <c:pt idx="16">
+                  <c:v>Feb 26</c:v>
+                </c:pt>
+                <c:pt idx="17">
+                  <c:v>Mar 26</c:v>
+                </c:pt>
+              </c:strCache>
+            </c:strRef>
+          </c:cat>
+          <c:val>
+            <c:numRef>
+              <c:f>Sheet1!$B$2:$B$19</c:f>
+              <c:numCache>
+                <c:formatCode>$#,##0;[Red]($#,##0);"-"</c:formatCode>
+                <c:ptCount val="18"/>
+                <c:pt idx="0">
+                  <c:v>0</c:v>
+                </c:pt>
+                <c:pt idx="1">
+                  <c:v>0</c:v>
+                </c:pt>
+                <c:pt idx="2">
+                  <c:v>0</c:v>
+                </c:pt>
+                <c:pt idx="3">
+                  <c:v>0</c:v>
+                </c:pt>
+                <c:pt idx="4">
+                  <c:v>0</c:v>
+                </c:pt>
+                <c:pt idx="5">
+                  <c:v>0</c:v>
+                </c:pt>
+                <c:pt idx="6">
+                  <c:v>0</c:v>
+                </c:pt>
+                <c:pt idx="7">
+                  <c:v>0</c:v>
+                </c:pt>
+                <c:pt idx="8">
+                  <c:v>0</c:v>
+                </c:pt>
+                <c:pt idx="9">
+                  <c:v>3400</c:v>
+                </c:pt>
+                <c:pt idx="10">
+                  <c:v>3500</c:v>
+                </c:pt>
+                <c:pt idx="11">
+                  <c:v>4000</c:v>
+                </c:pt>
+                <c:pt idx="12">
+                  <c:v>3200</c:v>
+                </c:pt>
+                <c:pt idx="13">
+                  <c:v>3100</c:v>
+                </c:pt>
+                <c:pt idx="14">
+                  <c:v>3800</c:v>
+                </c:pt>
+                <c:pt idx="15">
+                  <c:v>3700</c:v>
+                </c:pt>
+                <c:pt idx="16">
+                  <c:v>3100</c:v>
+                </c:pt>
+                <c:pt idx="17">
+                  <c:v>4100</c:v>
+                </c:pt>
+              </c:numCache>
+            </c:numRef>
+          </c:val>
+        </c:ser>
+        <c:dLbls>
+          <c:showLegendKey val="0"/>
+          <c:showVal val="0"/>
+          <c:showCatName val="0"/>
+          <c:showSerName val="0"/>
+          <c:showPercent val="0"/>
+          <c:showBubbleSize val="0"/>
+        </c:dLbls>
+        <c:axId val="-2101159928"/>
+        <c:axId val="-2100718248"/>
+      </c:areaChart>
+      <c:catAx>
+        <c:axId val="-2101159928"/>
+        <c:scaling>
+          <c:orientation val="minMax"/>
+        </c:scaling>
+        <c:delete val="0"/>
+        <c:axPos val="b"/>
+        <c:numFmt formatCode="General" sourceLinked="1"/>
+        <c:majorTickMark val="out"/>
+        <c:minorTickMark val="none"/>
+        <c:tickLblPos val="nextTo"/>
+        <c:txPr>
+          <a:bodyPr/>
+          <a:lstStyle/>
+          <a:p>
+            <a:pPr>
+              <a:defRPr sz="1000"/>
+            </a:pPr>
+          </a:p>
+        </c:txPr>
+        <c:crossAx val="-2100718248"/>
+        <c:crosses val="autoZero"/>
+        <c:auto val="1"/>
+        <c:lblAlgn val="ctr"/>
+        <c:lblOffset val="100"/>
+        <c:tickLblSkip val="2"/>
+        <c:noMultiLvlLbl val="0"/>
+      </c:catAx>
+      <c:valAx>
+        <c:axId val="-2100718248"/>
+        <c:scaling>
+          <c:orientation val="minMax"/>
+          <c:max val="5000.0"/>
+          <c:min val="0.0"/>
+        </c:scaling>
+        <c:delete val="0"/>
+        <c:axPos val="l"/>
+        <c:majorGridlines>
+          <c:spPr>
+            <a:ln>
+              <a:solidFill>
+                <a:srgbClr val="E6EAE7"/>
+              </a:solidFill>
+            </a:ln>
+          </c:spPr>
+        </c:majorGridlines>
+        <c:numFmt formatCode="$#,##0;[Red]($#,##0);&quot;-&quot;" sourceLinked="0"/>
+        <c:majorTickMark val="out"/>
+        <c:minorTickMark val="none"/>
+        <c:tickLblPos val="nextTo"/>
+        <c:spPr>
+          <a:ln>
+            <a:noFill/>
+          </a:ln>
+        </c:spPr>
+        <c:txPr>
+          <a:bodyPr/>
+          <a:lstStyle/>
+          <a:p>
+            <a:pPr>
+              <a:defRPr sz="1000"/>
+            </a:pPr>
+          </a:p>
+        </c:txPr>
+        <c:crossAx val="-2101159928"/>
+        <c:crosses val="autoZero"/>
+        <c:crossBetween val="midCat"/>
+        <c:majorUnit val="1000.0"/>
+      </c:valAx>
+    </c:plotArea>
+    <c:plotVisOnly val="1"/>
+    <c:dispBlanksAs val="zero"/>
+    <c:showDLblsOverMax val="0"/>
+  </c:chart>
+  <c:txPr>
+    <a:bodyPr/>
+    <a:lstStyle/>
+    <a:p>
+      <a:pPr>
+        <a:defRPr sz="1800">
+          <a:latin typeface="Roboto"/>
+        </a:defRPr>
+      </a:pPr>
+      <a:endParaRPr/>
+    </a:p>
+  </c:txPr>
+  <c:externalData r:id="rId1">
+    <c:autoUpdate val="0"/>
+  </c:externalData>
+</c:chartSpace>
+</file>
+
+<file path=ppt/charts/chart6.xml><?xml version="1.0" encoding="utf-8"?>
+<c:chartSpace xmlns:c="http://schemas.openxmlformats.org/drawingml/2006/chart" xmlns:a="http://schemas.openxmlformats.org/drawingml/2006/main" xmlns:r="http://schemas.openxmlformats.org/officeDocument/2006/relationships">
+  <c:date1904 val="0"/>
+  <c:roundedCorners val="0"/>
+  <c:chart>
+    <c:autoTitleDeleted val="1"/>
+    <c:plotArea>
+      <c:layout>
+        <c:manualLayout>
+          <c:layoutTarget val="inner"/>
+          <c:xMode val="edge"/>
+          <c:yMode val="edge"/>
+          <c:x val="0.11"/>
+          <c:y val="0.05"/>
+          <c:w val="0.86"/>
+          <c:h val="0.8"/>
+        </c:manualLayout>
+      </c:layout>
+      <c:areaChart>
+        <c:grouping val="standard"/>
+        <c:varyColors val="0"/>
+        <c:ser>
+          <c:idx val="0"/>
+          <c:order val="0"/>
+          <c:tx>
+            <c:strRef>
+              <c:f>Sheet1!$B$1</c:f>
+              <c:strCache>
+                <c:ptCount val="1"/>
+                <c:pt idx="0">
+                  <c:v>Spend $</c:v>
+                </c:pt>
+              </c:strCache>
+            </c:strRef>
+          </c:tx>
+          <c:spPr>
+            <a:solidFill>
+              <a:srgbClr val="0E9F6E">
+                <a:alpha val="25000"/>
+              </a:srgbClr>
+            </a:solidFill>
+            <a:ln w="31750">
+              <a:solidFill>
+                <a:srgbClr val="0E9F6E"/>
+              </a:solidFill>
+            </a:ln>
+          </c:spPr>
+          <c:cat>
+            <c:strRef>
+              <c:f>Sheet1!$A$2:$A$19</c:f>
+              <c:strCache>
+                <c:ptCount val="18"/>
+                <c:pt idx="0">
+                  <c:v>Oct 24</c:v>
+                </c:pt>
+                <c:pt idx="1">
+                  <c:v>Nov 24</c:v>
+                </c:pt>
+                <c:pt idx="2">
+                  <c:v>Dec 24</c:v>
+                </c:pt>
+                <c:pt idx="3">
+                  <c:v>Jan 25</c:v>
+                </c:pt>
+                <c:pt idx="4">
+                  <c:v>Feb 25</c:v>
+                </c:pt>
+                <c:pt idx="5">
+                  <c:v>Mar 25</c:v>
+                </c:pt>
+                <c:pt idx="6">
+                  <c:v>Apr 25</c:v>
+                </c:pt>
+                <c:pt idx="7">
+                  <c:v>May 25</c:v>
+                </c:pt>
+                <c:pt idx="8">
+                  <c:v>Jun 25</c:v>
+                </c:pt>
+                <c:pt idx="9">
+                  <c:v>Jul 25</c:v>
+                </c:pt>
+                <c:pt idx="10">
+                  <c:v>Aug 25</c:v>
+                </c:pt>
+                <c:pt idx="11">
+                  <c:v>Sep 25</c:v>
+                </c:pt>
+                <c:pt idx="12">
+                  <c:v>Oct 25</c:v>
+                </c:pt>
+                <c:pt idx="13">
+                  <c:v>Nov 25</c:v>
+                </c:pt>
+                <c:pt idx="14">
+                  <c:v>Dec 25</c:v>
+                </c:pt>
+                <c:pt idx="15">
+                  <c:v>Jan 26</c:v>
+                </c:pt>
+                <c:pt idx="16">
+                  <c:v>Feb 26</c:v>
+                </c:pt>
+                <c:pt idx="17">
+                  <c:v>Mar 26</c:v>
+                </c:pt>
+              </c:strCache>
+            </c:strRef>
+          </c:cat>
+          <c:val>
+            <c:numRef>
+              <c:f>Sheet1!$B$2:$B$19</c:f>
+              <c:numCache>
+                <c:formatCode>$#,##0;[Red]($#,##0);"-"</c:formatCode>
+                <c:ptCount val="18"/>
+                <c:pt idx="0">
+                  <c:v>0</c:v>
+                </c:pt>
+                <c:pt idx="1">
+                  <c:v>0</c:v>
+                </c:pt>
+                <c:pt idx="2">
+                  <c:v>0</c:v>
+                </c:pt>
+                <c:pt idx="3">
+                  <c:v>0</c:v>
+                </c:pt>
+                <c:pt idx="4">
+                  <c:v>0</c:v>
+                </c:pt>
+                <c:pt idx="5">
+                  <c:v>0</c:v>
+                </c:pt>
+                <c:pt idx="6">
+                  <c:v>0</c:v>
+                </c:pt>
+                <c:pt idx="7">
+                  <c:v>0</c:v>
+                </c:pt>
+                <c:pt idx="8">
+                  <c:v>0</c:v>
+                </c:pt>
+                <c:pt idx="9">
+                  <c:v>0</c:v>
+                </c:pt>
+                <c:pt idx="10">
+                  <c:v>0</c:v>
+                </c:pt>
+                <c:pt idx="11">
+                  <c:v>0</c:v>
+                </c:pt>
+                <c:pt idx="12">
+                  <c:v>0</c:v>
+                </c:pt>
+                <c:pt idx="13">
+                  <c:v>0</c:v>
+                </c:pt>
+                <c:pt idx="14">
+                  <c:v>0</c:v>
+                </c:pt>
+                <c:pt idx="15">
+                  <c:v>0</c:v>
+                </c:pt>
+                <c:pt idx="16">
+                  <c:v>0</c:v>
+                </c:pt>
+                <c:pt idx="17">
+                  <c:v>2932</c:v>
+                </c:pt>
+              </c:numCache>
+            </c:numRef>
+          </c:val>
+        </c:ser>
+        <c:dLbls>
+          <c:showLegendKey val="0"/>
+          <c:showVal val="0"/>
+          <c:showCatName val="0"/>
+          <c:showSerName val="0"/>
+          <c:showPercent val="0"/>
+          <c:showBubbleSize val="0"/>
+        </c:dLbls>
+        <c:axId val="-2101159928"/>
+        <c:axId val="-2100718248"/>
+      </c:areaChart>
+      <c:catAx>
+        <c:axId val="-2101159928"/>
+        <c:scaling>
+          <c:orientation val="minMax"/>
+        </c:scaling>
+        <c:delete val="0"/>
+        <c:axPos val="b"/>
+        <c:numFmt formatCode="General" sourceLinked="1"/>
+        <c:majorTickMark val="out"/>
+        <c:minorTickMark val="none"/>
+        <c:tickLblPos val="nextTo"/>
+        <c:txPr>
+          <a:bodyPr/>
+          <a:lstStyle/>
+          <a:p>
+            <a:pPr>
+              <a:defRPr sz="1000"/>
+            </a:pPr>
+          </a:p>
+        </c:txPr>
+        <c:crossAx val="-2100718248"/>
+        <c:crosses val="autoZero"/>
+        <c:auto val="1"/>
+        <c:lblAlgn val="ctr"/>
+        <c:lblOffset val="100"/>
+        <c:tickLblSkip val="2"/>
+        <c:noMultiLvlLbl val="0"/>
+      </c:catAx>
+      <c:valAx>
+        <c:axId val="-2100718248"/>
+        <c:scaling>
+          <c:orientation val="minMax"/>
+          <c:max val="4000.0"/>
+          <c:min val="0.0"/>
+        </c:scaling>
+        <c:delete val="0"/>
+        <c:axPos val="l"/>
+        <c:majorGridlines>
+          <c:spPr>
+            <a:ln>
+              <a:solidFill>
+                <a:srgbClr val="E6EAE7"/>
+              </a:solidFill>
+            </a:ln>
+          </c:spPr>
+        </c:majorGridlines>
+        <c:numFmt formatCode="$#,##0;[Red]($#,##0);&quot;-&quot;" sourceLinked="0"/>
+        <c:majorTickMark val="out"/>
+        <c:minorTickMark val="none"/>
+        <c:tickLblPos val="nextTo"/>
+        <c:spPr>
+          <a:ln>
+            <a:noFill/>
+          </a:ln>
+        </c:spPr>
+        <c:txPr>
+          <a:bodyPr/>
+          <a:lstStyle/>
+          <a:p>
+            <a:pPr>
+              <a:defRPr sz="1000"/>
+            </a:pPr>
+          </a:p>
+        </c:txPr>
+        <c:crossAx val="-2101159928"/>
+        <c:crosses val="autoZero"/>
+        <c:crossBetween val="midCat"/>
+        <c:majorUnit val="1000.0"/>
+      </c:valAx>
+    </c:plotArea>
+    <c:plotVisOnly val="1"/>
+    <c:dispBlanksAs val="zero"/>
+    <c:showDLblsOverMax val="0"/>
+  </c:chart>
+  <c:txPr>
+    <a:bodyPr/>
+    <a:lstStyle/>
+    <a:p>
+      <a:pPr>
+        <a:defRPr sz="1800">
+          <a:latin typeface="Roboto"/>
+        </a:defRPr>
+      </a:pPr>
+      <a:endParaRPr/>
+    </a:p>
+  </c:txPr>
+  <c:externalData r:id="rId1">
+    <c:autoUpdate val="0"/>
+  </c:externalData>
+</c:chartSpace>
+</file>
+
+<file path=ppt/notesMasters/notesMaster1.xml><?xml version="1.0" encoding="utf-8"?>
+<p:notesMaster xmlns:a="http://schemas.openxmlformats.org/drawingml/2006/main" xmlns:p="http://schemas.openxmlformats.org/presentationml/2006/main" xmlns:r="http://schemas.openxmlformats.org/officeDocument/2006/relationships">
+  <p:cSld>
+    <p:bg>
+      <p:bgRef idx="1001">
+        <a:schemeClr val="bg1"/>
+      </p:bgRef>
+    </p:bg>
+    <p:spTree>
+      <p:nvGrpSpPr>
+        <p:cNvPr id="1" name=""/>
+        <p:cNvGrpSpPr/>
+        <p:nvPr/>
+      </p:nvGrpSpPr>
+      <p:grpSpPr>
+        <a:xfrm>
+          <a:off x="0" y="0"/>
+          <a:ext cx="0" cy="0"/>
+          <a:chOff x="0" y="0"/>
+          <a:chExt cx="0" cy="0"/>
+        </a:xfrm>
+      </p:grpSpPr>
+      <p:sp>
+        <p:nvSpPr>
+          <p:cNvPr id="2" name="Header Placeholder 1"/>
+          <p:cNvSpPr>
+            <a:spLocks noGrp="1"/>
+          </p:cNvSpPr>
+          <p:nvPr>
+            <p:ph type="hdr" sz="quarter"/>
+          </p:nvPr>
+        </p:nvSpPr>
+        <p:spPr>
+          <a:xfrm>
+            <a:off x="0" y="0"/>
+            <a:ext cx="2971800" cy="457200"/>
+          </a:xfrm>
+          <a:prstGeom prst="rect">
+            <a:avLst/>
+          </a:prstGeom>
+        </p:spPr>
+        <p:txBody>
+          <a:bodyPr vert="horz" lIns="91440" tIns="45720" rIns="91440" bIns="45720" rtlCol="0"/>
+          <a:lstStyle>
+            <a:lvl1pPr algn="l">
+              <a:defRPr sz="1200"/>
+            </a:lvl1pPr>
+          </a:lstStyle>
+          <a:p>
+            <a:endParaRPr lang="en-US"/>
+          </a:p>
+        </p:txBody>
+      </p:sp>
+      <p:sp>
+        <p:nvSpPr>
+          <p:cNvPr id="3" name="Date Placeholder 2"/>
+          <p:cNvSpPr>
+            <a:spLocks noGrp="1"/>
+          </p:cNvSpPr>
+          <p:nvPr>
+            <p:ph type="dt" idx="1"/>
+          </p:nvPr>
+        </p:nvSpPr>
+        <p:spPr>
+          <a:xfrm>
+            <a:off x="3884613" y="0"/>
+            <a:ext cx="2971800" cy="457200"/>
+          </a:xfrm>
+          <a:prstGeom prst="rect">
+            <a:avLst/>
+          </a:prstGeom>
+        </p:spPr>
+        <p:txBody>
+          <a:bodyPr vert="horz" lIns="91440" tIns="45720" rIns="91440" bIns="45720" rtlCol="0"/>
+          <a:lstStyle>
+            <a:lvl1pPr algn="r">
+              <a:defRPr sz="1200"/>
+            </a:lvl1pPr>
+          </a:lstStyle>
+          <a:p>
+            <a:fld id="{0F89C1C7-3DCD-1040-A9CF-14679D8B5DDD}" type="datetimeFigureOut">
+              <a:rPr lang="en-US" smtClean="0"/>
+              <a:t>10/17/16</a:t>
+            </a:fld>
+            <a:endParaRPr lang="en-US"/>
+          </a:p>
+        </p:txBody>
+      </p:sp>
+      <p:sp>
+        <p:nvSpPr>
+          <p:cNvPr id="4" name="Slide Image Placeholder 3"/>
+          <p:cNvSpPr>
+            <a:spLocks noGrp="1" noRot="1" noChangeAspect="1"/>
+          </p:cNvSpPr>
+          <p:nvPr>
+            <p:ph type="sldImg" idx="2"/>
+          </p:nvPr>
+        </p:nvSpPr>
+        <p:spPr>
+          <a:xfrm>
+            <a:off x="1143000" y="685800"/>
+            <a:ext cx="4572000" cy="3429000"/>
+          </a:xfrm>
+          <a:prstGeom prst="rect">
+            <a:avLst/>
+          </a:prstGeom>
+          <a:noFill/>
+          <a:ln w="12700">
+            <a:solidFill>
+              <a:prstClr val="black"/>
+            </a:solidFill>
+          </a:ln>
+        </p:spPr>
+        <p:txBody>
+          <a:bodyPr vert="horz" lIns="91440" tIns="45720" rIns="91440" bIns="45720" rtlCol="0" anchor="ctr"/>
+          <a:lstStyle/>
+          <a:p>
+            <a:endParaRPr lang="en-US"/>
+          </a:p>
+        </p:txBody>
+      </p:sp>
+      <p:sp>
+        <p:nvSpPr>
+          <p:cNvPr id="5" name="Notes Placeholder 4"/>
+          <p:cNvSpPr>
+            <a:spLocks noGrp="1"/>
+          </p:cNvSpPr>
+          <p:nvPr>
+            <p:ph type="body" sz="quarter" idx="3"/>
+          </p:nvPr>
+        </p:nvSpPr>
+        <p:spPr>
+          <a:xfrm>
+            <a:off x="685800" y="4343400"/>
+            <a:ext cx="5486400" cy="4114800"/>
+          </a:xfrm>
+          <a:prstGeom prst="rect">
+            <a:avLst/>
+          </a:prstGeom>
+        </p:spPr>
+        <p:txBody>
+          <a:bodyPr vert="horz" lIns="91440" tIns="45720" rIns="91440" bIns="45720" rtlCol="0"/>
+          <a:lstStyle/>
+          <a:p>
+            <a:pPr lvl="0"/>
+            <a:r>
+              <a:rPr lang="en-US" smtClean="0"/>
+              <a:t>Click to edit Master text styles</a:t>
+            </a:r>
+          </a:p>
+          <a:p>
+            <a:pPr lvl="1"/>
+            <a:r>
+              <a:rPr lang="en-US" smtClean="0"/>
+              <a:t>Second level</a:t>
+            </a:r>
+          </a:p>
+          <a:p>
+            <a:pPr lvl="2"/>
+            <a:r>
+              <a:rPr lang="en-US" smtClean="0"/>
+              <a:t>Third level</a:t>
+            </a:r>
+          </a:p>
+          <a:p>
+            <a:pPr lvl="3"/>
+            <a:r>
+              <a:rPr lang="en-US" smtClean="0"/>
+              <a:t>Fourth level</a:t>
+            </a:r>
+          </a:p>
+          <a:p>
+            <a:pPr lvl="4"/>
+            <a:r>
+              <a:rPr lang="en-US" smtClean="0"/>
+              <a:t>Fifth level</a:t>
+            </a:r>
+            <a:endParaRPr lang="en-US"/>
+          </a:p>
+        </p:txBody>
+      </p:sp>
+      <p:sp>
+        <p:nvSpPr>
+          <p:cNvPr id="6" name="Footer Placeholder 5"/>
+          <p:cNvSpPr>
+            <a:spLocks noGrp="1"/>
+          </p:cNvSpPr>
+          <p:nvPr>
+            <p:ph type="ftr" sz="quarter" idx="4"/>
+          </p:nvPr>
+        </p:nvSpPr>
+        <p:spPr>
+          <a:xfrm>
+            <a:off x="0" y="8685213"/>
+            <a:ext cx="2971800" cy="457200"/>
+          </a:xfrm>
+          <a:prstGeom prst="rect">
+            <a:avLst/>
+          </a:prstGeom>
+        </p:spPr>
+        <p:txBody>
+          <a:bodyPr vert="horz" lIns="91440" tIns="45720" rIns="91440" bIns="45720" rtlCol="0" anchor="b"/>
+          <a:lstStyle>
+            <a:lvl1pPr algn="l">
+              <a:defRPr sz="1200"/>
+            </a:lvl1pPr>
+          </a:lstStyle>
+          <a:p>
+            <a:endParaRPr lang="en-US"/>
+          </a:p>
+        </p:txBody>
+      </p:sp>
+      <p:sp>
+        <p:nvSpPr>
+          <p:cNvPr id="7" name="Slide Number Placeholder 6"/>
+          <p:cNvSpPr>
+            <a:spLocks noGrp="1"/>
+          </p:cNvSpPr>
+          <p:nvPr>
+            <p:ph type="sldNum" sz="quarter" idx="5"/>
+          </p:nvPr>
+        </p:nvSpPr>
+        <p:spPr>
+          <a:xfrm>
+            <a:off x="3884613" y="8685213"/>
+            <a:ext cx="2971800" cy="457200"/>
+          </a:xfrm>
+          <a:prstGeom prst="rect">
+            <a:avLst/>
+          </a:prstGeom>
+        </p:spPr>
+        <p:txBody>
+          <a:bodyPr vert="horz" lIns="91440" tIns="45720" rIns="91440" bIns="45720" rtlCol="0" anchor="b"/>
+          <a:lstStyle>
+            <a:lvl1pPr algn="r">
+              <a:defRPr sz="1200"/>
+            </a:lvl1pPr>
+          </a:lstStyle>
+          <a:p>
+            <a:fld id="{BB5E49A5-4136-284D-997B-48E1D791AD67}" type="slidenum">
+              <a:rPr lang="en-US" smtClean="0"/>
+              <a:t>‹#›</a:t>
+            </a:fld>
+            <a:endParaRPr lang="en-US"/>
+          </a:p>
+        </p:txBody>
+      </p:sp>
+    </p:spTree>
+    <p:extLst>
+      <p:ext uri="{BB962C8B-B14F-4D97-AF65-F5344CB8AC3E}">
+        <p14:creationId xmlns:p14="http://schemas.microsoft.com/office/powerpoint/2010/main" val="2623252185"/>
+      </p:ext>
+    </p:extLst>
+  </p:cSld>
+  <p:clrMap bg1="lt1" tx1="dk1" bg2="lt2" tx2="dk2" accent1="accent1" accent2="accent2" accent3="accent3" accent4="accent4" accent5="accent5" accent6="accent6" hlink="hlink" folHlink="folHlink"/>
+  <p:notesStyle>
+    <a:lvl1pPr marL="0" algn="l" defTabSz="457200" rtl="0" eaLnBrk="1" latinLnBrk="0" hangingPunct="1">
+      <a:defRPr sz="1200" kern="1200">
+        <a:solidFill>
+          <a:schemeClr val="tx1"/>
+        </a:solidFill>
+        <a:latin typeface="+mn-lt"/>
+        <a:ea typeface="+mn-ea"/>
+        <a:cs typeface="+mn-cs"/>
+      </a:defRPr>
+    </a:lvl1pPr>
+    <a:lvl2pPr marL="457200" algn="l" defTabSz="457200" rtl="0" eaLnBrk="1" latinLnBrk="0" hangingPunct="1">
+      <a:defRPr sz="1200" kern="1200">
+        <a:solidFill>
+          <a:schemeClr val="tx1"/>
+        </a:solidFill>
+        <a:latin typeface="+mn-lt"/>
+        <a:ea typeface="+mn-ea"/>
+        <a:cs typeface="+mn-cs"/>
+      </a:defRPr>
+    </a:lvl2pPr>
+    <a:lvl3pPr marL="914400" algn="l" defTabSz="457200" rtl="0" eaLnBrk="1" latinLnBrk="0" hangingPunct="1">
+      <a:defRPr sz="1200" kern="1200">
+        <a:solidFill>
+          <a:schemeClr val="tx1"/>
+        </a:solidFill>
+        <a:latin typeface="+mn-lt"/>
+        <a:ea typeface="+mn-ea"/>
+        <a:cs typeface="+mn-cs"/>
+      </a:defRPr>
+    </a:lvl3pPr>
+    <a:lvl4pPr marL="1371600" algn="l" defTabSz="457200" rtl="0" eaLnBrk="1" latinLnBrk="0" hangingPunct="1">
+      <a:defRPr sz="1200" kern="1200">
+        <a:solidFill>
+          <a:schemeClr val="tx1"/>
+        </a:solidFill>
+        <a:latin typeface="+mn-lt"/>
+        <a:ea typeface="+mn-ea"/>
+        <a:cs typeface="+mn-cs"/>
+      </a:defRPr>
+    </a:lvl4pPr>
+    <a:lvl5pPr marL="1828800" algn="l" defTabSz="457200" rtl="0" eaLnBrk="1" latinLnBrk="0" hangingPunct="1">
+      <a:defRPr sz="1200" kern="1200">
+        <a:solidFill>
+          <a:schemeClr val="tx1"/>
+        </a:solidFill>
+        <a:latin typeface="+mn-lt"/>
+        <a:ea typeface="+mn-ea"/>
+        <a:cs typeface="+mn-cs"/>
+      </a:defRPr>
+    </a:lvl5pPr>
+    <a:lvl6pPr marL="2286000" algn="l" defTabSz="457200" rtl="0" eaLnBrk="1" latinLnBrk="0" hangingPunct="1">
+      <a:defRPr sz="1200" kern="1200">
+        <a:solidFill>
+          <a:schemeClr val="tx1"/>
+        </a:solidFill>
+        <a:latin typeface="+mn-lt"/>
+        <a:ea typeface="+mn-ea"/>
+        <a:cs typeface="+mn-cs"/>
+      </a:defRPr>
+    </a:lvl6pPr>
+    <a:lvl7pPr marL="2743200" algn="l" defTabSz="457200" rtl="0" eaLnBrk="1" latinLnBrk="0" hangingPunct="1">
+      <a:defRPr sz="1200" kern="1200">
+        <a:solidFill>
+          <a:schemeClr val="tx1"/>
+        </a:solidFill>
+        <a:latin typeface="+mn-lt"/>
+        <a:ea typeface="+mn-ea"/>
+        <a:cs typeface="+mn-cs"/>
+      </a:defRPr>
+    </a:lvl7pPr>
+    <a:lvl8pPr marL="3200400" algn="l" defTabSz="457200" rtl="0" eaLnBrk="1" latinLnBrk="0" hangingPunct="1">
+      <a:defRPr sz="1200" kern="1200">
+        <a:solidFill>
+          <a:schemeClr val="tx1"/>
+        </a:solidFill>
+        <a:latin typeface="+mn-lt"/>
+        <a:ea typeface="+mn-ea"/>
+        <a:cs typeface="+mn-cs"/>
+      </a:defRPr>
+    </a:lvl8pPr>
+    <a:lvl9pPr marL="3657600" algn="l" defTabSz="457200" rtl="0" eaLnBrk="1" latinLnBrk="0" hangingPunct="1">
+      <a:defRPr sz="1200" kern="1200">
+        <a:solidFill>
+          <a:schemeClr val="tx1"/>
+        </a:solidFill>
+        <a:latin typeface="+mn-lt"/>
+        <a:ea typeface="+mn-ea"/>
+        <a:cs typeface="+mn-cs"/>
+      </a:defRPr>
+    </a:lvl9pPr>
+  </p:notesStyle>
+</p:notesMaster>
+</file>
+
+<file path=ppt/notesSlides/notesSlide1.xml><?xml version="1.0" encoding="utf-8"?>
+<p:notes xmlns:a="http://schemas.openxmlformats.org/drawingml/2006/main" xmlns:p="http://schemas.openxmlformats.org/presentationml/2006/main" xmlns:r="http://schemas.openxmlformats.org/officeDocument/2006/relationships">
+  <p:cSld>
+    <p:spTree>
+      <p:nvGrpSpPr>
+        <p:cNvPr id="1" name=""/>
+        <p:cNvGrpSpPr/>
+        <p:nvPr/>
+      </p:nvGrpSpPr>
+      <p:grpSpPr>
+        <a:xfrm>
+          <a:off x="0" y="0"/>
+          <a:ext cx="0" cy="0"/>
+          <a:chOff x="0" y="0"/>
+          <a:chExt cx="0" cy="0"/>
+        </a:xfrm>
+      </p:grpSpPr>
+      <p:sp>
+        <p:nvSpPr>
+          <p:cNvPr id="2" name="Slide Image Placeholder 1"/>
+          <p:cNvSpPr>
+            <a:spLocks noGrp="1"/>
+          </p:cNvSpPr>
+          <p:nvPr>
+            <p:ph type="sldImg" idx="2"/>
+          </p:nvPr>
+        </p:nvSpPr>
+        <p:spPr/>
+      </p:sp>
+      <p:sp>
+        <p:nvSpPr>
+          <p:cNvPr id="3" name="Notes Placeholder 2"/>
+          <p:cNvSpPr>
+            <a:spLocks noGrp="1"/>
+          </p:cNvSpPr>
+          <p:nvPr>
+            <p:ph type="body" idx="3" sz="quarter"/>
+          </p:nvPr>
+        </p:nvSpPr>
+        <p:spPr/>
+        <p:txBody>
+          <a:bodyPr/>
+          <a:lstStyle/>
+          <a:p>
+            <a:r>
+              <a:t>What does each program really cost?. Sample Community Services Ltd. Period: March 2026. Each program's full cost: what its grant pays for, plus its fair share of the costs no single grant covers (untied program costs and administration, shared by grant spending). Pick a program and every chart and note follows it.</a:t>
+            </a:r>
+          </a:p>
+        </p:txBody>
+      </p:sp>
+      <p:sp>
+        <p:nvSpPr>
+          <p:cNvPr id="4" name="Slide Number Placeholder 3"/>
+          <p:cNvSpPr>
+            <a:spLocks noGrp="1"/>
+          </p:cNvSpPr>
+          <p:nvPr>
+            <p:ph type="sldNum" idx="5" sz="quarter"/>
+          </p:nvPr>
+        </p:nvSpPr>
+        <p:spPr/>
+      </p:sp>
+    </p:spTree>
+  </p:cSld>
+  <p:clrMapOvr>
+    <a:masterClrMapping/>
+  </p:clrMapOvr>
+</p:notes>
+</file>
+
+<file path=ppt/notesSlides/notesSlide2.xml><?xml version="1.0" encoding="utf-8"?>
+<p:notes xmlns:a="http://schemas.openxmlformats.org/drawingml/2006/main" xmlns:p="http://schemas.openxmlformats.org/presentationml/2006/main" xmlns:r="http://schemas.openxmlformats.org/officeDocument/2006/relationships">
+  <p:cSld>
+    <p:spTree>
+      <p:nvGrpSpPr>
+        <p:cNvPr id="1" name=""/>
+        <p:cNvGrpSpPr/>
+        <p:nvPr/>
+      </p:nvGrpSpPr>
+      <p:grpSpPr>
+        <a:xfrm>
+          <a:off x="0" y="0"/>
+          <a:ext cx="0" cy="0"/>
+          <a:chOff x="0" y="0"/>
+          <a:chExt cx="0" cy="0"/>
+        </a:xfrm>
+      </p:grpSpPr>
+      <p:sp>
+        <p:nvSpPr>
+          <p:cNvPr id="2" name="Slide Image Placeholder 1"/>
+          <p:cNvSpPr>
+            <a:spLocks noGrp="1"/>
+          </p:cNvSpPr>
+          <p:nvPr>
+            <p:ph type="sldImg" idx="2"/>
+          </p:nvPr>
+        </p:nvSpPr>
+        <p:spPr/>
+      </p:sp>
+      <p:sp>
+        <p:nvSpPr>
+          <p:cNvPr id="3" name="Notes Placeholder 2"/>
+          <p:cNvSpPr>
+            <a:spLocks noGrp="1"/>
+          </p:cNvSpPr>
+          <p:nvPr>
+            <p:ph type="body" idx="3" sz="quarter"/>
+          </p:nvPr>
+        </p:nvSpPr>
+        <p:spPr/>
+        <p:txBody>
+          <a:bodyPr/>
+          <a:lstStyle/>
+          <a:p>
+            <a:r>
+              <a:t>All programs. Housing support is the biggest program: $49,107 in March once its share of untied program costs and administration is added to $24,832 of grant spending. Shared costs add 97.8% on top of grant spending across all programs. The full cost (not just the grant line) is the number for renewal applications, where the funder lets you recover a share of overheads. Pick a program above to see it on its own.</a:t>
+            </a:r>
+          </a:p>
+        </p:txBody>
+      </p:sp>
+      <p:sp>
+        <p:nvSpPr>
+          <p:cNvPr id="4" name="Slide Number Placeholder 3"/>
+          <p:cNvSpPr>
+            <a:spLocks noGrp="1"/>
+          </p:cNvSpPr>
+          <p:nvPr>
+            <p:ph type="sldNum" idx="5" sz="quarter"/>
+          </p:nvPr>
+        </p:nvSpPr>
+        <p:spPr/>
+      </p:sp>
+    </p:spTree>
+  </p:cSld>
+  <p:clrMapOvr>
+    <a:masterClrMapping/>
+  </p:clrMapOvr>
+</p:notes>
+</file>
+
+<file path=ppt/notesSlides/notesSlide3.xml><?xml version="1.0" encoding="utf-8"?>
+<p:notes xmlns:a="http://schemas.openxmlformats.org/drawingml/2006/main" xmlns:p="http://schemas.openxmlformats.org/presentationml/2006/main" xmlns:r="http://schemas.openxmlformats.org/officeDocument/2006/relationships">
+  <p:cSld>
+    <p:spTree>
+      <p:nvGrpSpPr>
+        <p:cNvPr id="1" name=""/>
+        <p:cNvGrpSpPr/>
+        <p:nvPr/>
+      </p:nvGrpSpPr>
+      <p:grpSpPr>
+        <a:xfrm>
+          <a:off x="0" y="0"/>
+          <a:ext cx="0" cy="0"/>
+          <a:chOff x="0" y="0"/>
+          <a:chExt cx="0" cy="0"/>
+        </a:xfrm>
+      </p:grpSpPr>
+      <p:sp>
+        <p:nvSpPr>
+          <p:cNvPr id="2" name="Slide Image Placeholder 1"/>
+          <p:cNvSpPr>
+            <a:spLocks noGrp="1"/>
+          </p:cNvSpPr>
+          <p:nvPr>
+            <p:ph type="sldImg" idx="2"/>
+          </p:nvPr>
+        </p:nvSpPr>
+        <p:spPr/>
+      </p:sp>
+      <p:sp>
+        <p:nvSpPr>
+          <p:cNvPr id="3" name="Notes Placeholder 2"/>
+          <p:cNvSpPr>
+            <a:spLocks noGrp="1"/>
+          </p:cNvSpPr>
+          <p:nvPr>
+            <p:ph type="body" idx="3" sz="quarter"/>
+          </p:nvPr>
+        </p:nvSpPr>
+        <p:spPr/>
+        <p:txBody>
+          <a:bodyPr/>
+          <a:lstStyle/>
+          <a:p>
+            <a:r>
+              <a:t>Housing support. Housing support cost $49,107 in full in March: $24,832 paid by the State Housing Program grant, and $24,275 of shared costs no grant covers. It has spent 90.9% of its budget to date, with $278,158 left and 9 months to go. The full cost is $49,107 a month; $24,275 of it is shared cost the grant doesn't pay for. Worth asking for as much of it as the funder allows at renewal.</a:t>
+            </a:r>
+          </a:p>
+        </p:txBody>
+      </p:sp>
+      <p:sp>
+        <p:nvSpPr>
+          <p:cNvPr id="4" name="Slide Number Placeholder 3"/>
+          <p:cNvSpPr>
+            <a:spLocks noGrp="1"/>
+          </p:cNvSpPr>
+          <p:nvPr>
+            <p:ph type="sldNum" idx="5" sz="quarter"/>
+          </p:nvPr>
+        </p:nvSpPr>
+        <p:spPr/>
+      </p:sp>
+    </p:spTree>
+  </p:cSld>
+  <p:clrMapOvr>
+    <a:masterClrMapping/>
+  </p:clrMapOvr>
+</p:notes>
+</file>
+
+<file path=ppt/notesSlides/notesSlide4.xml><?xml version="1.0" encoding="utf-8"?>
+<p:notes xmlns:a="http://schemas.openxmlformats.org/drawingml/2006/main" xmlns:p="http://schemas.openxmlformats.org/presentationml/2006/main" xmlns:r="http://schemas.openxmlformats.org/officeDocument/2006/relationships">
+  <p:cSld>
+    <p:spTree>
+      <p:nvGrpSpPr>
+        <p:cNvPr id="1" name=""/>
+        <p:cNvGrpSpPr/>
+        <p:nvPr/>
+      </p:nvGrpSpPr>
+      <p:grpSpPr>
+        <a:xfrm>
+          <a:off x="0" y="0"/>
+          <a:ext cx="0" cy="0"/>
+          <a:chOff x="0" y="0"/>
+          <a:chExt cx="0" cy="0"/>
+        </a:xfrm>
+      </p:grpSpPr>
+      <p:sp>
+        <p:nvSpPr>
+          <p:cNvPr id="2" name="Slide Image Placeholder 1"/>
+          <p:cNvSpPr>
+            <a:spLocks noGrp="1"/>
+          </p:cNvSpPr>
+          <p:nvPr>
+            <p:ph type="sldImg" idx="2"/>
+          </p:nvPr>
+        </p:nvSpPr>
+        <p:spPr/>
+      </p:sp>
+      <p:sp>
+        <p:nvSpPr>
+          <p:cNvPr id="3" name="Notes Placeholder 2"/>
+          <p:cNvSpPr>
+            <a:spLocks noGrp="1"/>
+          </p:cNvSpPr>
+          <p:nvPr>
+            <p:ph type="body" idx="3" sz="quarter"/>
+          </p:nvPr>
+        </p:nvSpPr>
+        <p:spPr/>
+        <p:txBody>
+          <a:bodyPr/>
+          <a:lstStyle/>
+          <a:p>
+            <a:r>
+              <a:t>Youth outreach. Youth outreach cost $32,660 in full in March: $16,515 paid by the State Department of Families grant, and $16,145 of shared costs no grant covers. It has spent 98.2% of its budget to date, with $303,265 left and 15 months to go. The full cost is $32,660 a month; $16,145 of it is shared cost the grant doesn't pay for. Worth asking for as much of it as the funder allows at renewal.</a:t>
+            </a:r>
+          </a:p>
+        </p:txBody>
+      </p:sp>
+      <p:sp>
+        <p:nvSpPr>
+          <p:cNvPr id="4" name="Slide Number Placeholder 3"/>
+          <p:cNvSpPr>
+            <a:spLocks noGrp="1"/>
+          </p:cNvSpPr>
+          <p:nvPr>
+            <p:ph type="sldNum" idx="5" sz="quarter"/>
+          </p:nvPr>
+        </p:nvSpPr>
+        <p:spPr/>
+      </p:sp>
+    </p:spTree>
+  </p:cSld>
+  <p:clrMapOvr>
+    <a:masterClrMapping/>
+  </p:clrMapOvr>
+</p:notes>
+</file>
+
+<file path=ppt/notesSlides/notesSlide5.xml><?xml version="1.0" encoding="utf-8"?>
+<p:notes xmlns:a="http://schemas.openxmlformats.org/drawingml/2006/main" xmlns:p="http://schemas.openxmlformats.org/presentationml/2006/main" xmlns:r="http://schemas.openxmlformats.org/officeDocument/2006/relationships">
+  <p:cSld>
+    <p:spTree>
+      <p:nvGrpSpPr>
+        <p:cNvPr id="1" name=""/>
+        <p:cNvGrpSpPr/>
+        <p:nvPr/>
+      </p:nvGrpSpPr>
+      <p:grpSpPr>
+        <a:xfrm>
+          <a:off x="0" y="0"/>
+          <a:ext cx="0" cy="0"/>
+          <a:chOff x="0" y="0"/>
+          <a:chExt cx="0" cy="0"/>
+        </a:xfrm>
+      </p:grpSpPr>
+      <p:sp>
+        <p:nvSpPr>
+          <p:cNvPr id="2" name="Slide Image Placeholder 1"/>
+          <p:cNvSpPr>
+            <a:spLocks noGrp="1"/>
+          </p:cNvSpPr>
+          <p:nvPr>
+            <p:ph type="sldImg" idx="2"/>
+          </p:nvPr>
+        </p:nvSpPr>
+        <p:spPr/>
+      </p:sp>
+      <p:sp>
+        <p:nvSpPr>
+          <p:cNvPr id="3" name="Notes Placeholder 2"/>
+          <p:cNvSpPr>
+            <a:spLocks noGrp="1"/>
+          </p:cNvSpPr>
+          <p:nvPr>
+            <p:ph type="body" idx="3" sz="quarter"/>
+          </p:nvPr>
+        </p:nvSpPr>
+        <p:spPr/>
+        <p:txBody>
+          <a:bodyPr/>
+          <a:lstStyle/>
+          <a:p>
+            <a:r>
+              <a:t>Digital literacy. Digital literacy cost $10,732 in full in March: $5,427 paid by the Philanthropic foundation grant, and $5,305 of shared costs no grant covers. It has spent 100.8% of its budget to date, with $59,773 left and 12 months to go. The full cost is $10,732 a month; $5,305 of it is shared cost the grant doesn't pay for. Worth asking for as much of it as the funder allows at renewal.</a:t>
+            </a:r>
+          </a:p>
+        </p:txBody>
+      </p:sp>
+      <p:sp>
+        <p:nvSpPr>
+          <p:cNvPr id="4" name="Slide Number Placeholder 3"/>
+          <p:cNvSpPr>
+            <a:spLocks noGrp="1"/>
+          </p:cNvSpPr>
+          <p:nvPr>
+            <p:ph type="sldNum" idx="5" sz="quarter"/>
+          </p:nvPr>
+        </p:nvSpPr>
+        <p:spPr/>
+      </p:sp>
+    </p:spTree>
+  </p:cSld>
+  <p:clrMapOvr>
+    <a:masterClrMapping/>
+  </p:clrMapOvr>
+</p:notes>
+</file>
+
+<file path=ppt/notesSlides/notesSlide6.xml><?xml version="1.0" encoding="utf-8"?>
+<p:notes xmlns:a="http://schemas.openxmlformats.org/drawingml/2006/main" xmlns:p="http://schemas.openxmlformats.org/presentationml/2006/main" xmlns:r="http://schemas.openxmlformats.org/officeDocument/2006/relationships">
+  <p:cSld>
+    <p:spTree>
+      <p:nvGrpSpPr>
+        <p:cNvPr id="1" name=""/>
+        <p:cNvGrpSpPr/>
+        <p:nvPr/>
+      </p:nvGrpSpPr>
+      <p:grpSpPr>
+        <a:xfrm>
+          <a:off x="0" y="0"/>
+          <a:ext cx="0" cy="0"/>
+          <a:chOff x="0" y="0"/>
+          <a:chExt cx="0" cy="0"/>
+        </a:xfrm>
+      </p:grpSpPr>
+      <p:sp>
+        <p:nvSpPr>
+          <p:cNvPr id="2" name="Slide Image Placeholder 1"/>
+          <p:cNvSpPr>
+            <a:spLocks noGrp="1"/>
+          </p:cNvSpPr>
+          <p:nvPr>
+            <p:ph type="sldImg" idx="2"/>
+          </p:nvPr>
+        </p:nvSpPr>
+        <p:spPr/>
+      </p:sp>
+      <p:sp>
+        <p:nvSpPr>
+          <p:cNvPr id="3" name="Notes Placeholder 2"/>
+          <p:cNvSpPr>
+            <a:spLocks noGrp="1"/>
+          </p:cNvSpPr>
+          <p:nvPr>
+            <p:ph type="body" idx="3" sz="quarter"/>
+          </p:nvPr>
+        </p:nvSpPr>
+        <p:spPr/>
+        <p:txBody>
+          <a:bodyPr/>
+          <a:lstStyle/>
+          <a:p>
+            <a:r>
+              <a:t>Community meals (2025-26). Community meals (2025-26) cost $8,108 in full in March: $4,100 paid by the Local council community grant grant, and $4,008 of shared costs no grant covers. It has spent 96.7% of its budget to date, with $12,100 left and 3 months to go. The full cost is $8,108 a month; $4,008 of it is shared cost the grant doesn't pay for. Worth asking for as much of it as the funder allows at renewal.</a:t>
+            </a:r>
+          </a:p>
+        </p:txBody>
+      </p:sp>
+      <p:sp>
+        <p:nvSpPr>
+          <p:cNvPr id="4" name="Slide Number Placeholder 3"/>
+          <p:cNvSpPr>
+            <a:spLocks noGrp="1"/>
+          </p:cNvSpPr>
+          <p:nvPr>
+            <p:ph type="sldNum" idx="5" sz="quarter"/>
+          </p:nvPr>
+        </p:nvSpPr>
+        <p:spPr/>
+      </p:sp>
+    </p:spTree>
+  </p:cSld>
+  <p:clrMapOvr>
+    <a:masterClrMapping/>
+  </p:clrMapOvr>
+</p:notes>
+</file>
+
+<file path=ppt/notesSlides/notesSlide7.xml><?xml version="1.0" encoding="utf-8"?>
+<p:notes xmlns:a="http://schemas.openxmlformats.org/drawingml/2006/main" xmlns:p="http://schemas.openxmlformats.org/presentationml/2006/main" xmlns:r="http://schemas.openxmlformats.org/officeDocument/2006/relationships">
+  <p:cSld>
+    <p:spTree>
+      <p:nvGrpSpPr>
+        <p:cNvPr id="1" name=""/>
+        <p:cNvGrpSpPr/>
+        <p:nvPr/>
+      </p:nvGrpSpPr>
+      <p:grpSpPr>
+        <a:xfrm>
+          <a:off x="0" y="0"/>
+          <a:ext cx="0" cy="0"/>
+          <a:chOff x="0" y="0"/>
+          <a:chExt cx="0" cy="0"/>
+        </a:xfrm>
+      </p:grpSpPr>
+      <p:sp>
+        <p:nvSpPr>
+          <p:cNvPr id="2" name="Slide Image Placeholder 1"/>
+          <p:cNvSpPr>
+            <a:spLocks noGrp="1"/>
+          </p:cNvSpPr>
+          <p:nvPr>
+            <p:ph type="sldImg" idx="2"/>
+          </p:nvPr>
+        </p:nvSpPr>
+        <p:spPr/>
+      </p:sp>
+      <p:sp>
+        <p:nvSpPr>
+          <p:cNvPr id="3" name="Notes Placeholder 2"/>
+          <p:cNvSpPr>
+            <a:spLocks noGrp="1"/>
+          </p:cNvSpPr>
+          <p:nvPr>
+            <p:ph type="body" idx="3" sz="quarter"/>
+          </p:nvPr>
+        </p:nvSpPr>
+        <p:spPr/>
+        <p:txBody>
+          <a:bodyPr/>
+          <a:lstStyle/>
+          <a:p>
+            <a:r>
+              <a:t>Volunteer coordinator. Volunteer coordinator cost $5,798 in full in March: $2,932 paid by the State volunteering grant grant, and $2,866 of shared costs no grant covers. It has spent 97.7% of its budget to date, with $33,068 left and 11 months to go. The full cost is $5,798 a month; $2,866 of it is shared cost the grant doesn't pay for. Worth asking for as much of it as the funder allows at renewal.</a:t>
+            </a:r>
+          </a:p>
+        </p:txBody>
+      </p:sp>
+      <p:sp>
+        <p:nvSpPr>
+          <p:cNvPr id="4" name="Slide Number Placeholder 3"/>
+          <p:cNvSpPr>
+            <a:spLocks noGrp="1"/>
+          </p:cNvSpPr>
+          <p:nvPr>
+            <p:ph type="sldNum" idx="5" sz="quarter"/>
+          </p:nvPr>
+        </p:nvSpPr>
+        <p:spPr/>
+      </p:sp>
+    </p:spTree>
+  </p:cSld>
+  <p:clrMapOvr>
+    <a:masterClrMapping/>
+  </p:clrMapOvr>
+</p:notes>
 </file>
 
 <file path=ppt/slideLayouts/slideLayout1.xml><?xml version="1.0" encoding="utf-8"?>
@@ -3757,7 +5528,44 @@
       <p:grpSpPr/>
       <p:sp>
         <p:nvSpPr>
-          <p:cNvPr id="2" name="Rectangle 1"/>
+          <p:cNvPr id="2" name="Title 1"/>
+          <p:cNvSpPr>
+            <a:spLocks noGrp="1"/>
+          </p:cNvSpPr>
+          <p:nvPr>
+            <p:ph type="ctrTitle"/>
+          </p:nvPr>
+        </p:nvSpPr>
+        <p:spPr>
+          <a:xfrm>
+            <a:off x="457200" y="1965960"/>
+            <a:ext cx="11277295" cy="1097280"/>
+          </a:xfrm>
+        </p:spPr>
+        <p:txBody>
+          <a:bodyPr wrap="square"/>
+          <a:lstStyle/>
+          <a:p>
+            <a:pPr algn="l">
+              <a:defRPr>
+                <a:latin typeface="Roboto"/>
+              </a:defRPr>
+            </a:pPr>
+            <a:r>
+              <a:rPr sz="3400" b="1">
+                <a:solidFill>
+                  <a:srgbClr val="25342A"/>
+                </a:solidFill>
+                <a:latin typeface="Roboto"/>
+              </a:rPr>
+              <a:t>What does each program really cost?</a:t>
+            </a:r>
+          </a:p>
+        </p:txBody>
+      </p:sp>
+      <p:sp>
+        <p:nvSpPr>
+          <p:cNvPr id="3" name="Rectangle 2"/>
           <p:cNvSpPr/>
           <p:nvPr/>
         </p:nvSpPr>
@@ -3813,7 +5621,7 @@
       </p:sp>
       <p:sp>
         <p:nvSpPr>
-          <p:cNvPr id="3" name="TextBox 2"/>
+          <p:cNvPr id="4" name="TextBox 3"/>
           <p:cNvSpPr txBox="1"/>
           <p:nvPr/>
         </p:nvSpPr>
@@ -3828,7 +5636,7 @@
           <a:noFill/>
         </p:spPr>
         <p:txBody>
-          <a:bodyPr wrap="square">
+          <a:bodyPr wrap="square" lIns="45720" rIns="45720">
             <a:spAutoFit/>
           </a:bodyPr>
           <a:lstStyle/>
@@ -3852,7 +5660,7 @@
       </p:sp>
       <p:sp>
         <p:nvSpPr>
-          <p:cNvPr id="4" name="TextBox 3"/>
+          <p:cNvPr id="5" name="TextBox 4"/>
           <p:cNvSpPr txBox="1"/>
           <p:nvPr/>
         </p:nvSpPr>
@@ -3867,7 +5675,7 @@
           <a:noFill/>
         </p:spPr>
         <p:txBody>
-          <a:bodyPr wrap="square">
+          <a:bodyPr wrap="square" lIns="45720" rIns="45720">
             <a:spAutoFit/>
           </a:bodyPr>
           <a:lstStyle/>
@@ -3891,14 +5699,14 @@
       </p:sp>
       <p:sp>
         <p:nvSpPr>
-          <p:cNvPr id="5" name="TextBox 4"/>
+          <p:cNvPr id="6" name="TextBox 5"/>
           <p:cNvSpPr txBox="1"/>
           <p:nvPr/>
         </p:nvSpPr>
         <p:spPr>
           <a:xfrm>
-            <a:off x="457200" y="2011680"/>
-            <a:ext cx="11247120" cy="1097280"/>
+            <a:off x="457200" y="3154680"/>
+            <a:ext cx="11277295" cy="457200"/>
           </a:xfrm>
           <a:prstGeom prst="rect">
             <a:avLst/>
@@ -3906,7 +5714,7 @@
           <a:noFill/>
         </p:spPr>
         <p:txBody>
-          <a:bodyPr wrap="square">
+          <a:bodyPr wrap="square" lIns="45720" rIns="45720">
             <a:spAutoFit/>
           </a:bodyPr>
           <a:lstStyle/>
@@ -3917,27 +5725,27 @@
               </a:defRPr>
             </a:pPr>
             <a:r>
-              <a:rPr sz="3400" b="1">
+              <a:rPr sz="1600" b="0">
                 <a:solidFill>
-                  <a:srgbClr val="25342A"/>
+                  <a:srgbClr val="5F6F63"/>
                 </a:solidFill>
                 <a:latin typeface="Roboto"/>
               </a:rPr>
-              <a:t>What does each program really cost?</a:t>
-            </a:r>
-          </a:p>
-        </p:txBody>
-      </p:sp>
-      <p:sp>
-        <p:nvSpPr>
-          <p:cNvPr id="6" name="TextBox 5"/>
+              <a:t>Sample Community Services Ltd</a:t>
+            </a:r>
+          </a:p>
+        </p:txBody>
+      </p:sp>
+      <p:sp>
+        <p:nvSpPr>
+          <p:cNvPr id="7" name="TextBox 6"/>
           <p:cNvSpPr txBox="1"/>
           <p:nvPr/>
         </p:nvSpPr>
         <p:spPr>
           <a:xfrm>
-            <a:off x="457200" y="3154680"/>
-            <a:ext cx="11247120" cy="457200"/>
+            <a:off x="457200" y="3703320"/>
+            <a:ext cx="11277295" cy="535940"/>
           </a:xfrm>
           <a:prstGeom prst="rect">
             <a:avLst/>
@@ -3945,7 +5753,7 @@
           <a:noFill/>
         </p:spPr>
         <p:txBody>
-          <a:bodyPr wrap="square">
+          <a:bodyPr wrap="square" lIns="45720" rIns="45720">
             <a:spAutoFit/>
           </a:bodyPr>
           <a:lstStyle/>
@@ -3956,27 +5764,27 @@
               </a:defRPr>
             </a:pPr>
             <a:r>
-              <a:rPr sz="1600" b="0">
+              <a:rPr sz="1400" b="0">
                 <a:solidFill>
-                  <a:srgbClr val="5F6F63"/>
+                  <a:srgbClr val="25342A"/>
                 </a:solidFill>
                 <a:latin typeface="Roboto"/>
               </a:rPr>
-              <a:t>Sample Community Services Ltd</a:t>
-            </a:r>
-          </a:p>
-        </p:txBody>
-      </p:sp>
-      <p:sp>
-        <p:nvSpPr>
-          <p:cNvPr id="7" name="TextBox 6"/>
+              <a:t>Period: March 2026. Each program's full cost: what its grant pays for, plus its fair share of the costs no single grant covers (untied program costs and administration, shared by grant spending). Pick a program and every chart and note follows it.</a:t>
+            </a:r>
+          </a:p>
+        </p:txBody>
+      </p:sp>
+      <p:sp>
+        <p:nvSpPr>
+          <p:cNvPr id="8" name="TextBox 7"/>
           <p:cNvSpPr txBox="1"/>
           <p:nvPr/>
         </p:nvSpPr>
         <p:spPr>
           <a:xfrm>
-            <a:off x="457200" y="3703320"/>
-            <a:ext cx="11247120" cy="1097280"/>
+            <a:off x="457200" y="4330700"/>
+            <a:ext cx="11277295" cy="1097280"/>
           </a:xfrm>
           <a:prstGeom prst="rect">
             <a:avLst/>
@@ -3984,7 +5792,7 @@
           <a:noFill/>
         </p:spPr>
         <p:txBody>
-          <a:bodyPr wrap="square">
+          <a:bodyPr wrap="square" lIns="45720" rIns="45720">
             <a:spAutoFit/>
           </a:bodyPr>
           <a:lstStyle/>
@@ -3995,27 +5803,75 @@
               </a:defRPr>
             </a:pPr>
             <a:r>
-              <a:rPr sz="1400" b="0">
+              <a:rPr sz="1100" b="0">
                 <a:solidFill>
-                  <a:srgbClr val="25342A"/>
+                  <a:srgbClr val="5F6F63"/>
                 </a:solidFill>
                 <a:latin typeface="Roboto"/>
               </a:rPr>
-              <a:t>Period: March 2026. Each program's full cost: what its grant pays for, plus its fair share of the costs no single grant covers (untied program costs and administration, shared by grant spending). Pick a program and every chart and note follows it.</a:t>
-            </a:r>
-          </a:p>
-        </p:txBody>
-      </p:sp>
-      <p:sp>
-        <p:nvSpPr>
-          <p:cNvPr id="8" name="TextBox 7"/>
+              <a:t>How final is this data?</a:t>
+            </a:r>
+          </a:p>
+          <a:p>
+            <a:pPr>
+              <a:defRPr>
+                <a:latin typeface="Roboto"/>
+              </a:defRPr>
+            </a:pPr>
+            <a:r>
+              <a:rPr sz="1100" b="0">
+                <a:solidFill>
+                  <a:srgbClr val="5F6F63"/>
+                </a:solidFill>
+                <a:latin typeface="Roboto"/>
+              </a:rPr>
+              <a:t>February 2026: Locked. February 2026 is locked (closed 3 Mar 2026). These numbers won't change.</a:t>
+            </a:r>
+          </a:p>
+          <a:p>
+            <a:pPr>
+              <a:defRPr>
+                <a:latin typeface="Roboto"/>
+              </a:defRPr>
+            </a:pPr>
+            <a:r>
+              <a:rPr sz="1100" b="0">
+                <a:solidFill>
+                  <a:srgbClr val="5F6F63"/>
+                </a:solidFill>
+                <a:latin typeface="Roboto"/>
+              </a:rPr>
+              <a:t>March 2026: Locked. March 2026 is locked (closed 2 Apr 2026). These numbers won't change.</a:t>
+            </a:r>
+          </a:p>
+          <a:p>
+            <a:pPr>
+              <a:defRPr>
+                <a:latin typeface="Roboto"/>
+              </a:defRPr>
+            </a:pPr>
+            <a:r>
+              <a:rPr sz="1100" b="0">
+                <a:solidFill>
+                  <a:srgbClr val="5F6F63"/>
+                </a:solidFill>
+                <a:latin typeface="Roboto"/>
+              </a:rPr>
+              <a:t>October 2026: Incomplete. October 2026 is still in progress: figures to 6 Oct only.</a:t>
+            </a:r>
+          </a:p>
+        </p:txBody>
+      </p:sp>
+      <p:sp>
+        <p:nvSpPr>
+          <p:cNvPr id="9" name="TextBox 8"/>
           <p:cNvSpPr txBox="1"/>
           <p:nvPr/>
         </p:nvSpPr>
         <p:spPr>
           <a:xfrm>
-            <a:off x="457200" y="4937760"/>
-            <a:ext cx="11247120" cy="1097280"/>
+            <a:off x="457200" y="6492240"/>
+            <a:ext cx="2926080" cy="274320"/>
           </a:xfrm>
           <a:prstGeom prst="rect">
             <a:avLst/>
@@ -4023,7 +5879,7 @@
           <a:noFill/>
         </p:spPr>
         <p:txBody>
-          <a:bodyPr wrap="square">
+          <a:bodyPr wrap="square" lIns="45720" rIns="45720">
             <a:spAutoFit/>
           </a:bodyPr>
           <a:lstStyle/>
@@ -4034,75 +5890,27 @@
               </a:defRPr>
             </a:pPr>
             <a:r>
-              <a:rPr sz="1100" b="0">
+              <a:rPr sz="900" b="0">
                 <a:solidFill>
                   <a:srgbClr val="5F6F63"/>
                 </a:solidFill>
                 <a:latin typeface="Roboto"/>
               </a:rPr>
-              <a:t>How final is this data?</a:t>
-            </a:r>
-          </a:p>
-          <a:p>
-            <a:pPr>
-              <a:defRPr>
-                <a:latin typeface="Roboto"/>
-              </a:defRPr>
-            </a:pPr>
-            <a:r>
-              <a:rPr sz="1100" b="0">
-                <a:solidFill>
-                  <a:srgbClr val="5F6F63"/>
-                </a:solidFill>
-                <a:latin typeface="Roboto"/>
-              </a:rPr>
-              <a:t>February 2026: Locked. February 2026 is locked (closed 3 Mar 2026). These numbers won't change.</a:t>
-            </a:r>
-          </a:p>
-          <a:p>
-            <a:pPr>
-              <a:defRPr>
-                <a:latin typeface="Roboto"/>
-              </a:defRPr>
-            </a:pPr>
-            <a:r>
-              <a:rPr sz="1100" b="0">
-                <a:solidFill>
-                  <a:srgbClr val="5F6F63"/>
-                </a:solidFill>
-                <a:latin typeface="Roboto"/>
-              </a:rPr>
-              <a:t>March 2026: Locked. March 2026 is locked (closed 2 Apr 2026). These numbers won't change.</a:t>
-            </a:r>
-          </a:p>
-          <a:p>
-            <a:pPr>
-              <a:defRPr>
-                <a:latin typeface="Roboto"/>
-              </a:defRPr>
-            </a:pPr>
-            <a:r>
-              <a:rPr sz="1100" b="0">
-                <a:solidFill>
-                  <a:srgbClr val="5F6F63"/>
-                </a:solidFill>
-                <a:latin typeface="Roboto"/>
-              </a:rPr>
-              <a:t>October 2026: Incomplete. October 2026 is still in progress: figures to 6 Oct only.</a:t>
-            </a:r>
-          </a:p>
-        </p:txBody>
-      </p:sp>
-      <p:sp>
-        <p:nvSpPr>
-          <p:cNvPr id="9" name="TextBox 8"/>
+              <a:t>program-cost.pptx</a:t>
+            </a:r>
+          </a:p>
+        </p:txBody>
+      </p:sp>
+      <p:sp>
+        <p:nvSpPr>
+          <p:cNvPr id="10" name="TextBox 9"/>
           <p:cNvSpPr txBox="1"/>
           <p:nvPr/>
         </p:nvSpPr>
         <p:spPr>
           <a:xfrm>
-            <a:off x="457200" y="6492240"/>
-            <a:ext cx="3657600" cy="274320"/>
+            <a:off x="3108960" y="6492240"/>
+            <a:ext cx="5943600" cy="274320"/>
           </a:xfrm>
           <a:prstGeom prst="rect">
             <a:avLst/>
@@ -4110,12 +5918,12 @@
           <a:noFill/>
         </p:spPr>
         <p:txBody>
-          <a:bodyPr wrap="square">
+          <a:bodyPr wrap="square" lIns="45720" rIns="45720">
             <a:spAutoFit/>
           </a:bodyPr>
           <a:lstStyle/>
           <a:p>
-            <a:pPr>
+            <a:pPr algn="ctr">
               <a:defRPr>
                 <a:latin typeface="Roboto"/>
               </a:defRPr>
@@ -4127,21 +5935,21 @@
                 </a:solidFill>
                 <a:latin typeface="Roboto"/>
               </a:rPr>
-              <a:t>program-cost.pptx</a:t>
-            </a:r>
-          </a:p>
-        </p:txBody>
-      </p:sp>
-      <p:sp>
-        <p:nvSpPr>
-          <p:cNvPr id="10" name="TextBox 9"/>
+              <a:t>Data retrieved 2pm, Tue 6 Oct 2026 · Generated 8 Oct 2026, 9:35am · Sample data · Made with Python (python-pptx)</a:t>
+            </a:r>
+          </a:p>
+        </p:txBody>
+      </p:sp>
+      <p:sp>
+        <p:nvSpPr>
+          <p:cNvPr id="11" name="TextBox 10"/>
           <p:cNvSpPr txBox="1"/>
           <p:nvPr/>
         </p:nvSpPr>
         <p:spPr>
           <a:xfrm>
-            <a:off x="4297680" y="6492240"/>
-            <a:ext cx="3657600" cy="274320"/>
+            <a:off x="8503920" y="6492240"/>
+            <a:ext cx="3200400" cy="274320"/>
           </a:xfrm>
           <a:prstGeom prst="rect">
             <a:avLst/>
@@ -4149,12 +5957,12 @@
           <a:noFill/>
         </p:spPr>
         <p:txBody>
-          <a:bodyPr wrap="square">
+          <a:bodyPr wrap="square" lIns="45720" rIns="45720">
             <a:spAutoFit/>
           </a:bodyPr>
           <a:lstStyle/>
           <a:p>
-            <a:pPr algn="ctr">
+            <a:pPr algn="r">
               <a:defRPr>
                 <a:latin typeface="Roboto"/>
               </a:defRPr>
@@ -4166,363 +5974,7 @@
                 </a:solidFill>
                 <a:latin typeface="Roboto"/>
               </a:rPr>
-              <a:t>Data retrieved 2pm, Tue 6 Oct 2026 · Sample data</a:t>
-            </a:r>
-          </a:p>
-        </p:txBody>
-      </p:sp>
-      <p:sp>
-        <p:nvSpPr>
-          <p:cNvPr id="11" name="TextBox 10"/>
-          <p:cNvSpPr txBox="1"/>
-          <p:nvPr/>
-        </p:nvSpPr>
-        <p:spPr>
-          <a:xfrm>
-            <a:off x="8503920" y="6492240"/>
-            <a:ext cx="3200400" cy="274320"/>
-          </a:xfrm>
-          <a:prstGeom prst="rect">
-            <a:avLst/>
-          </a:prstGeom>
-          <a:noFill/>
-        </p:spPr>
-        <p:txBody>
-          <a:bodyPr wrap="square">
-            <a:spAutoFit/>
-          </a:bodyPr>
-          <a:lstStyle/>
-          <a:p>
-            <a:pPr algn="r">
-              <a:defRPr>
-                <a:latin typeface="Roboto"/>
-              </a:defRPr>
-            </a:pPr>
-            <a:r>
-              <a:rPr sz="900" b="0">
-                <a:solidFill>
-                  <a:srgbClr val="5F6F63"/>
-                </a:solidFill>
-                <a:latin typeface="Roboto"/>
-              </a:rPr>
-              <a:t>Slide 1 of 10</a:t>
-            </a:r>
-          </a:p>
-        </p:txBody>
-      </p:sp>
-    </p:spTree>
-  </p:cSld>
-  <p:clrMapOvr>
-    <a:masterClrMapping/>
-  </p:clrMapOvr>
-</p:sld>
-</file>
-
-<file path=ppt/slides/slide10.xml><?xml version="1.0" encoding="utf-8"?>
-<p:sld xmlns:a="http://schemas.openxmlformats.org/drawingml/2006/main" xmlns:p="http://schemas.openxmlformats.org/presentationml/2006/main" xmlns:r="http://schemas.openxmlformats.org/officeDocument/2006/relationships">
-  <p:cSld>
-    <p:spTree>
-      <p:nvGrpSpPr>
-        <p:cNvPr id="1" name=""/>
-        <p:cNvGrpSpPr/>
-        <p:nvPr/>
-      </p:nvGrpSpPr>
-      <p:grpSpPr/>
-      <p:sp>
-        <p:nvSpPr>
-          <p:cNvPr id="2" name="Rectangle 1"/>
-          <p:cNvSpPr/>
-          <p:nvPr/>
-        </p:nvSpPr>
-        <p:spPr>
-          <a:xfrm>
-            <a:off x="0" y="0"/>
-            <a:ext cx="12191695" cy="73152"/>
-          </a:xfrm>
-          <a:prstGeom prst="rect">
-            <a:avLst/>
-          </a:prstGeom>
-          <a:solidFill>
-            <a:srgbClr val="2F7A5D"/>
-          </a:solidFill>
-          <a:ln>
-            <a:noFill/>
-          </a:ln>
-        </p:spPr>
-        <p:style>
-          <a:lnRef idx="1">
-            <a:schemeClr val="accent1"/>
-          </a:lnRef>
-          <a:fillRef idx="3">
-            <a:schemeClr val="accent1"/>
-          </a:fillRef>
-          <a:effectRef idx="2">
-            <a:schemeClr val="accent1"/>
-          </a:effectRef>
-          <a:fontRef idx="minor">
-            <a:schemeClr val="lt1"/>
-          </a:fontRef>
-        </p:style>
-        <p:txBody>
-          <a:bodyPr rtlCol="0" anchor="ctr"/>
-          <a:lstStyle/>
-          <a:p>
-            <a:pPr algn="ctr">
-              <a:defRPr>
-                <a:latin typeface="Roboto"/>
-              </a:defRPr>
-            </a:pPr>
-          </a:p>
-        </p:txBody>
-      </p:sp>
-      <p:sp>
-        <p:nvSpPr>
-          <p:cNvPr id="3" name="TextBox 2"/>
-          <p:cNvSpPr txBox="1"/>
-          <p:nvPr/>
-        </p:nvSpPr>
-        <p:spPr>
-          <a:xfrm>
-            <a:off x="457200" y="164592"/>
-            <a:ext cx="7315200" cy="274320"/>
-          </a:xfrm>
-          <a:prstGeom prst="rect">
-            <a:avLst/>
-          </a:prstGeom>
-          <a:noFill/>
-        </p:spPr>
-        <p:txBody>
-          <a:bodyPr wrap="square">
-            <a:spAutoFit/>
-          </a:bodyPr>
-          <a:lstStyle/>
-          <a:p>
-            <a:pPr>
-              <a:defRPr>
-                <a:latin typeface="Roboto"/>
-              </a:defRPr>
-            </a:pPr>
-            <a:r>
-              <a:rPr sz="1000" b="0">
-                <a:solidFill>
-                  <a:srgbClr val="5F6F63"/>
-                </a:solidFill>
-                <a:latin typeface="Roboto"/>
-              </a:rPr>
-              <a:t>Sample Community Services Ltd · What does each program really cost?</a:t>
-            </a:r>
-          </a:p>
-        </p:txBody>
-      </p:sp>
-      <p:sp>
-        <p:nvSpPr>
-          <p:cNvPr id="4" name="TextBox 3"/>
-          <p:cNvSpPr txBox="1"/>
-          <p:nvPr/>
-        </p:nvSpPr>
-        <p:spPr>
-          <a:xfrm>
-            <a:off x="457200" y="411480"/>
-            <a:ext cx="11247120" cy="548640"/>
-          </a:xfrm>
-          <a:prstGeom prst="rect">
-            <a:avLst/>
-          </a:prstGeom>
-          <a:noFill/>
-        </p:spPr>
-        <p:txBody>
-          <a:bodyPr wrap="square">
-            <a:spAutoFit/>
-          </a:bodyPr>
-          <a:lstStyle/>
-          <a:p>
-            <a:pPr>
-              <a:defRPr>
-                <a:latin typeface="Roboto"/>
-              </a:defRPr>
-            </a:pPr>
-            <a:r>
-              <a:rPr sz="2400" b="1">
-                <a:solidFill>
-                  <a:srgbClr val="25342A"/>
-                </a:solidFill>
-                <a:latin typeface="Roboto"/>
-              </a:rPr>
-              <a:t>Grant spending, by month · Spend $ · Every program at once</a:t>
-            </a:r>
-          </a:p>
-        </p:txBody>
-      </p:sp>
-      <p:sp>
-        <p:nvSpPr>
-          <p:cNvPr id="5" name="TextBox 4"/>
-          <p:cNvSpPr txBox="1"/>
-          <p:nvPr/>
-        </p:nvSpPr>
-        <p:spPr>
-          <a:xfrm>
-            <a:off x="457200" y="960120"/>
-            <a:ext cx="11247120" cy="457200"/>
-          </a:xfrm>
-          <a:prstGeom prst="rect">
-            <a:avLst/>
-          </a:prstGeom>
-          <a:noFill/>
-        </p:spPr>
-        <p:txBody>
-          <a:bodyPr wrap="square">
-            <a:spAutoFit/>
-          </a:bodyPr>
-          <a:lstStyle/>
-          <a:p>
-            <a:pPr>
-              <a:defRPr>
-                <a:latin typeface="Roboto"/>
-              </a:defRPr>
-            </a:pPr>
-            <a:r>
-              <a:rPr sz="1200" b="0">
-                <a:solidFill>
-                  <a:srgbClr val="5F6F63"/>
-                </a:solidFill>
-                <a:latin typeface="Roboto"/>
-              </a:rPr>
-              <a:t>Grant spending only (the program's direct cost). All programs includes grants that have finished.</a:t>
-            </a:r>
-          </a:p>
-        </p:txBody>
-      </p:sp>
-      <p:graphicFrame>
-        <p:nvGraphicFramePr>
-          <p:cNvPr id="6" name="Chart 5"/>
-          <p:cNvGraphicFramePr>
-            <a:graphicFrameLocks noGrp="1"/>
-          </p:cNvGraphicFramePr>
-          <p:nvPr/>
-        </p:nvGraphicFramePr>
-        <p:xfrm>
-          <a:off x="457200" y="1463040"/>
-          <a:ext cx="11247120" cy="4754880"/>
-        </p:xfrm>
-        <a:graphic>
-          <a:graphicData uri="http://schemas.openxmlformats.org/drawingml/2006/chart">
-            <c:chart xmlns:c="http://schemas.openxmlformats.org/drawingml/2006/chart" r:id="rId2"/>
-          </a:graphicData>
-        </a:graphic>
-      </p:graphicFrame>
-      <p:sp>
-        <p:nvSpPr>
-          <p:cNvPr id="7" name="TextBox 6"/>
-          <p:cNvSpPr txBox="1"/>
-          <p:nvPr/>
-        </p:nvSpPr>
-        <p:spPr>
-          <a:xfrm>
-            <a:off x="457200" y="6492240"/>
-            <a:ext cx="3657600" cy="274320"/>
-          </a:xfrm>
-          <a:prstGeom prst="rect">
-            <a:avLst/>
-          </a:prstGeom>
-          <a:noFill/>
-        </p:spPr>
-        <p:txBody>
-          <a:bodyPr wrap="square">
-            <a:spAutoFit/>
-          </a:bodyPr>
-          <a:lstStyle/>
-          <a:p>
-            <a:pPr>
-              <a:defRPr>
-                <a:latin typeface="Roboto"/>
-              </a:defRPr>
-            </a:pPr>
-            <a:r>
-              <a:rPr sz="900" b="0">
-                <a:solidFill>
-                  <a:srgbClr val="5F6F63"/>
-                </a:solidFill>
-                <a:latin typeface="Roboto"/>
-              </a:rPr>
-              <a:t>program-cost.pptx</a:t>
-            </a:r>
-          </a:p>
-        </p:txBody>
-      </p:sp>
-      <p:sp>
-        <p:nvSpPr>
-          <p:cNvPr id="8" name="TextBox 7"/>
-          <p:cNvSpPr txBox="1"/>
-          <p:nvPr/>
-        </p:nvSpPr>
-        <p:spPr>
-          <a:xfrm>
-            <a:off x="4297680" y="6492240"/>
-            <a:ext cx="3657600" cy="274320"/>
-          </a:xfrm>
-          <a:prstGeom prst="rect">
-            <a:avLst/>
-          </a:prstGeom>
-          <a:noFill/>
-        </p:spPr>
-        <p:txBody>
-          <a:bodyPr wrap="square">
-            <a:spAutoFit/>
-          </a:bodyPr>
-          <a:lstStyle/>
-          <a:p>
-            <a:pPr algn="ctr">
-              <a:defRPr>
-                <a:latin typeface="Roboto"/>
-              </a:defRPr>
-            </a:pPr>
-            <a:r>
-              <a:rPr sz="900" b="0">
-                <a:solidFill>
-                  <a:srgbClr val="5F6F63"/>
-                </a:solidFill>
-                <a:latin typeface="Roboto"/>
-              </a:rPr>
-              <a:t>Data retrieved 2pm, Tue 6 Oct 2026 · Sample data</a:t>
-            </a:r>
-          </a:p>
-        </p:txBody>
-      </p:sp>
-      <p:sp>
-        <p:nvSpPr>
-          <p:cNvPr id="9" name="TextBox 8"/>
-          <p:cNvSpPr txBox="1"/>
-          <p:nvPr/>
-        </p:nvSpPr>
-        <p:spPr>
-          <a:xfrm>
-            <a:off x="8503920" y="6492240"/>
-            <a:ext cx="3200400" cy="274320"/>
-          </a:xfrm>
-          <a:prstGeom prst="rect">
-            <a:avLst/>
-          </a:prstGeom>
-          <a:noFill/>
-        </p:spPr>
-        <p:txBody>
-          <a:bodyPr wrap="square">
-            <a:spAutoFit/>
-          </a:bodyPr>
-          <a:lstStyle/>
-          <a:p>
-            <a:pPr algn="r">
-              <a:defRPr>
-                <a:latin typeface="Roboto"/>
-              </a:defRPr>
-            </a:pPr>
-            <a:r>
-              <a:rPr sz="900" b="0">
-                <a:solidFill>
-                  <a:srgbClr val="5F6F63"/>
-                </a:solidFill>
-                <a:latin typeface="Roboto"/>
-              </a:rPr>
-              <a:t>Slide 10 of 10</a:t>
+              <a:t>Slide 1 of 7</a:t>
             </a:r>
           </a:p>
         </p:txBody>
@@ -4547,7 +5999,44 @@
       <p:grpSpPr/>
       <p:sp>
         <p:nvSpPr>
-          <p:cNvPr id="2" name="Rectangle 1"/>
+          <p:cNvPr id="2" name="Title 1"/>
+          <p:cNvSpPr>
+            <a:spLocks noGrp="1"/>
+          </p:cNvSpPr>
+          <p:nvPr>
+            <p:ph type="title"/>
+          </p:nvPr>
+        </p:nvSpPr>
+        <p:spPr>
+          <a:xfrm>
+            <a:off x="457200" y="384048"/>
+            <a:ext cx="11277295" cy="475488"/>
+          </a:xfrm>
+        </p:spPr>
+        <p:txBody>
+          <a:bodyPr wrap="square" lIns="45720" rIns="45720" tIns="0" bIns="0" anchor="t"/>
+          <a:lstStyle/>
+          <a:p>
+            <a:pPr algn="l">
+              <a:defRPr>
+                <a:latin typeface="Roboto"/>
+              </a:defRPr>
+            </a:pPr>
+            <a:r>
+              <a:rPr sz="2400" b="1">
+                <a:solidFill>
+                  <a:srgbClr val="25342A"/>
+                </a:solidFill>
+                <a:latin typeface="Roboto"/>
+              </a:rPr>
+              <a:t>All programs</a:t>
+            </a:r>
+          </a:p>
+        </p:txBody>
+      </p:sp>
+      <p:sp>
+        <p:nvSpPr>
+          <p:cNvPr id="3" name="Rectangle 2"/>
           <p:cNvSpPr/>
           <p:nvPr/>
         </p:nvSpPr>
@@ -4594,14 +6083,14 @@
       </p:sp>
       <p:sp>
         <p:nvSpPr>
-          <p:cNvPr id="3" name="TextBox 2"/>
+          <p:cNvPr id="4" name="TextBox 3"/>
           <p:cNvSpPr txBox="1"/>
           <p:nvPr/>
         </p:nvSpPr>
         <p:spPr>
           <a:xfrm>
-            <a:off x="457200" y="164592"/>
-            <a:ext cx="7315200" cy="274320"/>
+            <a:off x="457200" y="146304"/>
+            <a:ext cx="8229600" cy="256032"/>
           </a:xfrm>
           <a:prstGeom prst="rect">
             <a:avLst/>
@@ -4609,7 +6098,7 @@
           <a:noFill/>
         </p:spPr>
         <p:txBody>
-          <a:bodyPr wrap="square">
+          <a:bodyPr wrap="square" lIns="45720" rIns="45720">
             <a:spAutoFit/>
           </a:bodyPr>
           <a:lstStyle/>
@@ -4633,14 +6122,14 @@
       </p:sp>
       <p:sp>
         <p:nvSpPr>
-          <p:cNvPr id="4" name="TextBox 3"/>
+          <p:cNvPr id="5" name="TextBox 4"/>
           <p:cNvSpPr txBox="1"/>
           <p:nvPr/>
         </p:nvSpPr>
         <p:spPr>
           <a:xfrm>
-            <a:off x="457200" y="411480"/>
-            <a:ext cx="11247120" cy="548640"/>
+            <a:off x="457200" y="914400"/>
+            <a:ext cx="11277295" cy="263652"/>
           </a:xfrm>
           <a:prstGeom prst="rect">
             <a:avLst/>
@@ -4648,7 +6137,7 @@
           <a:noFill/>
         </p:spPr>
         <p:txBody>
-          <a:bodyPr wrap="square">
+          <a:bodyPr wrap="square" lIns="45720" rIns="45720">
             <a:spAutoFit/>
           </a:bodyPr>
           <a:lstStyle/>
@@ -4659,45 +6148,94 @@
               </a:defRPr>
             </a:pPr>
             <a:r>
-              <a:rPr sz="2400" b="1">
+              <a:rPr sz="1200" b="0">
                 <a:solidFill>
-                  <a:srgbClr val="25342A"/>
+                  <a:srgbClr val="5F6F63"/>
                 </a:solidFill>
                 <a:latin typeface="Roboto"/>
               </a:rPr>
-              <a:t>Full cost of each program, March 2026 · $ · Program: All programs</a:t>
+              <a:t>Full cost of each program, March 2026</a:t>
             </a:r>
           </a:p>
         </p:txBody>
       </p:sp>
       <p:graphicFrame>
         <p:nvGraphicFramePr>
-          <p:cNvPr id="5" name="Chart 4"/>
+          <p:cNvPr id="6" name="Chart 5"/>
           <p:cNvGraphicFramePr>
             <a:graphicFrameLocks noGrp="1"/>
           </p:cNvGraphicFramePr>
           <p:nvPr/>
         </p:nvGraphicFramePr>
         <p:xfrm>
-          <a:off x="457200" y="1188720"/>
-          <a:ext cx="11247120" cy="5029200"/>
+          <a:off x="457200" y="1278636"/>
+          <a:ext cx="11277295" cy="2651760"/>
         </p:xfrm>
         <a:graphic>
           <a:graphicData uri="http://schemas.openxmlformats.org/drawingml/2006/chart">
-            <c:chart xmlns:c="http://schemas.openxmlformats.org/drawingml/2006/chart" r:id="rId2"/>
+            <c:chart xmlns:c="http://schemas.openxmlformats.org/drawingml/2006/chart" r:id="rId3"/>
           </a:graphicData>
         </a:graphic>
       </p:graphicFrame>
       <p:sp>
         <p:nvSpPr>
-          <p:cNvPr id="6" name="TextBox 5"/>
+          <p:cNvPr id="7" name="Rectangle 6"/>
+          <p:cNvSpPr/>
+          <p:nvPr/>
+        </p:nvSpPr>
+        <p:spPr>
+          <a:xfrm>
+            <a:off x="457200" y="4021836"/>
+            <a:ext cx="5501487" cy="1295400"/>
+          </a:xfrm>
+          <a:prstGeom prst="rect">
+            <a:avLst/>
+          </a:prstGeom>
+          <a:solidFill>
+            <a:srgbClr val="FFFFFF"/>
+          </a:solidFill>
+          <a:ln>
+            <a:solidFill>
+              <a:srgbClr val="DCE8DC"/>
+            </a:solidFill>
+          </a:ln>
+        </p:spPr>
+        <p:style>
+          <a:lnRef idx="1">
+            <a:schemeClr val="accent1"/>
+          </a:lnRef>
+          <a:fillRef idx="3">
+            <a:schemeClr val="accent1"/>
+          </a:fillRef>
+          <a:effectRef idx="2">
+            <a:schemeClr val="accent1"/>
+          </a:effectRef>
+          <a:fontRef idx="minor">
+            <a:schemeClr val="lt1"/>
+          </a:fontRef>
+        </p:style>
+        <p:txBody>
+          <a:bodyPr rtlCol="0" anchor="ctr"/>
+          <a:lstStyle/>
+          <a:p>
+            <a:pPr algn="ctr">
+              <a:defRPr>
+                <a:latin typeface="Roboto"/>
+              </a:defRPr>
+            </a:pPr>
+          </a:p>
+        </p:txBody>
+      </p:sp>
+      <p:sp>
+        <p:nvSpPr>
+          <p:cNvPr id="8" name="TextBox 7"/>
           <p:cNvSpPr txBox="1"/>
           <p:nvPr/>
         </p:nvSpPr>
         <p:spPr>
           <a:xfrm>
-            <a:off x="457200" y="6492240"/>
-            <a:ext cx="3657600" cy="274320"/>
+            <a:off x="594360" y="4076700"/>
+            <a:ext cx="5227167" cy="274320"/>
           </a:xfrm>
           <a:prstGeom prst="rect">
             <a:avLst/>
@@ -4705,7 +6243,212 @@
           <a:noFill/>
         </p:spPr>
         <p:txBody>
-          <a:bodyPr wrap="square">
+          <a:bodyPr wrap="square" lIns="45720" rIns="45720">
+            <a:spAutoFit/>
+          </a:bodyPr>
+          <a:lstStyle/>
+          <a:p>
+            <a:pPr>
+              <a:defRPr>
+                <a:latin typeface="Roboto"/>
+              </a:defRPr>
+            </a:pPr>
+            <a:r>
+              <a:rPr sz="1000" b="1">
+                <a:solidFill>
+                  <a:srgbClr val="5F6F63"/>
+                </a:solidFill>
+                <a:latin typeface="Roboto"/>
+              </a:rPr>
+              <a:t>WHAT IT SHOWS</a:t>
+            </a:r>
+          </a:p>
+        </p:txBody>
+      </p:sp>
+      <p:sp>
+        <p:nvSpPr>
+          <p:cNvPr id="9" name="TextBox 8"/>
+          <p:cNvSpPr txBox="1"/>
+          <p:nvPr/>
+        </p:nvSpPr>
+        <p:spPr>
+          <a:xfrm>
+            <a:off x="594360" y="4351020"/>
+            <a:ext cx="5227167" cy="929640"/>
+          </a:xfrm>
+          <a:prstGeom prst="rect">
+            <a:avLst/>
+          </a:prstGeom>
+          <a:noFill/>
+        </p:spPr>
+        <p:txBody>
+          <a:bodyPr wrap="square" lIns="45720" rIns="45720">
+            <a:spAutoFit/>
+          </a:bodyPr>
+          <a:lstStyle/>
+          <a:p>
+            <a:pPr>
+              <a:defRPr>
+                <a:latin typeface="Roboto"/>
+              </a:defRPr>
+            </a:pPr>
+            <a:r>
+              <a:rPr sz="1200" b="0">
+                <a:solidFill>
+                  <a:srgbClr val="25342A"/>
+                </a:solidFill>
+                <a:latin typeface="Roboto"/>
+              </a:rPr>
+              <a:t>Housing support is the biggest program: $49,107 in March once its share of untied program costs and administration is added to $24,832 of grant spending. Shared costs add 97.8% on top of grant spending across all programs.</a:t>
+            </a:r>
+          </a:p>
+        </p:txBody>
+      </p:sp>
+      <p:sp>
+        <p:nvSpPr>
+          <p:cNvPr id="10" name="Rectangle 9"/>
+          <p:cNvSpPr/>
+          <p:nvPr/>
+        </p:nvSpPr>
+        <p:spPr>
+          <a:xfrm>
+            <a:off x="6233007" y="4021836"/>
+            <a:ext cx="5501487" cy="1295400"/>
+          </a:xfrm>
+          <a:prstGeom prst="rect">
+            <a:avLst/>
+          </a:prstGeom>
+          <a:solidFill>
+            <a:srgbClr val="EEF5F0"/>
+          </a:solidFill>
+          <a:ln>
+            <a:solidFill>
+              <a:srgbClr val="DCE8DC"/>
+            </a:solidFill>
+          </a:ln>
+        </p:spPr>
+        <p:style>
+          <a:lnRef idx="1">
+            <a:schemeClr val="accent1"/>
+          </a:lnRef>
+          <a:fillRef idx="3">
+            <a:schemeClr val="accent1"/>
+          </a:fillRef>
+          <a:effectRef idx="2">
+            <a:schemeClr val="accent1"/>
+          </a:effectRef>
+          <a:fontRef idx="minor">
+            <a:schemeClr val="lt1"/>
+          </a:fontRef>
+        </p:style>
+        <p:txBody>
+          <a:bodyPr rtlCol="0" anchor="ctr"/>
+          <a:lstStyle/>
+          <a:p>
+            <a:pPr algn="ctr">
+              <a:defRPr>
+                <a:latin typeface="Roboto"/>
+              </a:defRPr>
+            </a:pPr>
+          </a:p>
+        </p:txBody>
+      </p:sp>
+      <p:sp>
+        <p:nvSpPr>
+          <p:cNvPr id="11" name="TextBox 10"/>
+          <p:cNvSpPr txBox="1"/>
+          <p:nvPr/>
+        </p:nvSpPr>
+        <p:spPr>
+          <a:xfrm>
+            <a:off x="6370167" y="4076700"/>
+            <a:ext cx="5227167" cy="274320"/>
+          </a:xfrm>
+          <a:prstGeom prst="rect">
+            <a:avLst/>
+          </a:prstGeom>
+          <a:noFill/>
+        </p:spPr>
+        <p:txBody>
+          <a:bodyPr wrap="square" lIns="45720" rIns="45720">
+            <a:spAutoFit/>
+          </a:bodyPr>
+          <a:lstStyle/>
+          <a:p>
+            <a:pPr>
+              <a:defRPr>
+                <a:latin typeface="Roboto"/>
+              </a:defRPr>
+            </a:pPr>
+            <a:r>
+              <a:rPr sz="1000" b="1">
+                <a:solidFill>
+                  <a:srgbClr val="5F6F63"/>
+                </a:solidFill>
+                <a:latin typeface="Roboto"/>
+              </a:rPr>
+              <a:t>WHAT YOU'D DO ABOUT IT</a:t>
+            </a:r>
+          </a:p>
+        </p:txBody>
+      </p:sp>
+      <p:sp>
+        <p:nvSpPr>
+          <p:cNvPr id="12" name="TextBox 11"/>
+          <p:cNvSpPr txBox="1"/>
+          <p:nvPr/>
+        </p:nvSpPr>
+        <p:spPr>
+          <a:xfrm>
+            <a:off x="6370167" y="4351020"/>
+            <a:ext cx="5227167" cy="929640"/>
+          </a:xfrm>
+          <a:prstGeom prst="rect">
+            <a:avLst/>
+          </a:prstGeom>
+          <a:noFill/>
+        </p:spPr>
+        <p:txBody>
+          <a:bodyPr wrap="square" lIns="45720" rIns="45720">
+            <a:spAutoFit/>
+          </a:bodyPr>
+          <a:lstStyle/>
+          <a:p>
+            <a:pPr>
+              <a:defRPr>
+                <a:latin typeface="Roboto"/>
+              </a:defRPr>
+            </a:pPr>
+            <a:r>
+              <a:rPr sz="1200" b="0">
+                <a:solidFill>
+                  <a:srgbClr val="25342A"/>
+                </a:solidFill>
+                <a:latin typeface="Roboto"/>
+              </a:rPr>
+              <a:t>The full cost (not just the grant line) is the number for renewal applications, where the funder lets you recover a share of overheads. Pick a program above to see it on its own.</a:t>
+            </a:r>
+          </a:p>
+        </p:txBody>
+      </p:sp>
+      <p:sp>
+        <p:nvSpPr>
+          <p:cNvPr id="13" name="TextBox 12"/>
+          <p:cNvSpPr txBox="1"/>
+          <p:nvPr/>
+        </p:nvSpPr>
+        <p:spPr>
+          <a:xfrm>
+            <a:off x="457200" y="6492240"/>
+            <a:ext cx="2926080" cy="274320"/>
+          </a:xfrm>
+          <a:prstGeom prst="rect">
+            <a:avLst/>
+          </a:prstGeom>
+          <a:noFill/>
+        </p:spPr>
+        <p:txBody>
+          <a:bodyPr wrap="square" lIns="45720" rIns="45720">
             <a:spAutoFit/>
           </a:bodyPr>
           <a:lstStyle/>
@@ -4729,14 +6472,14 @@
       </p:sp>
       <p:sp>
         <p:nvSpPr>
-          <p:cNvPr id="7" name="TextBox 6"/>
+          <p:cNvPr id="14" name="TextBox 13"/>
           <p:cNvSpPr txBox="1"/>
           <p:nvPr/>
         </p:nvSpPr>
         <p:spPr>
           <a:xfrm>
-            <a:off x="4297680" y="6492240"/>
-            <a:ext cx="3657600" cy="274320"/>
+            <a:off x="3108960" y="6492240"/>
+            <a:ext cx="5943600" cy="274320"/>
           </a:xfrm>
           <a:prstGeom prst="rect">
             <a:avLst/>
@@ -4744,7 +6487,7 @@
           <a:noFill/>
         </p:spPr>
         <p:txBody>
-          <a:bodyPr wrap="square">
+          <a:bodyPr wrap="square" lIns="45720" rIns="45720">
             <a:spAutoFit/>
           </a:bodyPr>
           <a:lstStyle/>
@@ -4761,14 +6504,14 @@
                 </a:solidFill>
                 <a:latin typeface="Roboto"/>
               </a:rPr>
-              <a:t>Data retrieved 2pm, Tue 6 Oct 2026 · Sample data</a:t>
-            </a:r>
-          </a:p>
-        </p:txBody>
-      </p:sp>
-      <p:sp>
-        <p:nvSpPr>
-          <p:cNvPr id="8" name="TextBox 7"/>
+              <a:t>Data retrieved 2pm, Tue 6 Oct 2026 · Generated 8 Oct 2026, 9:35am · Sample data · Made with Python (python-pptx)</a:t>
+            </a:r>
+          </a:p>
+        </p:txBody>
+      </p:sp>
+      <p:sp>
+        <p:nvSpPr>
+          <p:cNvPr id="15" name="TextBox 14"/>
           <p:cNvSpPr txBox="1"/>
           <p:nvPr/>
         </p:nvSpPr>
@@ -4783,7 +6526,7 @@
           <a:noFill/>
         </p:spPr>
         <p:txBody>
-          <a:bodyPr wrap="square">
+          <a:bodyPr wrap="square" lIns="45720" rIns="45720">
             <a:spAutoFit/>
           </a:bodyPr>
           <a:lstStyle/>
@@ -4800,7 +6543,7 @@
                 </a:solidFill>
                 <a:latin typeface="Roboto"/>
               </a:rPr>
-              <a:t>Slide 2 of 10</a:t>
+              <a:t>Slide 2 of 7</a:t>
             </a:r>
           </a:p>
         </p:txBody>
@@ -4825,7 +6568,44 @@
       <p:grpSpPr/>
       <p:sp>
         <p:nvSpPr>
-          <p:cNvPr id="2" name="Rectangle 1"/>
+          <p:cNvPr id="2" name="Title 1"/>
+          <p:cNvSpPr>
+            <a:spLocks noGrp="1"/>
+          </p:cNvSpPr>
+          <p:nvPr>
+            <p:ph type="title"/>
+          </p:nvPr>
+        </p:nvSpPr>
+        <p:spPr>
+          <a:xfrm>
+            <a:off x="457200" y="384048"/>
+            <a:ext cx="11277295" cy="475488"/>
+          </a:xfrm>
+        </p:spPr>
+        <p:txBody>
+          <a:bodyPr wrap="square" lIns="45720" rIns="45720" tIns="0" bIns="0" anchor="t"/>
+          <a:lstStyle/>
+          <a:p>
+            <a:pPr algn="l">
+              <a:defRPr>
+                <a:latin typeface="Roboto"/>
+              </a:defRPr>
+            </a:pPr>
+            <a:r>
+              <a:rPr sz="2400" b="1">
+                <a:solidFill>
+                  <a:srgbClr val="25342A"/>
+                </a:solidFill>
+                <a:latin typeface="Roboto"/>
+              </a:rPr>
+              <a:t>Housing support</a:t>
+            </a:r>
+          </a:p>
+        </p:txBody>
+      </p:sp>
+      <p:sp>
+        <p:nvSpPr>
+          <p:cNvPr id="3" name="Rectangle 2"/>
           <p:cNvSpPr/>
           <p:nvPr/>
         </p:nvSpPr>
@@ -4872,14 +6652,14 @@
       </p:sp>
       <p:sp>
         <p:nvSpPr>
-          <p:cNvPr id="3" name="TextBox 2"/>
+          <p:cNvPr id="4" name="TextBox 3"/>
           <p:cNvSpPr txBox="1"/>
           <p:nvPr/>
         </p:nvSpPr>
         <p:spPr>
           <a:xfrm>
-            <a:off x="457200" y="164592"/>
-            <a:ext cx="7315200" cy="274320"/>
+            <a:off x="457200" y="146304"/>
+            <a:ext cx="8229600" cy="256032"/>
           </a:xfrm>
           <a:prstGeom prst="rect">
             <a:avLst/>
@@ -4887,7 +6667,7 @@
           <a:noFill/>
         </p:spPr>
         <p:txBody>
-          <a:bodyPr wrap="square">
+          <a:bodyPr wrap="square" lIns="45720" rIns="45720">
             <a:spAutoFit/>
           </a:bodyPr>
           <a:lstStyle/>
@@ -4911,14 +6691,14 @@
       </p:sp>
       <p:sp>
         <p:nvSpPr>
-          <p:cNvPr id="4" name="TextBox 3"/>
+          <p:cNvPr id="5" name="TextBox 4"/>
           <p:cNvSpPr txBox="1"/>
           <p:nvPr/>
         </p:nvSpPr>
         <p:spPr>
           <a:xfrm>
-            <a:off x="457200" y="411480"/>
-            <a:ext cx="11247120" cy="548640"/>
+            <a:off x="457200" y="914400"/>
+            <a:ext cx="11277295" cy="263652"/>
           </a:xfrm>
           <a:prstGeom prst="rect">
             <a:avLst/>
@@ -4926,7 +6706,7 @@
           <a:noFill/>
         </p:spPr>
         <p:txBody>
-          <a:bodyPr wrap="square">
+          <a:bodyPr wrap="square" lIns="45720" rIns="45720">
             <a:spAutoFit/>
           </a:bodyPr>
           <a:lstStyle/>
@@ -4937,45 +6717,94 @@
               </a:defRPr>
             </a:pPr>
             <a:r>
-              <a:rPr sz="2400" b="1">
+              <a:rPr sz="1200" b="0">
                 <a:solidFill>
-                  <a:srgbClr val="25342A"/>
+                  <a:srgbClr val="5F6F63"/>
                 </a:solidFill>
                 <a:latin typeface="Roboto"/>
               </a:rPr>
-              <a:t>Full cost of each program, March 2026 · % of total · Program: All programs</a:t>
+              <a:t>Grant spending, by month · Housing support</a:t>
             </a:r>
           </a:p>
         </p:txBody>
       </p:sp>
       <p:graphicFrame>
         <p:nvGraphicFramePr>
-          <p:cNvPr id="5" name="Chart 4"/>
+          <p:cNvPr id="6" name="Chart 5"/>
           <p:cNvGraphicFramePr>
             <a:graphicFrameLocks noGrp="1"/>
           </p:cNvGraphicFramePr>
           <p:nvPr/>
         </p:nvGraphicFramePr>
         <p:xfrm>
-          <a:off x="457200" y="1188720"/>
-          <a:ext cx="11247120" cy="5029200"/>
+          <a:off x="457200" y="1278636"/>
+          <a:ext cx="11277295" cy="3643884"/>
         </p:xfrm>
         <a:graphic>
           <a:graphicData uri="http://schemas.openxmlformats.org/drawingml/2006/chart">
-            <c:chart xmlns:c="http://schemas.openxmlformats.org/drawingml/2006/chart" r:id="rId2"/>
+            <c:chart xmlns:c="http://schemas.openxmlformats.org/drawingml/2006/chart" r:id="rId3"/>
           </a:graphicData>
         </a:graphic>
       </p:graphicFrame>
       <p:sp>
         <p:nvSpPr>
-          <p:cNvPr id="6" name="TextBox 5"/>
+          <p:cNvPr id="7" name="Rectangle 6"/>
+          <p:cNvSpPr/>
+          <p:nvPr/>
+        </p:nvSpPr>
+        <p:spPr>
+          <a:xfrm>
+            <a:off x="457200" y="5013960"/>
+            <a:ext cx="5501487" cy="1295400"/>
+          </a:xfrm>
+          <a:prstGeom prst="rect">
+            <a:avLst/>
+          </a:prstGeom>
+          <a:solidFill>
+            <a:srgbClr val="FFFFFF"/>
+          </a:solidFill>
+          <a:ln>
+            <a:solidFill>
+              <a:srgbClr val="DCE8DC"/>
+            </a:solidFill>
+          </a:ln>
+        </p:spPr>
+        <p:style>
+          <a:lnRef idx="1">
+            <a:schemeClr val="accent1"/>
+          </a:lnRef>
+          <a:fillRef idx="3">
+            <a:schemeClr val="accent1"/>
+          </a:fillRef>
+          <a:effectRef idx="2">
+            <a:schemeClr val="accent1"/>
+          </a:effectRef>
+          <a:fontRef idx="minor">
+            <a:schemeClr val="lt1"/>
+          </a:fontRef>
+        </p:style>
+        <p:txBody>
+          <a:bodyPr rtlCol="0" anchor="ctr"/>
+          <a:lstStyle/>
+          <a:p>
+            <a:pPr algn="ctr">
+              <a:defRPr>
+                <a:latin typeface="Roboto"/>
+              </a:defRPr>
+            </a:pPr>
+          </a:p>
+        </p:txBody>
+      </p:sp>
+      <p:sp>
+        <p:nvSpPr>
+          <p:cNvPr id="8" name="TextBox 7"/>
           <p:cNvSpPr txBox="1"/>
           <p:nvPr/>
         </p:nvSpPr>
         <p:spPr>
           <a:xfrm>
-            <a:off x="457200" y="6492240"/>
-            <a:ext cx="3657600" cy="274320"/>
+            <a:off x="594360" y="5068824"/>
+            <a:ext cx="5227167" cy="274320"/>
           </a:xfrm>
           <a:prstGeom prst="rect">
             <a:avLst/>
@@ -4983,7 +6812,212 @@
           <a:noFill/>
         </p:spPr>
         <p:txBody>
-          <a:bodyPr wrap="square">
+          <a:bodyPr wrap="square" lIns="45720" rIns="45720">
+            <a:spAutoFit/>
+          </a:bodyPr>
+          <a:lstStyle/>
+          <a:p>
+            <a:pPr>
+              <a:defRPr>
+                <a:latin typeface="Roboto"/>
+              </a:defRPr>
+            </a:pPr>
+            <a:r>
+              <a:rPr sz="1000" b="1">
+                <a:solidFill>
+                  <a:srgbClr val="5F6F63"/>
+                </a:solidFill>
+                <a:latin typeface="Roboto"/>
+              </a:rPr>
+              <a:t>WHAT IT SHOWS</a:t>
+            </a:r>
+          </a:p>
+        </p:txBody>
+      </p:sp>
+      <p:sp>
+        <p:nvSpPr>
+          <p:cNvPr id="9" name="TextBox 8"/>
+          <p:cNvSpPr txBox="1"/>
+          <p:nvPr/>
+        </p:nvSpPr>
+        <p:spPr>
+          <a:xfrm>
+            <a:off x="594360" y="5343144"/>
+            <a:ext cx="5227167" cy="929640"/>
+          </a:xfrm>
+          <a:prstGeom prst="rect">
+            <a:avLst/>
+          </a:prstGeom>
+          <a:noFill/>
+        </p:spPr>
+        <p:txBody>
+          <a:bodyPr wrap="square" lIns="45720" rIns="45720">
+            <a:spAutoFit/>
+          </a:bodyPr>
+          <a:lstStyle/>
+          <a:p>
+            <a:pPr>
+              <a:defRPr>
+                <a:latin typeface="Roboto"/>
+              </a:defRPr>
+            </a:pPr>
+            <a:r>
+              <a:rPr sz="1200" b="0">
+                <a:solidFill>
+                  <a:srgbClr val="25342A"/>
+                </a:solidFill>
+                <a:latin typeface="Roboto"/>
+              </a:rPr>
+              <a:t>Housing support cost $49,107 in full in March: $24,832 paid by the State Housing Program grant, and $24,275 of shared costs no grant covers. It has spent 90.9% of its budget to date, with $278,158 left and 9 months to go.</a:t>
+            </a:r>
+          </a:p>
+        </p:txBody>
+      </p:sp>
+      <p:sp>
+        <p:nvSpPr>
+          <p:cNvPr id="10" name="Rectangle 9"/>
+          <p:cNvSpPr/>
+          <p:nvPr/>
+        </p:nvSpPr>
+        <p:spPr>
+          <a:xfrm>
+            <a:off x="6233007" y="5013960"/>
+            <a:ext cx="5501487" cy="1295400"/>
+          </a:xfrm>
+          <a:prstGeom prst="rect">
+            <a:avLst/>
+          </a:prstGeom>
+          <a:solidFill>
+            <a:srgbClr val="EEF5F0"/>
+          </a:solidFill>
+          <a:ln>
+            <a:solidFill>
+              <a:srgbClr val="DCE8DC"/>
+            </a:solidFill>
+          </a:ln>
+        </p:spPr>
+        <p:style>
+          <a:lnRef idx="1">
+            <a:schemeClr val="accent1"/>
+          </a:lnRef>
+          <a:fillRef idx="3">
+            <a:schemeClr val="accent1"/>
+          </a:fillRef>
+          <a:effectRef idx="2">
+            <a:schemeClr val="accent1"/>
+          </a:effectRef>
+          <a:fontRef idx="minor">
+            <a:schemeClr val="lt1"/>
+          </a:fontRef>
+        </p:style>
+        <p:txBody>
+          <a:bodyPr rtlCol="0" anchor="ctr"/>
+          <a:lstStyle/>
+          <a:p>
+            <a:pPr algn="ctr">
+              <a:defRPr>
+                <a:latin typeface="Roboto"/>
+              </a:defRPr>
+            </a:pPr>
+          </a:p>
+        </p:txBody>
+      </p:sp>
+      <p:sp>
+        <p:nvSpPr>
+          <p:cNvPr id="11" name="TextBox 10"/>
+          <p:cNvSpPr txBox="1"/>
+          <p:nvPr/>
+        </p:nvSpPr>
+        <p:spPr>
+          <a:xfrm>
+            <a:off x="6370167" y="5068824"/>
+            <a:ext cx="5227167" cy="274320"/>
+          </a:xfrm>
+          <a:prstGeom prst="rect">
+            <a:avLst/>
+          </a:prstGeom>
+          <a:noFill/>
+        </p:spPr>
+        <p:txBody>
+          <a:bodyPr wrap="square" lIns="45720" rIns="45720">
+            <a:spAutoFit/>
+          </a:bodyPr>
+          <a:lstStyle/>
+          <a:p>
+            <a:pPr>
+              <a:defRPr>
+                <a:latin typeface="Roboto"/>
+              </a:defRPr>
+            </a:pPr>
+            <a:r>
+              <a:rPr sz="1000" b="1">
+                <a:solidFill>
+                  <a:srgbClr val="5F6F63"/>
+                </a:solidFill>
+                <a:latin typeface="Roboto"/>
+              </a:rPr>
+              <a:t>WHAT YOU'D DO ABOUT IT</a:t>
+            </a:r>
+          </a:p>
+        </p:txBody>
+      </p:sp>
+      <p:sp>
+        <p:nvSpPr>
+          <p:cNvPr id="12" name="TextBox 11"/>
+          <p:cNvSpPr txBox="1"/>
+          <p:nvPr/>
+        </p:nvSpPr>
+        <p:spPr>
+          <a:xfrm>
+            <a:off x="6370167" y="5343144"/>
+            <a:ext cx="5227167" cy="929640"/>
+          </a:xfrm>
+          <a:prstGeom prst="rect">
+            <a:avLst/>
+          </a:prstGeom>
+          <a:noFill/>
+        </p:spPr>
+        <p:txBody>
+          <a:bodyPr wrap="square" lIns="45720" rIns="45720">
+            <a:spAutoFit/>
+          </a:bodyPr>
+          <a:lstStyle/>
+          <a:p>
+            <a:pPr>
+              <a:defRPr>
+                <a:latin typeface="Roboto"/>
+              </a:defRPr>
+            </a:pPr>
+            <a:r>
+              <a:rPr sz="1200" b="0">
+                <a:solidFill>
+                  <a:srgbClr val="25342A"/>
+                </a:solidFill>
+                <a:latin typeface="Roboto"/>
+              </a:rPr>
+              <a:t>The full cost is $49,107 a month; $24,275 of it is shared cost the grant doesn't pay for. Worth asking for as much of it as the funder allows at renewal.</a:t>
+            </a:r>
+          </a:p>
+        </p:txBody>
+      </p:sp>
+      <p:sp>
+        <p:nvSpPr>
+          <p:cNvPr id="13" name="TextBox 12"/>
+          <p:cNvSpPr txBox="1"/>
+          <p:nvPr/>
+        </p:nvSpPr>
+        <p:spPr>
+          <a:xfrm>
+            <a:off x="457200" y="6492240"/>
+            <a:ext cx="2926080" cy="274320"/>
+          </a:xfrm>
+          <a:prstGeom prst="rect">
+            <a:avLst/>
+          </a:prstGeom>
+          <a:noFill/>
+        </p:spPr>
+        <p:txBody>
+          <a:bodyPr wrap="square" lIns="45720" rIns="45720">
             <a:spAutoFit/>
           </a:bodyPr>
           <a:lstStyle/>
@@ -5007,14 +7041,14 @@
       </p:sp>
       <p:sp>
         <p:nvSpPr>
-          <p:cNvPr id="7" name="TextBox 6"/>
+          <p:cNvPr id="14" name="TextBox 13"/>
           <p:cNvSpPr txBox="1"/>
           <p:nvPr/>
         </p:nvSpPr>
         <p:spPr>
           <a:xfrm>
-            <a:off x="4297680" y="6492240"/>
-            <a:ext cx="3657600" cy="274320"/>
+            <a:off x="3108960" y="6492240"/>
+            <a:ext cx="5943600" cy="274320"/>
           </a:xfrm>
           <a:prstGeom prst="rect">
             <a:avLst/>
@@ -5022,7 +7056,7 @@
           <a:noFill/>
         </p:spPr>
         <p:txBody>
-          <a:bodyPr wrap="square">
+          <a:bodyPr wrap="square" lIns="45720" rIns="45720">
             <a:spAutoFit/>
           </a:bodyPr>
           <a:lstStyle/>
@@ -5039,14 +7073,14 @@
                 </a:solidFill>
                 <a:latin typeface="Roboto"/>
               </a:rPr>
-              <a:t>Data retrieved 2pm, Tue 6 Oct 2026 · Sample data</a:t>
-            </a:r>
-          </a:p>
-        </p:txBody>
-      </p:sp>
-      <p:sp>
-        <p:nvSpPr>
-          <p:cNvPr id="8" name="TextBox 7"/>
+              <a:t>Data retrieved 2pm, Tue 6 Oct 2026 · Generated 8 Oct 2026, 9:35am · Sample data · Made with Python (python-pptx)</a:t>
+            </a:r>
+          </a:p>
+        </p:txBody>
+      </p:sp>
+      <p:sp>
+        <p:nvSpPr>
+          <p:cNvPr id="15" name="TextBox 14"/>
           <p:cNvSpPr txBox="1"/>
           <p:nvPr/>
         </p:nvSpPr>
@@ -5061,7 +7095,7 @@
           <a:noFill/>
         </p:spPr>
         <p:txBody>
-          <a:bodyPr wrap="square">
+          <a:bodyPr wrap="square" lIns="45720" rIns="45720">
             <a:spAutoFit/>
           </a:bodyPr>
           <a:lstStyle/>
@@ -5078,7 +7112,7 @@
                 </a:solidFill>
                 <a:latin typeface="Roboto"/>
               </a:rPr>
-              <a:t>Slide 3 of 10</a:t>
+              <a:t>Slide 3 of 7</a:t>
             </a:r>
           </a:p>
         </p:txBody>
@@ -5103,7 +7137,44 @@
       <p:grpSpPr/>
       <p:sp>
         <p:nvSpPr>
-          <p:cNvPr id="2" name="Rectangle 1"/>
+          <p:cNvPr id="2" name="Title 1"/>
+          <p:cNvSpPr>
+            <a:spLocks noGrp="1"/>
+          </p:cNvSpPr>
+          <p:nvPr>
+            <p:ph type="title"/>
+          </p:nvPr>
+        </p:nvSpPr>
+        <p:spPr>
+          <a:xfrm>
+            <a:off x="457200" y="384048"/>
+            <a:ext cx="11277295" cy="475488"/>
+          </a:xfrm>
+        </p:spPr>
+        <p:txBody>
+          <a:bodyPr wrap="square" lIns="45720" rIns="45720" tIns="0" bIns="0" anchor="t"/>
+          <a:lstStyle/>
+          <a:p>
+            <a:pPr algn="l">
+              <a:defRPr>
+                <a:latin typeface="Roboto"/>
+              </a:defRPr>
+            </a:pPr>
+            <a:r>
+              <a:rPr sz="2400" b="1">
+                <a:solidFill>
+                  <a:srgbClr val="25342A"/>
+                </a:solidFill>
+                <a:latin typeface="Roboto"/>
+              </a:rPr>
+              <a:t>Youth outreach</a:t>
+            </a:r>
+          </a:p>
+        </p:txBody>
+      </p:sp>
+      <p:sp>
+        <p:nvSpPr>
+          <p:cNvPr id="3" name="Rectangle 2"/>
           <p:cNvSpPr/>
           <p:nvPr/>
         </p:nvSpPr>
@@ -5150,14 +7221,14 @@
       </p:sp>
       <p:sp>
         <p:nvSpPr>
-          <p:cNvPr id="3" name="TextBox 2"/>
+          <p:cNvPr id="4" name="TextBox 3"/>
           <p:cNvSpPr txBox="1"/>
           <p:nvPr/>
         </p:nvSpPr>
         <p:spPr>
           <a:xfrm>
-            <a:off x="457200" y="164592"/>
-            <a:ext cx="7315200" cy="274320"/>
+            <a:off x="457200" y="146304"/>
+            <a:ext cx="8229600" cy="256032"/>
           </a:xfrm>
           <a:prstGeom prst="rect">
             <a:avLst/>
@@ -5165,7 +7236,7 @@
           <a:noFill/>
         </p:spPr>
         <p:txBody>
-          <a:bodyPr wrap="square">
+          <a:bodyPr wrap="square" lIns="45720" rIns="45720">
             <a:spAutoFit/>
           </a:bodyPr>
           <a:lstStyle/>
@@ -5189,14 +7260,14 @@
       </p:sp>
       <p:sp>
         <p:nvSpPr>
-          <p:cNvPr id="4" name="TextBox 3"/>
+          <p:cNvPr id="5" name="TextBox 4"/>
           <p:cNvSpPr txBox="1"/>
           <p:nvPr/>
         </p:nvSpPr>
         <p:spPr>
           <a:xfrm>
-            <a:off x="457200" y="411480"/>
-            <a:ext cx="11247120" cy="548640"/>
+            <a:off x="457200" y="914400"/>
+            <a:ext cx="11277295" cy="263652"/>
           </a:xfrm>
           <a:prstGeom prst="rect">
             <a:avLst/>
@@ -5204,7 +7275,7 @@
           <a:noFill/>
         </p:spPr>
         <p:txBody>
-          <a:bodyPr wrap="square">
+          <a:bodyPr wrap="square" lIns="45720" rIns="45720">
             <a:spAutoFit/>
           </a:bodyPr>
           <a:lstStyle/>
@@ -5215,27 +7286,45 @@
               </a:defRPr>
             </a:pPr>
             <a:r>
-              <a:rPr sz="2400" b="1">
+              <a:rPr sz="1200" b="0">
                 <a:solidFill>
-                  <a:srgbClr val="25342A"/>
+                  <a:srgbClr val="5F6F63"/>
                 </a:solidFill>
                 <a:latin typeface="Roboto"/>
               </a:rPr>
-              <a:t>What it shows · Program: All programs</a:t>
-            </a:r>
-          </a:p>
-        </p:txBody>
-      </p:sp>
-      <p:sp>
-        <p:nvSpPr>
-          <p:cNvPr id="5" name="Rectangle 4"/>
+              <a:t>Grant spending, by month · Youth outreach</a:t>
+            </a:r>
+          </a:p>
+        </p:txBody>
+      </p:sp>
+      <p:graphicFrame>
+        <p:nvGraphicFramePr>
+          <p:cNvPr id="6" name="Chart 5"/>
+          <p:cNvGraphicFramePr>
+            <a:graphicFrameLocks noGrp="1"/>
+          </p:cNvGraphicFramePr>
+          <p:nvPr/>
+        </p:nvGraphicFramePr>
+        <p:xfrm>
+          <a:off x="457200" y="1278636"/>
+          <a:ext cx="11277295" cy="3643884"/>
+        </p:xfrm>
+        <a:graphic>
+          <a:graphicData uri="http://schemas.openxmlformats.org/drawingml/2006/chart">
+            <c:chart xmlns:c="http://schemas.openxmlformats.org/drawingml/2006/chart" r:id="rId3"/>
+          </a:graphicData>
+        </a:graphic>
+      </p:graphicFrame>
+      <p:sp>
+        <p:nvSpPr>
+          <p:cNvPr id="7" name="Rectangle 6"/>
           <p:cNvSpPr/>
           <p:nvPr/>
         </p:nvSpPr>
         <p:spPr>
           <a:xfrm>
-            <a:off x="457200" y="1554480"/>
-            <a:ext cx="5501487" cy="4389120"/>
+            <a:off x="457200" y="5013960"/>
+            <a:ext cx="5501487" cy="1295400"/>
           </a:xfrm>
           <a:prstGeom prst="rect">
             <a:avLst/>
@@ -5277,14 +7366,14 @@
       </p:sp>
       <p:sp>
         <p:nvSpPr>
-          <p:cNvPr id="6" name="TextBox 5"/>
+          <p:cNvPr id="8" name="TextBox 7"/>
           <p:cNvSpPr txBox="1"/>
           <p:nvPr/>
         </p:nvSpPr>
         <p:spPr>
           <a:xfrm>
-            <a:off x="685800" y="1691640"/>
-            <a:ext cx="5044287" cy="365760"/>
+            <a:off x="594360" y="5068824"/>
+            <a:ext cx="5227167" cy="274320"/>
           </a:xfrm>
           <a:prstGeom prst="rect">
             <a:avLst/>
@@ -5292,7 +7381,7 @@
           <a:noFill/>
         </p:spPr>
         <p:txBody>
-          <a:bodyPr wrap="square">
+          <a:bodyPr wrap="square" lIns="45720" rIns="45720">
             <a:spAutoFit/>
           </a:bodyPr>
           <a:lstStyle/>
@@ -5303,7 +7392,7 @@
               </a:defRPr>
             </a:pPr>
             <a:r>
-              <a:rPr sz="1100" b="1">
+              <a:rPr sz="1000" b="1">
                 <a:solidFill>
                   <a:srgbClr val="5F6F63"/>
                 </a:solidFill>
@@ -5316,14 +7405,14 @@
       </p:sp>
       <p:sp>
         <p:nvSpPr>
-          <p:cNvPr id="7" name="TextBox 6"/>
+          <p:cNvPr id="9" name="TextBox 8"/>
           <p:cNvSpPr txBox="1"/>
           <p:nvPr/>
         </p:nvSpPr>
         <p:spPr>
           <a:xfrm>
-            <a:off x="685800" y="2103120"/>
-            <a:ext cx="5044287" cy="3749039"/>
+            <a:off x="594360" y="5343144"/>
+            <a:ext cx="5227167" cy="929640"/>
           </a:xfrm>
           <a:prstGeom prst="rect">
             <a:avLst/>
@@ -5331,7 +7420,7 @@
           <a:noFill/>
         </p:spPr>
         <p:txBody>
-          <a:bodyPr wrap="square">
+          <a:bodyPr wrap="square" lIns="45720" rIns="45720">
             <a:spAutoFit/>
           </a:bodyPr>
           <a:lstStyle/>
@@ -5342,27 +7431,27 @@
               </a:defRPr>
             </a:pPr>
             <a:r>
-              <a:rPr sz="1600" b="0">
+              <a:rPr sz="1200" b="0">
                 <a:solidFill>
                   <a:srgbClr val="25342A"/>
                 </a:solidFill>
                 <a:latin typeface="Roboto"/>
               </a:rPr>
-              <a:t>Housing support is the biggest program: $49,107 in March once its share of untied program costs and administration is added to $24,832 of grant spending. Shared costs add 97.8% on top of grant spending across all programs.</a:t>
-            </a:r>
-          </a:p>
-        </p:txBody>
-      </p:sp>
-      <p:sp>
-        <p:nvSpPr>
-          <p:cNvPr id="8" name="Rectangle 7"/>
+              <a:t>Youth outreach cost $32,660 in full in March: $16,515 paid by the State Department of Families grant, and $16,145 of shared costs no grant covers. It has spent 98.2% of its budget to date, with $303,265 left and 15 months to go.</a:t>
+            </a:r>
+          </a:p>
+        </p:txBody>
+      </p:sp>
+      <p:sp>
+        <p:nvSpPr>
+          <p:cNvPr id="10" name="Rectangle 9"/>
           <p:cNvSpPr/>
           <p:nvPr/>
         </p:nvSpPr>
         <p:spPr>
           <a:xfrm>
-            <a:off x="6233007" y="1554480"/>
-            <a:ext cx="5501487" cy="4389120"/>
+            <a:off x="6233007" y="5013960"/>
+            <a:ext cx="5501487" cy="1295400"/>
           </a:xfrm>
           <a:prstGeom prst="rect">
             <a:avLst/>
@@ -5404,14 +7493,14 @@
       </p:sp>
       <p:sp>
         <p:nvSpPr>
-          <p:cNvPr id="9" name="TextBox 8"/>
+          <p:cNvPr id="11" name="TextBox 10"/>
           <p:cNvSpPr txBox="1"/>
           <p:nvPr/>
         </p:nvSpPr>
         <p:spPr>
           <a:xfrm>
-            <a:off x="6461607" y="1691640"/>
-            <a:ext cx="5044287" cy="365760"/>
+            <a:off x="6370167" y="5068824"/>
+            <a:ext cx="5227167" cy="274320"/>
           </a:xfrm>
           <a:prstGeom prst="rect">
             <a:avLst/>
@@ -5419,7 +7508,7 @@
           <a:noFill/>
         </p:spPr>
         <p:txBody>
-          <a:bodyPr wrap="square">
+          <a:bodyPr wrap="square" lIns="45720" rIns="45720">
             <a:spAutoFit/>
           </a:bodyPr>
           <a:lstStyle/>
@@ -5430,7 +7519,7 @@
               </a:defRPr>
             </a:pPr>
             <a:r>
-              <a:rPr sz="1100" b="1">
+              <a:rPr sz="1000" b="1">
                 <a:solidFill>
                   <a:srgbClr val="5F6F63"/>
                 </a:solidFill>
@@ -5443,14 +7532,14 @@
       </p:sp>
       <p:sp>
         <p:nvSpPr>
-          <p:cNvPr id="10" name="TextBox 9"/>
+          <p:cNvPr id="12" name="TextBox 11"/>
           <p:cNvSpPr txBox="1"/>
           <p:nvPr/>
         </p:nvSpPr>
         <p:spPr>
           <a:xfrm>
-            <a:off x="6461607" y="2103120"/>
-            <a:ext cx="5044287" cy="3749039"/>
+            <a:off x="6370167" y="5343144"/>
+            <a:ext cx="5227167" cy="929640"/>
           </a:xfrm>
           <a:prstGeom prst="rect">
             <a:avLst/>
@@ -5458,7 +7547,7 @@
           <a:noFill/>
         </p:spPr>
         <p:txBody>
-          <a:bodyPr wrap="square">
+          <a:bodyPr wrap="square" lIns="45720" rIns="45720">
             <a:spAutoFit/>
           </a:bodyPr>
           <a:lstStyle/>
@@ -5469,27 +7558,27 @@
               </a:defRPr>
             </a:pPr>
             <a:r>
-              <a:rPr sz="1600" b="0">
+              <a:rPr sz="1200" b="0">
                 <a:solidFill>
                   <a:srgbClr val="25342A"/>
                 </a:solidFill>
                 <a:latin typeface="Roboto"/>
               </a:rPr>
-              <a:t>The full cost (not just the grant line) is the number for renewal applications, where the funder lets you recover a share of overheads. Pick a program above to see it on its own.</a:t>
-            </a:r>
-          </a:p>
-        </p:txBody>
-      </p:sp>
-      <p:sp>
-        <p:nvSpPr>
-          <p:cNvPr id="11" name="TextBox 10"/>
+              <a:t>The full cost is $32,660 a month; $16,145 of it is shared cost the grant doesn't pay for. Worth asking for as much of it as the funder allows at renewal.</a:t>
+            </a:r>
+          </a:p>
+        </p:txBody>
+      </p:sp>
+      <p:sp>
+        <p:nvSpPr>
+          <p:cNvPr id="13" name="TextBox 12"/>
           <p:cNvSpPr txBox="1"/>
           <p:nvPr/>
         </p:nvSpPr>
         <p:spPr>
           <a:xfrm>
             <a:off x="457200" y="6492240"/>
-            <a:ext cx="3657600" cy="274320"/>
+            <a:ext cx="2926080" cy="274320"/>
           </a:xfrm>
           <a:prstGeom prst="rect">
             <a:avLst/>
@@ -5497,7 +7586,7 @@
           <a:noFill/>
         </p:spPr>
         <p:txBody>
-          <a:bodyPr wrap="square">
+          <a:bodyPr wrap="square" lIns="45720" rIns="45720">
             <a:spAutoFit/>
           </a:bodyPr>
           <a:lstStyle/>
@@ -5521,14 +7610,14 @@
       </p:sp>
       <p:sp>
         <p:nvSpPr>
-          <p:cNvPr id="12" name="TextBox 11"/>
+          <p:cNvPr id="14" name="TextBox 13"/>
           <p:cNvSpPr txBox="1"/>
           <p:nvPr/>
         </p:nvSpPr>
         <p:spPr>
           <a:xfrm>
-            <a:off x="4297680" y="6492240"/>
-            <a:ext cx="3657600" cy="274320"/>
+            <a:off x="3108960" y="6492240"/>
+            <a:ext cx="5943600" cy="274320"/>
           </a:xfrm>
           <a:prstGeom prst="rect">
             <a:avLst/>
@@ -5536,7 +7625,7 @@
           <a:noFill/>
         </p:spPr>
         <p:txBody>
-          <a:bodyPr wrap="square">
+          <a:bodyPr wrap="square" lIns="45720" rIns="45720">
             <a:spAutoFit/>
           </a:bodyPr>
           <a:lstStyle/>
@@ -5553,14 +7642,14 @@
                 </a:solidFill>
                 <a:latin typeface="Roboto"/>
               </a:rPr>
-              <a:t>Data retrieved 2pm, Tue 6 Oct 2026 · Sample data</a:t>
-            </a:r>
-          </a:p>
-        </p:txBody>
-      </p:sp>
-      <p:sp>
-        <p:nvSpPr>
-          <p:cNvPr id="13" name="TextBox 12"/>
+              <a:t>Data retrieved 2pm, Tue 6 Oct 2026 · Generated 8 Oct 2026, 9:35am · Sample data · Made with Python (python-pptx)</a:t>
+            </a:r>
+          </a:p>
+        </p:txBody>
+      </p:sp>
+      <p:sp>
+        <p:nvSpPr>
+          <p:cNvPr id="15" name="TextBox 14"/>
           <p:cNvSpPr txBox="1"/>
           <p:nvPr/>
         </p:nvSpPr>
@@ -5575,7 +7664,7 @@
           <a:noFill/>
         </p:spPr>
         <p:txBody>
-          <a:bodyPr wrap="square">
+          <a:bodyPr wrap="square" lIns="45720" rIns="45720">
             <a:spAutoFit/>
           </a:bodyPr>
           <a:lstStyle/>
@@ -5592,7 +7681,7 @@
                 </a:solidFill>
                 <a:latin typeface="Roboto"/>
               </a:rPr>
-              <a:t>Slide 4 of 10</a:t>
+              <a:t>Slide 4 of 7</a:t>
             </a:r>
           </a:p>
         </p:txBody>
@@ -5617,7 +7706,44 @@
       <p:grpSpPr/>
       <p:sp>
         <p:nvSpPr>
-          <p:cNvPr id="2" name="Rectangle 1"/>
+          <p:cNvPr id="2" name="Title 1"/>
+          <p:cNvSpPr>
+            <a:spLocks noGrp="1"/>
+          </p:cNvSpPr>
+          <p:nvPr>
+            <p:ph type="title"/>
+          </p:nvPr>
+        </p:nvSpPr>
+        <p:spPr>
+          <a:xfrm>
+            <a:off x="457200" y="384048"/>
+            <a:ext cx="11277295" cy="475488"/>
+          </a:xfrm>
+        </p:spPr>
+        <p:txBody>
+          <a:bodyPr wrap="square" lIns="45720" rIns="45720" tIns="0" bIns="0" anchor="t"/>
+          <a:lstStyle/>
+          <a:p>
+            <a:pPr algn="l">
+              <a:defRPr>
+                <a:latin typeface="Roboto"/>
+              </a:defRPr>
+            </a:pPr>
+            <a:r>
+              <a:rPr sz="2400" b="1">
+                <a:solidFill>
+                  <a:srgbClr val="25342A"/>
+                </a:solidFill>
+                <a:latin typeface="Roboto"/>
+              </a:rPr>
+              <a:t>Digital literacy</a:t>
+            </a:r>
+          </a:p>
+        </p:txBody>
+      </p:sp>
+      <p:sp>
+        <p:nvSpPr>
+          <p:cNvPr id="3" name="Rectangle 2"/>
           <p:cNvSpPr/>
           <p:nvPr/>
         </p:nvSpPr>
@@ -5664,14 +7790,14 @@
       </p:sp>
       <p:sp>
         <p:nvSpPr>
-          <p:cNvPr id="3" name="TextBox 2"/>
+          <p:cNvPr id="4" name="TextBox 3"/>
           <p:cNvSpPr txBox="1"/>
           <p:nvPr/>
         </p:nvSpPr>
         <p:spPr>
           <a:xfrm>
-            <a:off x="457200" y="164592"/>
-            <a:ext cx="7315200" cy="274320"/>
+            <a:off x="457200" y="146304"/>
+            <a:ext cx="8229600" cy="256032"/>
           </a:xfrm>
           <a:prstGeom prst="rect">
             <a:avLst/>
@@ -5679,7 +7805,7 @@
           <a:noFill/>
         </p:spPr>
         <p:txBody>
-          <a:bodyPr wrap="square">
+          <a:bodyPr wrap="square" lIns="45720" rIns="45720">
             <a:spAutoFit/>
           </a:bodyPr>
           <a:lstStyle/>
@@ -5703,14 +7829,14 @@
       </p:sp>
       <p:sp>
         <p:nvSpPr>
-          <p:cNvPr id="4" name="TextBox 3"/>
+          <p:cNvPr id="5" name="TextBox 4"/>
           <p:cNvSpPr txBox="1"/>
           <p:nvPr/>
         </p:nvSpPr>
         <p:spPr>
           <a:xfrm>
-            <a:off x="457200" y="411480"/>
-            <a:ext cx="11247120" cy="548640"/>
+            <a:off x="457200" y="914400"/>
+            <a:ext cx="11277295" cy="263652"/>
           </a:xfrm>
           <a:prstGeom prst="rect">
             <a:avLst/>
@@ -5718,7 +7844,7 @@
           <a:noFill/>
         </p:spPr>
         <p:txBody>
-          <a:bodyPr wrap="square">
+          <a:bodyPr wrap="square" lIns="45720" rIns="45720">
             <a:spAutoFit/>
           </a:bodyPr>
           <a:lstStyle/>
@@ -5729,27 +7855,45 @@
               </a:defRPr>
             </a:pPr>
             <a:r>
-              <a:rPr sz="2400" b="1">
+              <a:rPr sz="1200" b="0">
                 <a:solidFill>
-                  <a:srgbClr val="25342A"/>
+                  <a:srgbClr val="5F6F63"/>
                 </a:solidFill>
                 <a:latin typeface="Roboto"/>
               </a:rPr>
-              <a:t>What it shows · Program: Housing support</a:t>
-            </a:r>
-          </a:p>
-        </p:txBody>
-      </p:sp>
-      <p:sp>
-        <p:nvSpPr>
-          <p:cNvPr id="5" name="Rectangle 4"/>
+              <a:t>Grant spending, by month · Digital literacy</a:t>
+            </a:r>
+          </a:p>
+        </p:txBody>
+      </p:sp>
+      <p:graphicFrame>
+        <p:nvGraphicFramePr>
+          <p:cNvPr id="6" name="Chart 5"/>
+          <p:cNvGraphicFramePr>
+            <a:graphicFrameLocks noGrp="1"/>
+          </p:cNvGraphicFramePr>
+          <p:nvPr/>
+        </p:nvGraphicFramePr>
+        <p:xfrm>
+          <a:off x="457200" y="1278636"/>
+          <a:ext cx="11277295" cy="3643884"/>
+        </p:xfrm>
+        <a:graphic>
+          <a:graphicData uri="http://schemas.openxmlformats.org/drawingml/2006/chart">
+            <c:chart xmlns:c="http://schemas.openxmlformats.org/drawingml/2006/chart" r:id="rId3"/>
+          </a:graphicData>
+        </a:graphic>
+      </p:graphicFrame>
+      <p:sp>
+        <p:nvSpPr>
+          <p:cNvPr id="7" name="Rectangle 6"/>
           <p:cNvSpPr/>
           <p:nvPr/>
         </p:nvSpPr>
         <p:spPr>
           <a:xfrm>
-            <a:off x="457200" y="1554480"/>
-            <a:ext cx="5501487" cy="4389120"/>
+            <a:off x="457200" y="5013960"/>
+            <a:ext cx="5501487" cy="1295400"/>
           </a:xfrm>
           <a:prstGeom prst="rect">
             <a:avLst/>
@@ -5791,14 +7935,14 @@
       </p:sp>
       <p:sp>
         <p:nvSpPr>
-          <p:cNvPr id="6" name="TextBox 5"/>
+          <p:cNvPr id="8" name="TextBox 7"/>
           <p:cNvSpPr txBox="1"/>
           <p:nvPr/>
         </p:nvSpPr>
         <p:spPr>
           <a:xfrm>
-            <a:off x="685800" y="1691640"/>
-            <a:ext cx="5044287" cy="365760"/>
+            <a:off x="594360" y="5068824"/>
+            <a:ext cx="5227167" cy="274320"/>
           </a:xfrm>
           <a:prstGeom prst="rect">
             <a:avLst/>
@@ -5806,7 +7950,7 @@
           <a:noFill/>
         </p:spPr>
         <p:txBody>
-          <a:bodyPr wrap="square">
+          <a:bodyPr wrap="square" lIns="45720" rIns="45720">
             <a:spAutoFit/>
           </a:bodyPr>
           <a:lstStyle/>
@@ -5817,7 +7961,7 @@
               </a:defRPr>
             </a:pPr>
             <a:r>
-              <a:rPr sz="1100" b="1">
+              <a:rPr sz="1000" b="1">
                 <a:solidFill>
                   <a:srgbClr val="5F6F63"/>
                 </a:solidFill>
@@ -5830,14 +7974,14 @@
       </p:sp>
       <p:sp>
         <p:nvSpPr>
-          <p:cNvPr id="7" name="TextBox 6"/>
+          <p:cNvPr id="9" name="TextBox 8"/>
           <p:cNvSpPr txBox="1"/>
           <p:nvPr/>
         </p:nvSpPr>
         <p:spPr>
           <a:xfrm>
-            <a:off x="685800" y="2103120"/>
-            <a:ext cx="5044287" cy="3749039"/>
+            <a:off x="594360" y="5343144"/>
+            <a:ext cx="5227167" cy="929640"/>
           </a:xfrm>
           <a:prstGeom prst="rect">
             <a:avLst/>
@@ -5845,7 +7989,7 @@
           <a:noFill/>
         </p:spPr>
         <p:txBody>
-          <a:bodyPr wrap="square">
+          <a:bodyPr wrap="square" lIns="45720" rIns="45720">
             <a:spAutoFit/>
           </a:bodyPr>
           <a:lstStyle/>
@@ -5856,27 +8000,27 @@
               </a:defRPr>
             </a:pPr>
             <a:r>
-              <a:rPr sz="1600" b="0">
+              <a:rPr sz="1200" b="0">
                 <a:solidFill>
                   <a:srgbClr val="25342A"/>
                 </a:solidFill>
                 <a:latin typeface="Roboto"/>
               </a:rPr>
-              <a:t>Housing support cost $49,107 in full in March: $24,832 paid by the State Housing Program grant, and $24,275 of shared costs no grant covers. It has spent 90.9% of its budget to date, with $278,158 left and 9 months to go.</a:t>
-            </a:r>
-          </a:p>
-        </p:txBody>
-      </p:sp>
-      <p:sp>
-        <p:nvSpPr>
-          <p:cNvPr id="8" name="Rectangle 7"/>
+              <a:t>Digital literacy cost $10,732 in full in March: $5,427 paid by the Philanthropic foundation grant, and $5,305 of shared costs no grant covers. It has spent 100.8% of its budget to date, with $59,773 left and 12 months to go.</a:t>
+            </a:r>
+          </a:p>
+        </p:txBody>
+      </p:sp>
+      <p:sp>
+        <p:nvSpPr>
+          <p:cNvPr id="10" name="Rectangle 9"/>
           <p:cNvSpPr/>
           <p:nvPr/>
         </p:nvSpPr>
         <p:spPr>
           <a:xfrm>
-            <a:off x="6233007" y="1554480"/>
-            <a:ext cx="5501487" cy="4389120"/>
+            <a:off x="6233007" y="5013960"/>
+            <a:ext cx="5501487" cy="1295400"/>
           </a:xfrm>
           <a:prstGeom prst="rect">
             <a:avLst/>
@@ -5918,14 +8062,14 @@
       </p:sp>
       <p:sp>
         <p:nvSpPr>
-          <p:cNvPr id="9" name="TextBox 8"/>
+          <p:cNvPr id="11" name="TextBox 10"/>
           <p:cNvSpPr txBox="1"/>
           <p:nvPr/>
         </p:nvSpPr>
         <p:spPr>
           <a:xfrm>
-            <a:off x="6461607" y="1691640"/>
-            <a:ext cx="5044287" cy="365760"/>
+            <a:off x="6370167" y="5068824"/>
+            <a:ext cx="5227167" cy="274320"/>
           </a:xfrm>
           <a:prstGeom prst="rect">
             <a:avLst/>
@@ -5933,7 +8077,7 @@
           <a:noFill/>
         </p:spPr>
         <p:txBody>
-          <a:bodyPr wrap="square">
+          <a:bodyPr wrap="square" lIns="45720" rIns="45720">
             <a:spAutoFit/>
           </a:bodyPr>
           <a:lstStyle/>
@@ -5944,7 +8088,7 @@
               </a:defRPr>
             </a:pPr>
             <a:r>
-              <a:rPr sz="1100" b="1">
+              <a:rPr sz="1000" b="1">
                 <a:solidFill>
                   <a:srgbClr val="5F6F63"/>
                 </a:solidFill>
@@ -5957,14 +8101,14 @@
       </p:sp>
       <p:sp>
         <p:nvSpPr>
-          <p:cNvPr id="10" name="TextBox 9"/>
+          <p:cNvPr id="12" name="TextBox 11"/>
           <p:cNvSpPr txBox="1"/>
           <p:nvPr/>
         </p:nvSpPr>
         <p:spPr>
           <a:xfrm>
-            <a:off x="6461607" y="2103120"/>
-            <a:ext cx="5044287" cy="3749039"/>
+            <a:off x="6370167" y="5343144"/>
+            <a:ext cx="5227167" cy="929640"/>
           </a:xfrm>
           <a:prstGeom prst="rect">
             <a:avLst/>
@@ -5972,7 +8116,7 @@
           <a:noFill/>
         </p:spPr>
         <p:txBody>
-          <a:bodyPr wrap="square">
+          <a:bodyPr wrap="square" lIns="45720" rIns="45720">
             <a:spAutoFit/>
           </a:bodyPr>
           <a:lstStyle/>
@@ -5983,27 +8127,27 @@
               </a:defRPr>
             </a:pPr>
             <a:r>
-              <a:rPr sz="1600" b="0">
+              <a:rPr sz="1200" b="0">
                 <a:solidFill>
                   <a:srgbClr val="25342A"/>
                 </a:solidFill>
                 <a:latin typeface="Roboto"/>
               </a:rPr>
-              <a:t>The full cost is $49,107 a month; $24,275 of it is shared cost the grant doesn't pay for. Worth asking for as much of it as the funder allows at renewal.</a:t>
-            </a:r>
-          </a:p>
-        </p:txBody>
-      </p:sp>
-      <p:sp>
-        <p:nvSpPr>
-          <p:cNvPr id="11" name="TextBox 10"/>
+              <a:t>The full cost is $10,732 a month; $5,305 of it is shared cost the grant doesn't pay for. Worth asking for as much of it as the funder allows at renewal.</a:t>
+            </a:r>
+          </a:p>
+        </p:txBody>
+      </p:sp>
+      <p:sp>
+        <p:nvSpPr>
+          <p:cNvPr id="13" name="TextBox 12"/>
           <p:cNvSpPr txBox="1"/>
           <p:nvPr/>
         </p:nvSpPr>
         <p:spPr>
           <a:xfrm>
             <a:off x="457200" y="6492240"/>
-            <a:ext cx="3657600" cy="274320"/>
+            <a:ext cx="2926080" cy="274320"/>
           </a:xfrm>
           <a:prstGeom prst="rect">
             <a:avLst/>
@@ -6011,7 +8155,7 @@
           <a:noFill/>
         </p:spPr>
         <p:txBody>
-          <a:bodyPr wrap="square">
+          <a:bodyPr wrap="square" lIns="45720" rIns="45720">
             <a:spAutoFit/>
           </a:bodyPr>
           <a:lstStyle/>
@@ -6035,14 +8179,14 @@
       </p:sp>
       <p:sp>
         <p:nvSpPr>
-          <p:cNvPr id="12" name="TextBox 11"/>
+          <p:cNvPr id="14" name="TextBox 13"/>
           <p:cNvSpPr txBox="1"/>
           <p:nvPr/>
         </p:nvSpPr>
         <p:spPr>
           <a:xfrm>
-            <a:off x="4297680" y="6492240"/>
-            <a:ext cx="3657600" cy="274320"/>
+            <a:off x="3108960" y="6492240"/>
+            <a:ext cx="5943600" cy="274320"/>
           </a:xfrm>
           <a:prstGeom prst="rect">
             <a:avLst/>
@@ -6050,7 +8194,7 @@
           <a:noFill/>
         </p:spPr>
         <p:txBody>
-          <a:bodyPr wrap="square">
+          <a:bodyPr wrap="square" lIns="45720" rIns="45720">
             <a:spAutoFit/>
           </a:bodyPr>
           <a:lstStyle/>
@@ -6067,14 +8211,14 @@
                 </a:solidFill>
                 <a:latin typeface="Roboto"/>
               </a:rPr>
-              <a:t>Data retrieved 2pm, Tue 6 Oct 2026 · Sample data</a:t>
-            </a:r>
-          </a:p>
-        </p:txBody>
-      </p:sp>
-      <p:sp>
-        <p:nvSpPr>
-          <p:cNvPr id="13" name="TextBox 12"/>
+              <a:t>Data retrieved 2pm, Tue 6 Oct 2026 · Generated 8 Oct 2026, 9:35am · Sample data · Made with Python (python-pptx)</a:t>
+            </a:r>
+          </a:p>
+        </p:txBody>
+      </p:sp>
+      <p:sp>
+        <p:nvSpPr>
+          <p:cNvPr id="15" name="TextBox 14"/>
           <p:cNvSpPr txBox="1"/>
           <p:nvPr/>
         </p:nvSpPr>
@@ -6089,7 +8233,7 @@
           <a:noFill/>
         </p:spPr>
         <p:txBody>
-          <a:bodyPr wrap="square">
+          <a:bodyPr wrap="square" lIns="45720" rIns="45720">
             <a:spAutoFit/>
           </a:bodyPr>
           <a:lstStyle/>
@@ -6106,7 +8250,7 @@
                 </a:solidFill>
                 <a:latin typeface="Roboto"/>
               </a:rPr>
-              <a:t>Slide 5 of 10</a:t>
+              <a:t>Slide 5 of 7</a:t>
             </a:r>
           </a:p>
         </p:txBody>
@@ -6131,7 +8275,44 @@
       <p:grpSpPr/>
       <p:sp>
         <p:nvSpPr>
-          <p:cNvPr id="2" name="Rectangle 1"/>
+          <p:cNvPr id="2" name="Title 1"/>
+          <p:cNvSpPr>
+            <a:spLocks noGrp="1"/>
+          </p:cNvSpPr>
+          <p:nvPr>
+            <p:ph type="title"/>
+          </p:nvPr>
+        </p:nvSpPr>
+        <p:spPr>
+          <a:xfrm>
+            <a:off x="457200" y="384048"/>
+            <a:ext cx="11277295" cy="475488"/>
+          </a:xfrm>
+        </p:spPr>
+        <p:txBody>
+          <a:bodyPr wrap="square" lIns="45720" rIns="45720" tIns="0" bIns="0" anchor="t"/>
+          <a:lstStyle/>
+          <a:p>
+            <a:pPr algn="l">
+              <a:defRPr>
+                <a:latin typeface="Roboto"/>
+              </a:defRPr>
+            </a:pPr>
+            <a:r>
+              <a:rPr sz="2400" b="1">
+                <a:solidFill>
+                  <a:srgbClr val="25342A"/>
+                </a:solidFill>
+                <a:latin typeface="Roboto"/>
+              </a:rPr>
+              <a:t>Community meals (2025-26)</a:t>
+            </a:r>
+          </a:p>
+        </p:txBody>
+      </p:sp>
+      <p:sp>
+        <p:nvSpPr>
+          <p:cNvPr id="3" name="Rectangle 2"/>
           <p:cNvSpPr/>
           <p:nvPr/>
         </p:nvSpPr>
@@ -6178,14 +8359,14 @@
       </p:sp>
       <p:sp>
         <p:nvSpPr>
-          <p:cNvPr id="3" name="TextBox 2"/>
+          <p:cNvPr id="4" name="TextBox 3"/>
           <p:cNvSpPr txBox="1"/>
           <p:nvPr/>
         </p:nvSpPr>
         <p:spPr>
           <a:xfrm>
-            <a:off x="457200" y="164592"/>
-            <a:ext cx="7315200" cy="274320"/>
+            <a:off x="457200" y="146304"/>
+            <a:ext cx="8229600" cy="256032"/>
           </a:xfrm>
           <a:prstGeom prst="rect">
             <a:avLst/>
@@ -6193,7 +8374,7 @@
           <a:noFill/>
         </p:spPr>
         <p:txBody>
-          <a:bodyPr wrap="square">
+          <a:bodyPr wrap="square" lIns="45720" rIns="45720">
             <a:spAutoFit/>
           </a:bodyPr>
           <a:lstStyle/>
@@ -6217,14 +8398,14 @@
       </p:sp>
       <p:sp>
         <p:nvSpPr>
-          <p:cNvPr id="4" name="TextBox 3"/>
+          <p:cNvPr id="5" name="TextBox 4"/>
           <p:cNvSpPr txBox="1"/>
           <p:nvPr/>
         </p:nvSpPr>
         <p:spPr>
           <a:xfrm>
-            <a:off x="457200" y="411480"/>
-            <a:ext cx="11247120" cy="548640"/>
+            <a:off x="457200" y="914400"/>
+            <a:ext cx="11277295" cy="263652"/>
           </a:xfrm>
           <a:prstGeom prst="rect">
             <a:avLst/>
@@ -6232,7 +8413,7 @@
           <a:noFill/>
         </p:spPr>
         <p:txBody>
-          <a:bodyPr wrap="square">
+          <a:bodyPr wrap="square" lIns="45720" rIns="45720">
             <a:spAutoFit/>
           </a:bodyPr>
           <a:lstStyle/>
@@ -6243,27 +8424,45 @@
               </a:defRPr>
             </a:pPr>
             <a:r>
-              <a:rPr sz="2400" b="1">
+              <a:rPr sz="1200" b="0">
                 <a:solidFill>
-                  <a:srgbClr val="25342A"/>
+                  <a:srgbClr val="5F6F63"/>
                 </a:solidFill>
                 <a:latin typeface="Roboto"/>
               </a:rPr>
-              <a:t>What it shows · Program: Youth outreach</a:t>
-            </a:r>
-          </a:p>
-        </p:txBody>
-      </p:sp>
-      <p:sp>
-        <p:nvSpPr>
-          <p:cNvPr id="5" name="Rectangle 4"/>
+              <a:t>Grant spending, by month · Community meals (2025-26)</a:t>
+            </a:r>
+          </a:p>
+        </p:txBody>
+      </p:sp>
+      <p:graphicFrame>
+        <p:nvGraphicFramePr>
+          <p:cNvPr id="6" name="Chart 5"/>
+          <p:cNvGraphicFramePr>
+            <a:graphicFrameLocks noGrp="1"/>
+          </p:cNvGraphicFramePr>
+          <p:nvPr/>
+        </p:nvGraphicFramePr>
+        <p:xfrm>
+          <a:off x="457200" y="1278636"/>
+          <a:ext cx="11277295" cy="3643884"/>
+        </p:xfrm>
+        <a:graphic>
+          <a:graphicData uri="http://schemas.openxmlformats.org/drawingml/2006/chart">
+            <c:chart xmlns:c="http://schemas.openxmlformats.org/drawingml/2006/chart" r:id="rId3"/>
+          </a:graphicData>
+        </a:graphic>
+      </p:graphicFrame>
+      <p:sp>
+        <p:nvSpPr>
+          <p:cNvPr id="7" name="Rectangle 6"/>
           <p:cNvSpPr/>
           <p:nvPr/>
         </p:nvSpPr>
         <p:spPr>
           <a:xfrm>
-            <a:off x="457200" y="1554480"/>
-            <a:ext cx="5501487" cy="4389120"/>
+            <a:off x="457200" y="5013960"/>
+            <a:ext cx="5501487" cy="1295400"/>
           </a:xfrm>
           <a:prstGeom prst="rect">
             <a:avLst/>
@@ -6305,14 +8504,14 @@
       </p:sp>
       <p:sp>
         <p:nvSpPr>
-          <p:cNvPr id="6" name="TextBox 5"/>
+          <p:cNvPr id="8" name="TextBox 7"/>
           <p:cNvSpPr txBox="1"/>
           <p:nvPr/>
         </p:nvSpPr>
         <p:spPr>
           <a:xfrm>
-            <a:off x="685800" y="1691640"/>
-            <a:ext cx="5044287" cy="365760"/>
+            <a:off x="594360" y="5068824"/>
+            <a:ext cx="5227167" cy="274320"/>
           </a:xfrm>
           <a:prstGeom prst="rect">
             <a:avLst/>
@@ -6320,7 +8519,7 @@
           <a:noFill/>
         </p:spPr>
         <p:txBody>
-          <a:bodyPr wrap="square">
+          <a:bodyPr wrap="square" lIns="45720" rIns="45720">
             <a:spAutoFit/>
           </a:bodyPr>
           <a:lstStyle/>
@@ -6331,7 +8530,7 @@
               </a:defRPr>
             </a:pPr>
             <a:r>
-              <a:rPr sz="1100" b="1">
+              <a:rPr sz="1000" b="1">
                 <a:solidFill>
                   <a:srgbClr val="5F6F63"/>
                 </a:solidFill>
@@ -6344,14 +8543,14 @@
       </p:sp>
       <p:sp>
         <p:nvSpPr>
-          <p:cNvPr id="7" name="TextBox 6"/>
+          <p:cNvPr id="9" name="TextBox 8"/>
           <p:cNvSpPr txBox="1"/>
           <p:nvPr/>
         </p:nvSpPr>
         <p:spPr>
           <a:xfrm>
-            <a:off x="685800" y="2103120"/>
-            <a:ext cx="5044287" cy="3749039"/>
+            <a:off x="594360" y="5343144"/>
+            <a:ext cx="5227167" cy="929640"/>
           </a:xfrm>
           <a:prstGeom prst="rect">
             <a:avLst/>
@@ -6359,7 +8558,7 @@
           <a:noFill/>
         </p:spPr>
         <p:txBody>
-          <a:bodyPr wrap="square">
+          <a:bodyPr wrap="square" lIns="45720" rIns="45720">
             <a:spAutoFit/>
           </a:bodyPr>
           <a:lstStyle/>
@@ -6370,27 +8569,27 @@
               </a:defRPr>
             </a:pPr>
             <a:r>
-              <a:rPr sz="1600" b="0">
+              <a:rPr sz="1200" b="0">
                 <a:solidFill>
                   <a:srgbClr val="25342A"/>
                 </a:solidFill>
                 <a:latin typeface="Roboto"/>
               </a:rPr>
-              <a:t>Youth outreach cost $32,660 in full in March: $16,515 paid by the State Department of Families grant, and $16,145 of shared costs no grant covers. It has spent 98.2% of its budget to date, with $303,265 left and 15 months to go.</a:t>
-            </a:r>
-          </a:p>
-        </p:txBody>
-      </p:sp>
-      <p:sp>
-        <p:nvSpPr>
-          <p:cNvPr id="8" name="Rectangle 7"/>
+              <a:t>Community meals (2025-26) cost $8,108 in full in March: $4,100 paid by the Local council community grant grant, and $4,008 of shared costs no grant covers. It has spent 96.7% of its budget to date, with $12,100 left and 3 months to go.</a:t>
+            </a:r>
+          </a:p>
+        </p:txBody>
+      </p:sp>
+      <p:sp>
+        <p:nvSpPr>
+          <p:cNvPr id="10" name="Rectangle 9"/>
           <p:cNvSpPr/>
           <p:nvPr/>
         </p:nvSpPr>
         <p:spPr>
           <a:xfrm>
-            <a:off x="6233007" y="1554480"/>
-            <a:ext cx="5501487" cy="4389120"/>
+            <a:off x="6233007" y="5013960"/>
+            <a:ext cx="5501487" cy="1295400"/>
           </a:xfrm>
           <a:prstGeom prst="rect">
             <a:avLst/>
@@ -6432,14 +8631,14 @@
       </p:sp>
       <p:sp>
         <p:nvSpPr>
-          <p:cNvPr id="9" name="TextBox 8"/>
+          <p:cNvPr id="11" name="TextBox 10"/>
           <p:cNvSpPr txBox="1"/>
           <p:nvPr/>
         </p:nvSpPr>
         <p:spPr>
           <a:xfrm>
-            <a:off x="6461607" y="1691640"/>
-            <a:ext cx="5044287" cy="365760"/>
+            <a:off x="6370167" y="5068824"/>
+            <a:ext cx="5227167" cy="274320"/>
           </a:xfrm>
           <a:prstGeom prst="rect">
             <a:avLst/>
@@ -6447,7 +8646,7 @@
           <a:noFill/>
         </p:spPr>
         <p:txBody>
-          <a:bodyPr wrap="square">
+          <a:bodyPr wrap="square" lIns="45720" rIns="45720">
             <a:spAutoFit/>
           </a:bodyPr>
           <a:lstStyle/>
@@ -6458,7 +8657,7 @@
               </a:defRPr>
             </a:pPr>
             <a:r>
-              <a:rPr sz="1100" b="1">
+              <a:rPr sz="1000" b="1">
                 <a:solidFill>
                   <a:srgbClr val="5F6F63"/>
                 </a:solidFill>
@@ -6471,14 +8670,14 @@
       </p:sp>
       <p:sp>
         <p:nvSpPr>
-          <p:cNvPr id="10" name="TextBox 9"/>
+          <p:cNvPr id="12" name="TextBox 11"/>
           <p:cNvSpPr txBox="1"/>
           <p:nvPr/>
         </p:nvSpPr>
         <p:spPr>
           <a:xfrm>
-            <a:off x="6461607" y="2103120"/>
-            <a:ext cx="5044287" cy="3749039"/>
+            <a:off x="6370167" y="5343144"/>
+            <a:ext cx="5227167" cy="929640"/>
           </a:xfrm>
           <a:prstGeom prst="rect">
             <a:avLst/>
@@ -6486,7 +8685,7 @@
           <a:noFill/>
         </p:spPr>
         <p:txBody>
-          <a:bodyPr wrap="square">
+          <a:bodyPr wrap="square" lIns="45720" rIns="45720">
             <a:spAutoFit/>
           </a:bodyPr>
           <a:lstStyle/>
@@ -6497,27 +8696,27 @@
               </a:defRPr>
             </a:pPr>
             <a:r>
-              <a:rPr sz="1600" b="0">
+              <a:rPr sz="1200" b="0">
                 <a:solidFill>
                   <a:srgbClr val="25342A"/>
                 </a:solidFill>
                 <a:latin typeface="Roboto"/>
               </a:rPr>
-              <a:t>The full cost is $32,660 a month; $16,145 of it is shared cost the grant doesn't pay for. Worth asking for as much of it as the funder allows at renewal.</a:t>
-            </a:r>
-          </a:p>
-        </p:txBody>
-      </p:sp>
-      <p:sp>
-        <p:nvSpPr>
-          <p:cNvPr id="11" name="TextBox 10"/>
+              <a:t>The full cost is $8,108 a month; $4,008 of it is shared cost the grant doesn't pay for. Worth asking for as much of it as the funder allows at renewal.</a:t>
+            </a:r>
+          </a:p>
+        </p:txBody>
+      </p:sp>
+      <p:sp>
+        <p:nvSpPr>
+          <p:cNvPr id="13" name="TextBox 12"/>
           <p:cNvSpPr txBox="1"/>
           <p:nvPr/>
         </p:nvSpPr>
         <p:spPr>
           <a:xfrm>
             <a:off x="457200" y="6492240"/>
-            <a:ext cx="3657600" cy="274320"/>
+            <a:ext cx="2926080" cy="274320"/>
           </a:xfrm>
           <a:prstGeom prst="rect">
             <a:avLst/>
@@ -6525,7 +8724,7 @@
           <a:noFill/>
         </p:spPr>
         <p:txBody>
-          <a:bodyPr wrap="square">
+          <a:bodyPr wrap="square" lIns="45720" rIns="45720">
             <a:spAutoFit/>
           </a:bodyPr>
           <a:lstStyle/>
@@ -6549,14 +8748,14 @@
       </p:sp>
       <p:sp>
         <p:nvSpPr>
-          <p:cNvPr id="12" name="TextBox 11"/>
+          <p:cNvPr id="14" name="TextBox 13"/>
           <p:cNvSpPr txBox="1"/>
           <p:nvPr/>
         </p:nvSpPr>
         <p:spPr>
           <a:xfrm>
-            <a:off x="4297680" y="6492240"/>
-            <a:ext cx="3657600" cy="274320"/>
+            <a:off x="3108960" y="6492240"/>
+            <a:ext cx="5943600" cy="274320"/>
           </a:xfrm>
           <a:prstGeom prst="rect">
             <a:avLst/>
@@ -6564,7 +8763,7 @@
           <a:noFill/>
         </p:spPr>
         <p:txBody>
-          <a:bodyPr wrap="square">
+          <a:bodyPr wrap="square" lIns="45720" rIns="45720">
             <a:spAutoFit/>
           </a:bodyPr>
           <a:lstStyle/>
@@ -6581,14 +8780,14 @@
                 </a:solidFill>
                 <a:latin typeface="Roboto"/>
               </a:rPr>
-              <a:t>Data retrieved 2pm, Tue 6 Oct 2026 · Sample data</a:t>
-            </a:r>
-          </a:p>
-        </p:txBody>
-      </p:sp>
-      <p:sp>
-        <p:nvSpPr>
-          <p:cNvPr id="13" name="TextBox 12"/>
+              <a:t>Data retrieved 2pm, Tue 6 Oct 2026 · Generated 8 Oct 2026, 9:35am · Sample data · Made with Python (python-pptx)</a:t>
+            </a:r>
+          </a:p>
+        </p:txBody>
+      </p:sp>
+      <p:sp>
+        <p:nvSpPr>
+          <p:cNvPr id="15" name="TextBox 14"/>
           <p:cNvSpPr txBox="1"/>
           <p:nvPr/>
         </p:nvSpPr>
@@ -6603,7 +8802,7 @@
           <a:noFill/>
         </p:spPr>
         <p:txBody>
-          <a:bodyPr wrap="square">
+          <a:bodyPr wrap="square" lIns="45720" rIns="45720">
             <a:spAutoFit/>
           </a:bodyPr>
           <a:lstStyle/>
@@ -6620,7 +8819,7 @@
                 </a:solidFill>
                 <a:latin typeface="Roboto"/>
               </a:rPr>
-              <a:t>Slide 6 of 10</a:t>
+              <a:t>Slide 6 of 7</a:t>
             </a:r>
           </a:p>
         </p:txBody>
@@ -6645,7 +8844,44 @@
       <p:grpSpPr/>
       <p:sp>
         <p:nvSpPr>
-          <p:cNvPr id="2" name="Rectangle 1"/>
+          <p:cNvPr id="2" name="Title 1"/>
+          <p:cNvSpPr>
+            <a:spLocks noGrp="1"/>
+          </p:cNvSpPr>
+          <p:nvPr>
+            <p:ph type="title"/>
+          </p:nvPr>
+        </p:nvSpPr>
+        <p:spPr>
+          <a:xfrm>
+            <a:off x="457200" y="384048"/>
+            <a:ext cx="11277295" cy="475488"/>
+          </a:xfrm>
+        </p:spPr>
+        <p:txBody>
+          <a:bodyPr wrap="square" lIns="45720" rIns="45720" tIns="0" bIns="0" anchor="t"/>
+          <a:lstStyle/>
+          <a:p>
+            <a:pPr algn="l">
+              <a:defRPr>
+                <a:latin typeface="Roboto"/>
+              </a:defRPr>
+            </a:pPr>
+            <a:r>
+              <a:rPr sz="2400" b="1">
+                <a:solidFill>
+                  <a:srgbClr val="25342A"/>
+                </a:solidFill>
+                <a:latin typeface="Roboto"/>
+              </a:rPr>
+              <a:t>Volunteer coordinator</a:t>
+            </a:r>
+          </a:p>
+        </p:txBody>
+      </p:sp>
+      <p:sp>
+        <p:nvSpPr>
+          <p:cNvPr id="3" name="Rectangle 2"/>
           <p:cNvSpPr/>
           <p:nvPr/>
         </p:nvSpPr>
@@ -6692,14 +8928,14 @@
       </p:sp>
       <p:sp>
         <p:nvSpPr>
-          <p:cNvPr id="3" name="TextBox 2"/>
+          <p:cNvPr id="4" name="TextBox 3"/>
           <p:cNvSpPr txBox="1"/>
           <p:nvPr/>
         </p:nvSpPr>
         <p:spPr>
           <a:xfrm>
-            <a:off x="457200" y="164592"/>
-            <a:ext cx="7315200" cy="274320"/>
+            <a:off x="457200" y="146304"/>
+            <a:ext cx="8229600" cy="256032"/>
           </a:xfrm>
           <a:prstGeom prst="rect">
             <a:avLst/>
@@ -6707,7 +8943,7 @@
           <a:noFill/>
         </p:spPr>
         <p:txBody>
-          <a:bodyPr wrap="square">
+          <a:bodyPr wrap="square" lIns="45720" rIns="45720">
             <a:spAutoFit/>
           </a:bodyPr>
           <a:lstStyle/>
@@ -6731,14 +8967,14 @@
       </p:sp>
       <p:sp>
         <p:nvSpPr>
-          <p:cNvPr id="4" name="TextBox 3"/>
+          <p:cNvPr id="5" name="TextBox 4"/>
           <p:cNvSpPr txBox="1"/>
           <p:nvPr/>
         </p:nvSpPr>
         <p:spPr>
           <a:xfrm>
-            <a:off x="457200" y="411480"/>
-            <a:ext cx="11247120" cy="548640"/>
+            <a:off x="457200" y="914400"/>
+            <a:ext cx="11277295" cy="263652"/>
           </a:xfrm>
           <a:prstGeom prst="rect">
             <a:avLst/>
@@ -6746,7 +8982,7 @@
           <a:noFill/>
         </p:spPr>
         <p:txBody>
-          <a:bodyPr wrap="square">
+          <a:bodyPr wrap="square" lIns="45720" rIns="45720">
             <a:spAutoFit/>
           </a:bodyPr>
           <a:lstStyle/>
@@ -6757,27 +8993,45 @@
               </a:defRPr>
             </a:pPr>
             <a:r>
-              <a:rPr sz="2400" b="1">
+              <a:rPr sz="1200" b="0">
                 <a:solidFill>
-                  <a:srgbClr val="25342A"/>
+                  <a:srgbClr val="5F6F63"/>
                 </a:solidFill>
                 <a:latin typeface="Roboto"/>
               </a:rPr>
-              <a:t>What it shows · Program: Digital literacy</a:t>
-            </a:r>
-          </a:p>
-        </p:txBody>
-      </p:sp>
-      <p:sp>
-        <p:nvSpPr>
-          <p:cNvPr id="5" name="Rectangle 4"/>
+              <a:t>Grant spending, by month · Volunteer coordinator</a:t>
+            </a:r>
+          </a:p>
+        </p:txBody>
+      </p:sp>
+      <p:graphicFrame>
+        <p:nvGraphicFramePr>
+          <p:cNvPr id="6" name="Chart 5"/>
+          <p:cNvGraphicFramePr>
+            <a:graphicFrameLocks noGrp="1"/>
+          </p:cNvGraphicFramePr>
+          <p:nvPr/>
+        </p:nvGraphicFramePr>
+        <p:xfrm>
+          <a:off x="457200" y="1278636"/>
+          <a:ext cx="11277295" cy="3643884"/>
+        </p:xfrm>
+        <a:graphic>
+          <a:graphicData uri="http://schemas.openxmlformats.org/drawingml/2006/chart">
+            <c:chart xmlns:c="http://schemas.openxmlformats.org/drawingml/2006/chart" r:id="rId3"/>
+          </a:graphicData>
+        </a:graphic>
+      </p:graphicFrame>
+      <p:sp>
+        <p:nvSpPr>
+          <p:cNvPr id="7" name="Rectangle 6"/>
           <p:cNvSpPr/>
           <p:nvPr/>
         </p:nvSpPr>
         <p:spPr>
           <a:xfrm>
-            <a:off x="457200" y="1554480"/>
-            <a:ext cx="5501487" cy="4389120"/>
+            <a:off x="457200" y="5013960"/>
+            <a:ext cx="5501487" cy="1295400"/>
           </a:xfrm>
           <a:prstGeom prst="rect">
             <a:avLst/>
@@ -6819,14 +9073,14 @@
       </p:sp>
       <p:sp>
         <p:nvSpPr>
-          <p:cNvPr id="6" name="TextBox 5"/>
+          <p:cNvPr id="8" name="TextBox 7"/>
           <p:cNvSpPr txBox="1"/>
           <p:nvPr/>
         </p:nvSpPr>
         <p:spPr>
           <a:xfrm>
-            <a:off x="685800" y="1691640"/>
-            <a:ext cx="5044287" cy="365760"/>
+            <a:off x="594360" y="5068824"/>
+            <a:ext cx="5227167" cy="274320"/>
           </a:xfrm>
           <a:prstGeom prst="rect">
             <a:avLst/>
@@ -6834,7 +9088,7 @@
           <a:noFill/>
         </p:spPr>
         <p:txBody>
-          <a:bodyPr wrap="square">
+          <a:bodyPr wrap="square" lIns="45720" rIns="45720">
             <a:spAutoFit/>
           </a:bodyPr>
           <a:lstStyle/>
@@ -6845,7 +9099,7 @@
               </a:defRPr>
             </a:pPr>
             <a:r>
-              <a:rPr sz="1100" b="1">
+              <a:rPr sz="1000" b="1">
                 <a:solidFill>
                   <a:srgbClr val="5F6F63"/>
                 </a:solidFill>
@@ -6858,14 +9112,14 @@
       </p:sp>
       <p:sp>
         <p:nvSpPr>
-          <p:cNvPr id="7" name="TextBox 6"/>
+          <p:cNvPr id="9" name="TextBox 8"/>
           <p:cNvSpPr txBox="1"/>
           <p:nvPr/>
         </p:nvSpPr>
         <p:spPr>
           <a:xfrm>
-            <a:off x="685800" y="2103120"/>
-            <a:ext cx="5044287" cy="3749039"/>
+            <a:off x="594360" y="5343144"/>
+            <a:ext cx="5227167" cy="929640"/>
           </a:xfrm>
           <a:prstGeom prst="rect">
             <a:avLst/>
@@ -6873,7 +9127,7 @@
           <a:noFill/>
         </p:spPr>
         <p:txBody>
-          <a:bodyPr wrap="square">
+          <a:bodyPr wrap="square" lIns="45720" rIns="45720">
             <a:spAutoFit/>
           </a:bodyPr>
           <a:lstStyle/>
@@ -6884,27 +9138,27 @@
               </a:defRPr>
             </a:pPr>
             <a:r>
-              <a:rPr sz="1600" b="0">
+              <a:rPr sz="1200" b="0">
                 <a:solidFill>
                   <a:srgbClr val="25342A"/>
                 </a:solidFill>
                 <a:latin typeface="Roboto"/>
               </a:rPr>
-              <a:t>Digital literacy cost $10,732 in full in March: $5,427 paid by the Philanthropic foundation grant, and $5,305 of shared costs no grant covers. It has spent 100.8% of its budget to date, with $59,773 left and 12 months to go.</a:t>
-            </a:r>
-          </a:p>
-        </p:txBody>
-      </p:sp>
-      <p:sp>
-        <p:nvSpPr>
-          <p:cNvPr id="8" name="Rectangle 7"/>
+              <a:t>Volunteer coordinator cost $5,798 in full in March: $2,932 paid by the State volunteering grant grant, and $2,866 of shared costs no grant covers. It has spent 97.7% of its budget to date, with $33,068 left and 11 months to go.</a:t>
+            </a:r>
+          </a:p>
+        </p:txBody>
+      </p:sp>
+      <p:sp>
+        <p:nvSpPr>
+          <p:cNvPr id="10" name="Rectangle 9"/>
           <p:cNvSpPr/>
           <p:nvPr/>
         </p:nvSpPr>
         <p:spPr>
           <a:xfrm>
-            <a:off x="6233007" y="1554480"/>
-            <a:ext cx="5501487" cy="4389120"/>
+            <a:off x="6233007" y="5013960"/>
+            <a:ext cx="5501487" cy="1295400"/>
           </a:xfrm>
           <a:prstGeom prst="rect">
             <a:avLst/>
@@ -6946,14 +9200,14 @@
       </p:sp>
       <p:sp>
         <p:nvSpPr>
-          <p:cNvPr id="9" name="TextBox 8"/>
+          <p:cNvPr id="11" name="TextBox 10"/>
           <p:cNvSpPr txBox="1"/>
           <p:nvPr/>
         </p:nvSpPr>
         <p:spPr>
           <a:xfrm>
-            <a:off x="6461607" y="1691640"/>
-            <a:ext cx="5044287" cy="365760"/>
+            <a:off x="6370167" y="5068824"/>
+            <a:ext cx="5227167" cy="274320"/>
           </a:xfrm>
           <a:prstGeom prst="rect">
             <a:avLst/>
@@ -6961,7 +9215,7 @@
           <a:noFill/>
         </p:spPr>
         <p:txBody>
-          <a:bodyPr wrap="square">
+          <a:bodyPr wrap="square" lIns="45720" rIns="45720">
             <a:spAutoFit/>
           </a:bodyPr>
           <a:lstStyle/>
@@ -6972,7 +9226,7 @@
               </a:defRPr>
             </a:pPr>
             <a:r>
-              <a:rPr sz="1100" b="1">
+              <a:rPr sz="1000" b="1">
                 <a:solidFill>
                   <a:srgbClr val="5F6F63"/>
                 </a:solidFill>
@@ -6985,14 +9239,14 @@
       </p:sp>
       <p:sp>
         <p:nvSpPr>
-          <p:cNvPr id="10" name="TextBox 9"/>
+          <p:cNvPr id="12" name="TextBox 11"/>
           <p:cNvSpPr txBox="1"/>
           <p:nvPr/>
         </p:nvSpPr>
         <p:spPr>
           <a:xfrm>
-            <a:off x="6461607" y="2103120"/>
-            <a:ext cx="5044287" cy="3749039"/>
+            <a:off x="6370167" y="5343144"/>
+            <a:ext cx="5227167" cy="929640"/>
           </a:xfrm>
           <a:prstGeom prst="rect">
             <a:avLst/>
@@ -7000,7 +9254,7 @@
           <a:noFill/>
         </p:spPr>
         <p:txBody>
-          <a:bodyPr wrap="square">
+          <a:bodyPr wrap="square" lIns="45720" rIns="45720">
             <a:spAutoFit/>
           </a:bodyPr>
           <a:lstStyle/>
@@ -7011,27 +9265,27 @@
               </a:defRPr>
             </a:pPr>
             <a:r>
-              <a:rPr sz="1600" b="0">
+              <a:rPr sz="1200" b="0">
                 <a:solidFill>
                   <a:srgbClr val="25342A"/>
                 </a:solidFill>
                 <a:latin typeface="Roboto"/>
               </a:rPr>
-              <a:t>The full cost is $10,732 a month; $5,305 of it is shared cost the grant doesn't pay for. Worth asking for as much of it as the funder allows at renewal.</a:t>
-            </a:r>
-          </a:p>
-        </p:txBody>
-      </p:sp>
-      <p:sp>
-        <p:nvSpPr>
-          <p:cNvPr id="11" name="TextBox 10"/>
+              <a:t>The full cost is $5,798 a month; $2,866 of it is shared cost the grant doesn't pay for. Worth asking for as much of it as the funder allows at renewal.</a:t>
+            </a:r>
+          </a:p>
+        </p:txBody>
+      </p:sp>
+      <p:sp>
+        <p:nvSpPr>
+          <p:cNvPr id="13" name="TextBox 12"/>
           <p:cNvSpPr txBox="1"/>
           <p:nvPr/>
         </p:nvSpPr>
         <p:spPr>
           <a:xfrm>
             <a:off x="457200" y="6492240"/>
-            <a:ext cx="3657600" cy="274320"/>
+            <a:ext cx="2926080" cy="274320"/>
           </a:xfrm>
           <a:prstGeom prst="rect">
             <a:avLst/>
@@ -7039,7 +9293,7 @@
           <a:noFill/>
         </p:spPr>
         <p:txBody>
-          <a:bodyPr wrap="square">
+          <a:bodyPr wrap="square" lIns="45720" rIns="45720">
             <a:spAutoFit/>
           </a:bodyPr>
           <a:lstStyle/>
@@ -7063,14 +9317,14 @@
       </p:sp>
       <p:sp>
         <p:nvSpPr>
-          <p:cNvPr id="12" name="TextBox 11"/>
+          <p:cNvPr id="14" name="TextBox 13"/>
           <p:cNvSpPr txBox="1"/>
           <p:nvPr/>
         </p:nvSpPr>
         <p:spPr>
           <a:xfrm>
-            <a:off x="4297680" y="6492240"/>
-            <a:ext cx="3657600" cy="274320"/>
+            <a:off x="3108960" y="6492240"/>
+            <a:ext cx="5943600" cy="274320"/>
           </a:xfrm>
           <a:prstGeom prst="rect">
             <a:avLst/>
@@ -7078,7 +9332,7 @@
           <a:noFill/>
         </p:spPr>
         <p:txBody>
-          <a:bodyPr wrap="square">
+          <a:bodyPr wrap="square" lIns="45720" rIns="45720">
             <a:spAutoFit/>
           </a:bodyPr>
           <a:lstStyle/>
@@ -7095,14 +9349,14 @@
                 </a:solidFill>
                 <a:latin typeface="Roboto"/>
               </a:rPr>
-              <a:t>Data retrieved 2pm, Tue 6 Oct 2026 · Sample data</a:t>
-            </a:r>
-          </a:p>
-        </p:txBody>
-      </p:sp>
-      <p:sp>
-        <p:nvSpPr>
-          <p:cNvPr id="13" name="TextBox 12"/>
+              <a:t>Data retrieved 2pm, Tue 6 Oct 2026 · Generated 8 Oct 2026, 9:35am · Sample data · Made with Python (python-pptx)</a:t>
+            </a:r>
+          </a:p>
+        </p:txBody>
+      </p:sp>
+      <p:sp>
+        <p:nvSpPr>
+          <p:cNvPr id="15" name="TextBox 14"/>
           <p:cNvSpPr txBox="1"/>
           <p:nvPr/>
         </p:nvSpPr>
@@ -7117,7 +9371,7 @@
           <a:noFill/>
         </p:spPr>
         <p:txBody>
-          <a:bodyPr wrap="square">
+          <a:bodyPr wrap="square" lIns="45720" rIns="45720">
             <a:spAutoFit/>
           </a:bodyPr>
           <a:lstStyle/>
@@ -7134,1035 +9388,7 @@
                 </a:solidFill>
                 <a:latin typeface="Roboto"/>
               </a:rPr>
-              <a:t>Slide 7 of 10</a:t>
-            </a:r>
-          </a:p>
-        </p:txBody>
-      </p:sp>
-    </p:spTree>
-  </p:cSld>
-  <p:clrMapOvr>
-    <a:masterClrMapping/>
-  </p:clrMapOvr>
-</p:sld>
-</file>
-
-<file path=ppt/slides/slide8.xml><?xml version="1.0" encoding="utf-8"?>
-<p:sld xmlns:a="http://schemas.openxmlformats.org/drawingml/2006/main" xmlns:p="http://schemas.openxmlformats.org/presentationml/2006/main" xmlns:r="http://schemas.openxmlformats.org/officeDocument/2006/relationships">
-  <p:cSld>
-    <p:spTree>
-      <p:nvGrpSpPr>
-        <p:cNvPr id="1" name=""/>
-        <p:cNvGrpSpPr/>
-        <p:nvPr/>
-      </p:nvGrpSpPr>
-      <p:grpSpPr/>
-      <p:sp>
-        <p:nvSpPr>
-          <p:cNvPr id="2" name="Rectangle 1"/>
-          <p:cNvSpPr/>
-          <p:nvPr/>
-        </p:nvSpPr>
-        <p:spPr>
-          <a:xfrm>
-            <a:off x="0" y="0"/>
-            <a:ext cx="12191695" cy="73152"/>
-          </a:xfrm>
-          <a:prstGeom prst="rect">
-            <a:avLst/>
-          </a:prstGeom>
-          <a:solidFill>
-            <a:srgbClr val="2F7A5D"/>
-          </a:solidFill>
-          <a:ln>
-            <a:noFill/>
-          </a:ln>
-        </p:spPr>
-        <p:style>
-          <a:lnRef idx="1">
-            <a:schemeClr val="accent1"/>
-          </a:lnRef>
-          <a:fillRef idx="3">
-            <a:schemeClr val="accent1"/>
-          </a:fillRef>
-          <a:effectRef idx="2">
-            <a:schemeClr val="accent1"/>
-          </a:effectRef>
-          <a:fontRef idx="minor">
-            <a:schemeClr val="lt1"/>
-          </a:fontRef>
-        </p:style>
-        <p:txBody>
-          <a:bodyPr rtlCol="0" anchor="ctr"/>
-          <a:lstStyle/>
-          <a:p>
-            <a:pPr algn="ctr">
-              <a:defRPr>
-                <a:latin typeface="Roboto"/>
-              </a:defRPr>
-            </a:pPr>
-          </a:p>
-        </p:txBody>
-      </p:sp>
-      <p:sp>
-        <p:nvSpPr>
-          <p:cNvPr id="3" name="TextBox 2"/>
-          <p:cNvSpPr txBox="1"/>
-          <p:nvPr/>
-        </p:nvSpPr>
-        <p:spPr>
-          <a:xfrm>
-            <a:off x="457200" y="164592"/>
-            <a:ext cx="7315200" cy="274320"/>
-          </a:xfrm>
-          <a:prstGeom prst="rect">
-            <a:avLst/>
-          </a:prstGeom>
-          <a:noFill/>
-        </p:spPr>
-        <p:txBody>
-          <a:bodyPr wrap="square">
-            <a:spAutoFit/>
-          </a:bodyPr>
-          <a:lstStyle/>
-          <a:p>
-            <a:pPr>
-              <a:defRPr>
-                <a:latin typeface="Roboto"/>
-              </a:defRPr>
-            </a:pPr>
-            <a:r>
-              <a:rPr sz="1000" b="0">
-                <a:solidFill>
-                  <a:srgbClr val="5F6F63"/>
-                </a:solidFill>
-                <a:latin typeface="Roboto"/>
-              </a:rPr>
-              <a:t>Sample Community Services Ltd · What does each program really cost?</a:t>
-            </a:r>
-          </a:p>
-        </p:txBody>
-      </p:sp>
-      <p:sp>
-        <p:nvSpPr>
-          <p:cNvPr id="4" name="TextBox 3"/>
-          <p:cNvSpPr txBox="1"/>
-          <p:nvPr/>
-        </p:nvSpPr>
-        <p:spPr>
-          <a:xfrm>
-            <a:off x="457200" y="411480"/>
-            <a:ext cx="11247120" cy="548640"/>
-          </a:xfrm>
-          <a:prstGeom prst="rect">
-            <a:avLst/>
-          </a:prstGeom>
-          <a:noFill/>
-        </p:spPr>
-        <p:txBody>
-          <a:bodyPr wrap="square">
-            <a:spAutoFit/>
-          </a:bodyPr>
-          <a:lstStyle/>
-          <a:p>
-            <a:pPr>
-              <a:defRPr>
-                <a:latin typeface="Roboto"/>
-              </a:defRPr>
-            </a:pPr>
-            <a:r>
-              <a:rPr sz="2400" b="1">
-                <a:solidFill>
-                  <a:srgbClr val="25342A"/>
-                </a:solidFill>
-                <a:latin typeface="Roboto"/>
-              </a:rPr>
-              <a:t>What it shows · Program: Community meals (2025-26)</a:t>
-            </a:r>
-          </a:p>
-        </p:txBody>
-      </p:sp>
-      <p:sp>
-        <p:nvSpPr>
-          <p:cNvPr id="5" name="Rectangle 4"/>
-          <p:cNvSpPr/>
-          <p:nvPr/>
-        </p:nvSpPr>
-        <p:spPr>
-          <a:xfrm>
-            <a:off x="457200" y="1554480"/>
-            <a:ext cx="5501487" cy="4389120"/>
-          </a:xfrm>
-          <a:prstGeom prst="rect">
-            <a:avLst/>
-          </a:prstGeom>
-          <a:solidFill>
-            <a:srgbClr val="FFFFFF"/>
-          </a:solidFill>
-          <a:ln>
-            <a:solidFill>
-              <a:srgbClr val="DCE8DC"/>
-            </a:solidFill>
-          </a:ln>
-        </p:spPr>
-        <p:style>
-          <a:lnRef idx="1">
-            <a:schemeClr val="accent1"/>
-          </a:lnRef>
-          <a:fillRef idx="3">
-            <a:schemeClr val="accent1"/>
-          </a:fillRef>
-          <a:effectRef idx="2">
-            <a:schemeClr val="accent1"/>
-          </a:effectRef>
-          <a:fontRef idx="minor">
-            <a:schemeClr val="lt1"/>
-          </a:fontRef>
-        </p:style>
-        <p:txBody>
-          <a:bodyPr rtlCol="0" anchor="ctr"/>
-          <a:lstStyle/>
-          <a:p>
-            <a:pPr algn="ctr">
-              <a:defRPr>
-                <a:latin typeface="Roboto"/>
-              </a:defRPr>
-            </a:pPr>
-          </a:p>
-        </p:txBody>
-      </p:sp>
-      <p:sp>
-        <p:nvSpPr>
-          <p:cNvPr id="6" name="TextBox 5"/>
-          <p:cNvSpPr txBox="1"/>
-          <p:nvPr/>
-        </p:nvSpPr>
-        <p:spPr>
-          <a:xfrm>
-            <a:off x="685800" y="1691640"/>
-            <a:ext cx="5044287" cy="365760"/>
-          </a:xfrm>
-          <a:prstGeom prst="rect">
-            <a:avLst/>
-          </a:prstGeom>
-          <a:noFill/>
-        </p:spPr>
-        <p:txBody>
-          <a:bodyPr wrap="square">
-            <a:spAutoFit/>
-          </a:bodyPr>
-          <a:lstStyle/>
-          <a:p>
-            <a:pPr>
-              <a:defRPr>
-                <a:latin typeface="Roboto"/>
-              </a:defRPr>
-            </a:pPr>
-            <a:r>
-              <a:rPr sz="1100" b="1">
-                <a:solidFill>
-                  <a:srgbClr val="5F6F63"/>
-                </a:solidFill>
-                <a:latin typeface="Roboto"/>
-              </a:rPr>
-              <a:t>WHAT IT SHOWS</a:t>
-            </a:r>
-          </a:p>
-        </p:txBody>
-      </p:sp>
-      <p:sp>
-        <p:nvSpPr>
-          <p:cNvPr id="7" name="TextBox 6"/>
-          <p:cNvSpPr txBox="1"/>
-          <p:nvPr/>
-        </p:nvSpPr>
-        <p:spPr>
-          <a:xfrm>
-            <a:off x="685800" y="2103120"/>
-            <a:ext cx="5044287" cy="3749039"/>
-          </a:xfrm>
-          <a:prstGeom prst="rect">
-            <a:avLst/>
-          </a:prstGeom>
-          <a:noFill/>
-        </p:spPr>
-        <p:txBody>
-          <a:bodyPr wrap="square">
-            <a:spAutoFit/>
-          </a:bodyPr>
-          <a:lstStyle/>
-          <a:p>
-            <a:pPr>
-              <a:defRPr>
-                <a:latin typeface="Roboto"/>
-              </a:defRPr>
-            </a:pPr>
-            <a:r>
-              <a:rPr sz="1600" b="0">
-                <a:solidFill>
-                  <a:srgbClr val="25342A"/>
-                </a:solidFill>
-                <a:latin typeface="Roboto"/>
-              </a:rPr>
-              <a:t>Community meals (2025-26) cost $8,108 in full in March: $4,100 paid by the Local council community grant grant, and $4,008 of shared costs no grant covers. It has spent 96.7% of its budget to date, with $12,100 left and 3 months to go.</a:t>
-            </a:r>
-          </a:p>
-        </p:txBody>
-      </p:sp>
-      <p:sp>
-        <p:nvSpPr>
-          <p:cNvPr id="8" name="Rectangle 7"/>
-          <p:cNvSpPr/>
-          <p:nvPr/>
-        </p:nvSpPr>
-        <p:spPr>
-          <a:xfrm>
-            <a:off x="6233007" y="1554480"/>
-            <a:ext cx="5501487" cy="4389120"/>
-          </a:xfrm>
-          <a:prstGeom prst="rect">
-            <a:avLst/>
-          </a:prstGeom>
-          <a:solidFill>
-            <a:srgbClr val="EEF5F0"/>
-          </a:solidFill>
-          <a:ln>
-            <a:solidFill>
-              <a:srgbClr val="DCE8DC"/>
-            </a:solidFill>
-          </a:ln>
-        </p:spPr>
-        <p:style>
-          <a:lnRef idx="1">
-            <a:schemeClr val="accent1"/>
-          </a:lnRef>
-          <a:fillRef idx="3">
-            <a:schemeClr val="accent1"/>
-          </a:fillRef>
-          <a:effectRef idx="2">
-            <a:schemeClr val="accent1"/>
-          </a:effectRef>
-          <a:fontRef idx="minor">
-            <a:schemeClr val="lt1"/>
-          </a:fontRef>
-        </p:style>
-        <p:txBody>
-          <a:bodyPr rtlCol="0" anchor="ctr"/>
-          <a:lstStyle/>
-          <a:p>
-            <a:pPr algn="ctr">
-              <a:defRPr>
-                <a:latin typeface="Roboto"/>
-              </a:defRPr>
-            </a:pPr>
-          </a:p>
-        </p:txBody>
-      </p:sp>
-      <p:sp>
-        <p:nvSpPr>
-          <p:cNvPr id="9" name="TextBox 8"/>
-          <p:cNvSpPr txBox="1"/>
-          <p:nvPr/>
-        </p:nvSpPr>
-        <p:spPr>
-          <a:xfrm>
-            <a:off x="6461607" y="1691640"/>
-            <a:ext cx="5044287" cy="365760"/>
-          </a:xfrm>
-          <a:prstGeom prst="rect">
-            <a:avLst/>
-          </a:prstGeom>
-          <a:noFill/>
-        </p:spPr>
-        <p:txBody>
-          <a:bodyPr wrap="square">
-            <a:spAutoFit/>
-          </a:bodyPr>
-          <a:lstStyle/>
-          <a:p>
-            <a:pPr>
-              <a:defRPr>
-                <a:latin typeface="Roboto"/>
-              </a:defRPr>
-            </a:pPr>
-            <a:r>
-              <a:rPr sz="1100" b="1">
-                <a:solidFill>
-                  <a:srgbClr val="5F6F63"/>
-                </a:solidFill>
-                <a:latin typeface="Roboto"/>
-              </a:rPr>
-              <a:t>WHAT YOU'D DO ABOUT IT</a:t>
-            </a:r>
-          </a:p>
-        </p:txBody>
-      </p:sp>
-      <p:sp>
-        <p:nvSpPr>
-          <p:cNvPr id="10" name="TextBox 9"/>
-          <p:cNvSpPr txBox="1"/>
-          <p:nvPr/>
-        </p:nvSpPr>
-        <p:spPr>
-          <a:xfrm>
-            <a:off x="6461607" y="2103120"/>
-            <a:ext cx="5044287" cy="3749039"/>
-          </a:xfrm>
-          <a:prstGeom prst="rect">
-            <a:avLst/>
-          </a:prstGeom>
-          <a:noFill/>
-        </p:spPr>
-        <p:txBody>
-          <a:bodyPr wrap="square">
-            <a:spAutoFit/>
-          </a:bodyPr>
-          <a:lstStyle/>
-          <a:p>
-            <a:pPr>
-              <a:defRPr>
-                <a:latin typeface="Roboto"/>
-              </a:defRPr>
-            </a:pPr>
-            <a:r>
-              <a:rPr sz="1600" b="0">
-                <a:solidFill>
-                  <a:srgbClr val="25342A"/>
-                </a:solidFill>
-                <a:latin typeface="Roboto"/>
-              </a:rPr>
-              <a:t>The full cost is $8,108 a month; $4,008 of it is shared cost the grant doesn't pay for. Worth asking for as much of it as the funder allows at renewal.</a:t>
-            </a:r>
-          </a:p>
-        </p:txBody>
-      </p:sp>
-      <p:sp>
-        <p:nvSpPr>
-          <p:cNvPr id="11" name="TextBox 10"/>
-          <p:cNvSpPr txBox="1"/>
-          <p:nvPr/>
-        </p:nvSpPr>
-        <p:spPr>
-          <a:xfrm>
-            <a:off x="457200" y="6492240"/>
-            <a:ext cx="3657600" cy="274320"/>
-          </a:xfrm>
-          <a:prstGeom prst="rect">
-            <a:avLst/>
-          </a:prstGeom>
-          <a:noFill/>
-        </p:spPr>
-        <p:txBody>
-          <a:bodyPr wrap="square">
-            <a:spAutoFit/>
-          </a:bodyPr>
-          <a:lstStyle/>
-          <a:p>
-            <a:pPr>
-              <a:defRPr>
-                <a:latin typeface="Roboto"/>
-              </a:defRPr>
-            </a:pPr>
-            <a:r>
-              <a:rPr sz="900" b="0">
-                <a:solidFill>
-                  <a:srgbClr val="5F6F63"/>
-                </a:solidFill>
-                <a:latin typeface="Roboto"/>
-              </a:rPr>
-              <a:t>program-cost.pptx</a:t>
-            </a:r>
-          </a:p>
-        </p:txBody>
-      </p:sp>
-      <p:sp>
-        <p:nvSpPr>
-          <p:cNvPr id="12" name="TextBox 11"/>
-          <p:cNvSpPr txBox="1"/>
-          <p:nvPr/>
-        </p:nvSpPr>
-        <p:spPr>
-          <a:xfrm>
-            <a:off x="4297680" y="6492240"/>
-            <a:ext cx="3657600" cy="274320"/>
-          </a:xfrm>
-          <a:prstGeom prst="rect">
-            <a:avLst/>
-          </a:prstGeom>
-          <a:noFill/>
-        </p:spPr>
-        <p:txBody>
-          <a:bodyPr wrap="square">
-            <a:spAutoFit/>
-          </a:bodyPr>
-          <a:lstStyle/>
-          <a:p>
-            <a:pPr algn="ctr">
-              <a:defRPr>
-                <a:latin typeface="Roboto"/>
-              </a:defRPr>
-            </a:pPr>
-            <a:r>
-              <a:rPr sz="900" b="0">
-                <a:solidFill>
-                  <a:srgbClr val="5F6F63"/>
-                </a:solidFill>
-                <a:latin typeface="Roboto"/>
-              </a:rPr>
-              <a:t>Data retrieved 2pm, Tue 6 Oct 2026 · Sample data</a:t>
-            </a:r>
-          </a:p>
-        </p:txBody>
-      </p:sp>
-      <p:sp>
-        <p:nvSpPr>
-          <p:cNvPr id="13" name="TextBox 12"/>
-          <p:cNvSpPr txBox="1"/>
-          <p:nvPr/>
-        </p:nvSpPr>
-        <p:spPr>
-          <a:xfrm>
-            <a:off x="8503920" y="6492240"/>
-            <a:ext cx="3200400" cy="274320"/>
-          </a:xfrm>
-          <a:prstGeom prst="rect">
-            <a:avLst/>
-          </a:prstGeom>
-          <a:noFill/>
-        </p:spPr>
-        <p:txBody>
-          <a:bodyPr wrap="square">
-            <a:spAutoFit/>
-          </a:bodyPr>
-          <a:lstStyle/>
-          <a:p>
-            <a:pPr algn="r">
-              <a:defRPr>
-                <a:latin typeface="Roboto"/>
-              </a:defRPr>
-            </a:pPr>
-            <a:r>
-              <a:rPr sz="900" b="0">
-                <a:solidFill>
-                  <a:srgbClr val="5F6F63"/>
-                </a:solidFill>
-                <a:latin typeface="Roboto"/>
-              </a:rPr>
-              <a:t>Slide 8 of 10</a:t>
-            </a:r>
-          </a:p>
-        </p:txBody>
-      </p:sp>
-    </p:spTree>
-  </p:cSld>
-  <p:clrMapOvr>
-    <a:masterClrMapping/>
-  </p:clrMapOvr>
-</p:sld>
-</file>
-
-<file path=ppt/slides/slide9.xml><?xml version="1.0" encoding="utf-8"?>
-<p:sld xmlns:a="http://schemas.openxmlformats.org/drawingml/2006/main" xmlns:p="http://schemas.openxmlformats.org/presentationml/2006/main" xmlns:r="http://schemas.openxmlformats.org/officeDocument/2006/relationships">
-  <p:cSld>
-    <p:spTree>
-      <p:nvGrpSpPr>
-        <p:cNvPr id="1" name=""/>
-        <p:cNvGrpSpPr/>
-        <p:nvPr/>
-      </p:nvGrpSpPr>
-      <p:grpSpPr/>
-      <p:sp>
-        <p:nvSpPr>
-          <p:cNvPr id="2" name="Rectangle 1"/>
-          <p:cNvSpPr/>
-          <p:nvPr/>
-        </p:nvSpPr>
-        <p:spPr>
-          <a:xfrm>
-            <a:off x="0" y="0"/>
-            <a:ext cx="12191695" cy="73152"/>
-          </a:xfrm>
-          <a:prstGeom prst="rect">
-            <a:avLst/>
-          </a:prstGeom>
-          <a:solidFill>
-            <a:srgbClr val="2F7A5D"/>
-          </a:solidFill>
-          <a:ln>
-            <a:noFill/>
-          </a:ln>
-        </p:spPr>
-        <p:style>
-          <a:lnRef idx="1">
-            <a:schemeClr val="accent1"/>
-          </a:lnRef>
-          <a:fillRef idx="3">
-            <a:schemeClr val="accent1"/>
-          </a:fillRef>
-          <a:effectRef idx="2">
-            <a:schemeClr val="accent1"/>
-          </a:effectRef>
-          <a:fontRef idx="minor">
-            <a:schemeClr val="lt1"/>
-          </a:fontRef>
-        </p:style>
-        <p:txBody>
-          <a:bodyPr rtlCol="0" anchor="ctr"/>
-          <a:lstStyle/>
-          <a:p>
-            <a:pPr algn="ctr">
-              <a:defRPr>
-                <a:latin typeface="Roboto"/>
-              </a:defRPr>
-            </a:pPr>
-          </a:p>
-        </p:txBody>
-      </p:sp>
-      <p:sp>
-        <p:nvSpPr>
-          <p:cNvPr id="3" name="TextBox 2"/>
-          <p:cNvSpPr txBox="1"/>
-          <p:nvPr/>
-        </p:nvSpPr>
-        <p:spPr>
-          <a:xfrm>
-            <a:off x="457200" y="164592"/>
-            <a:ext cx="7315200" cy="274320"/>
-          </a:xfrm>
-          <a:prstGeom prst="rect">
-            <a:avLst/>
-          </a:prstGeom>
-          <a:noFill/>
-        </p:spPr>
-        <p:txBody>
-          <a:bodyPr wrap="square">
-            <a:spAutoFit/>
-          </a:bodyPr>
-          <a:lstStyle/>
-          <a:p>
-            <a:pPr>
-              <a:defRPr>
-                <a:latin typeface="Roboto"/>
-              </a:defRPr>
-            </a:pPr>
-            <a:r>
-              <a:rPr sz="1000" b="0">
-                <a:solidFill>
-                  <a:srgbClr val="5F6F63"/>
-                </a:solidFill>
-                <a:latin typeface="Roboto"/>
-              </a:rPr>
-              <a:t>Sample Community Services Ltd · What does each program really cost?</a:t>
-            </a:r>
-          </a:p>
-        </p:txBody>
-      </p:sp>
-      <p:sp>
-        <p:nvSpPr>
-          <p:cNvPr id="4" name="TextBox 3"/>
-          <p:cNvSpPr txBox="1"/>
-          <p:nvPr/>
-        </p:nvSpPr>
-        <p:spPr>
-          <a:xfrm>
-            <a:off x="457200" y="411480"/>
-            <a:ext cx="11247120" cy="548640"/>
-          </a:xfrm>
-          <a:prstGeom prst="rect">
-            <a:avLst/>
-          </a:prstGeom>
-          <a:noFill/>
-        </p:spPr>
-        <p:txBody>
-          <a:bodyPr wrap="square">
-            <a:spAutoFit/>
-          </a:bodyPr>
-          <a:lstStyle/>
-          <a:p>
-            <a:pPr>
-              <a:defRPr>
-                <a:latin typeface="Roboto"/>
-              </a:defRPr>
-            </a:pPr>
-            <a:r>
-              <a:rPr sz="2400" b="1">
-                <a:solidFill>
-                  <a:srgbClr val="25342A"/>
-                </a:solidFill>
-                <a:latin typeface="Roboto"/>
-              </a:rPr>
-              <a:t>What it shows · Program: Volunteer coordinator</a:t>
-            </a:r>
-          </a:p>
-        </p:txBody>
-      </p:sp>
-      <p:sp>
-        <p:nvSpPr>
-          <p:cNvPr id="5" name="Rectangle 4"/>
-          <p:cNvSpPr/>
-          <p:nvPr/>
-        </p:nvSpPr>
-        <p:spPr>
-          <a:xfrm>
-            <a:off x="457200" y="1554480"/>
-            <a:ext cx="5501487" cy="4389120"/>
-          </a:xfrm>
-          <a:prstGeom prst="rect">
-            <a:avLst/>
-          </a:prstGeom>
-          <a:solidFill>
-            <a:srgbClr val="FFFFFF"/>
-          </a:solidFill>
-          <a:ln>
-            <a:solidFill>
-              <a:srgbClr val="DCE8DC"/>
-            </a:solidFill>
-          </a:ln>
-        </p:spPr>
-        <p:style>
-          <a:lnRef idx="1">
-            <a:schemeClr val="accent1"/>
-          </a:lnRef>
-          <a:fillRef idx="3">
-            <a:schemeClr val="accent1"/>
-          </a:fillRef>
-          <a:effectRef idx="2">
-            <a:schemeClr val="accent1"/>
-          </a:effectRef>
-          <a:fontRef idx="minor">
-            <a:schemeClr val="lt1"/>
-          </a:fontRef>
-        </p:style>
-        <p:txBody>
-          <a:bodyPr rtlCol="0" anchor="ctr"/>
-          <a:lstStyle/>
-          <a:p>
-            <a:pPr algn="ctr">
-              <a:defRPr>
-                <a:latin typeface="Roboto"/>
-              </a:defRPr>
-            </a:pPr>
-          </a:p>
-        </p:txBody>
-      </p:sp>
-      <p:sp>
-        <p:nvSpPr>
-          <p:cNvPr id="6" name="TextBox 5"/>
-          <p:cNvSpPr txBox="1"/>
-          <p:nvPr/>
-        </p:nvSpPr>
-        <p:spPr>
-          <a:xfrm>
-            <a:off x="685800" y="1691640"/>
-            <a:ext cx="5044287" cy="365760"/>
-          </a:xfrm>
-          <a:prstGeom prst="rect">
-            <a:avLst/>
-          </a:prstGeom>
-          <a:noFill/>
-        </p:spPr>
-        <p:txBody>
-          <a:bodyPr wrap="square">
-            <a:spAutoFit/>
-          </a:bodyPr>
-          <a:lstStyle/>
-          <a:p>
-            <a:pPr>
-              <a:defRPr>
-                <a:latin typeface="Roboto"/>
-              </a:defRPr>
-            </a:pPr>
-            <a:r>
-              <a:rPr sz="1100" b="1">
-                <a:solidFill>
-                  <a:srgbClr val="5F6F63"/>
-                </a:solidFill>
-                <a:latin typeface="Roboto"/>
-              </a:rPr>
-              <a:t>WHAT IT SHOWS</a:t>
-            </a:r>
-          </a:p>
-        </p:txBody>
-      </p:sp>
-      <p:sp>
-        <p:nvSpPr>
-          <p:cNvPr id="7" name="TextBox 6"/>
-          <p:cNvSpPr txBox="1"/>
-          <p:nvPr/>
-        </p:nvSpPr>
-        <p:spPr>
-          <a:xfrm>
-            <a:off x="685800" y="2103120"/>
-            <a:ext cx="5044287" cy="3749039"/>
-          </a:xfrm>
-          <a:prstGeom prst="rect">
-            <a:avLst/>
-          </a:prstGeom>
-          <a:noFill/>
-        </p:spPr>
-        <p:txBody>
-          <a:bodyPr wrap="square">
-            <a:spAutoFit/>
-          </a:bodyPr>
-          <a:lstStyle/>
-          <a:p>
-            <a:pPr>
-              <a:defRPr>
-                <a:latin typeface="Roboto"/>
-              </a:defRPr>
-            </a:pPr>
-            <a:r>
-              <a:rPr sz="1600" b="0">
-                <a:solidFill>
-                  <a:srgbClr val="25342A"/>
-                </a:solidFill>
-                <a:latin typeface="Roboto"/>
-              </a:rPr>
-              <a:t>Volunteer coordinator cost $5,798 in full in March: $2,932 paid by the State volunteering grant grant, and $2,866 of shared costs no grant covers. It has spent 97.7% of its budget to date, with $33,068 left and 11 months to go.</a:t>
-            </a:r>
-          </a:p>
-        </p:txBody>
-      </p:sp>
-      <p:sp>
-        <p:nvSpPr>
-          <p:cNvPr id="8" name="Rectangle 7"/>
-          <p:cNvSpPr/>
-          <p:nvPr/>
-        </p:nvSpPr>
-        <p:spPr>
-          <a:xfrm>
-            <a:off x="6233007" y="1554480"/>
-            <a:ext cx="5501487" cy="4389120"/>
-          </a:xfrm>
-          <a:prstGeom prst="rect">
-            <a:avLst/>
-          </a:prstGeom>
-          <a:solidFill>
-            <a:srgbClr val="EEF5F0"/>
-          </a:solidFill>
-          <a:ln>
-            <a:solidFill>
-              <a:srgbClr val="DCE8DC"/>
-            </a:solidFill>
-          </a:ln>
-        </p:spPr>
-        <p:style>
-          <a:lnRef idx="1">
-            <a:schemeClr val="accent1"/>
-          </a:lnRef>
-          <a:fillRef idx="3">
-            <a:schemeClr val="accent1"/>
-          </a:fillRef>
-          <a:effectRef idx="2">
-            <a:schemeClr val="accent1"/>
-          </a:effectRef>
-          <a:fontRef idx="minor">
-            <a:schemeClr val="lt1"/>
-          </a:fontRef>
-        </p:style>
-        <p:txBody>
-          <a:bodyPr rtlCol="0" anchor="ctr"/>
-          <a:lstStyle/>
-          <a:p>
-            <a:pPr algn="ctr">
-              <a:defRPr>
-                <a:latin typeface="Roboto"/>
-              </a:defRPr>
-            </a:pPr>
-          </a:p>
-        </p:txBody>
-      </p:sp>
-      <p:sp>
-        <p:nvSpPr>
-          <p:cNvPr id="9" name="TextBox 8"/>
-          <p:cNvSpPr txBox="1"/>
-          <p:nvPr/>
-        </p:nvSpPr>
-        <p:spPr>
-          <a:xfrm>
-            <a:off x="6461607" y="1691640"/>
-            <a:ext cx="5044287" cy="365760"/>
-          </a:xfrm>
-          <a:prstGeom prst="rect">
-            <a:avLst/>
-          </a:prstGeom>
-          <a:noFill/>
-        </p:spPr>
-        <p:txBody>
-          <a:bodyPr wrap="square">
-            <a:spAutoFit/>
-          </a:bodyPr>
-          <a:lstStyle/>
-          <a:p>
-            <a:pPr>
-              <a:defRPr>
-                <a:latin typeface="Roboto"/>
-              </a:defRPr>
-            </a:pPr>
-            <a:r>
-              <a:rPr sz="1100" b="1">
-                <a:solidFill>
-                  <a:srgbClr val="5F6F63"/>
-                </a:solidFill>
-                <a:latin typeface="Roboto"/>
-              </a:rPr>
-              <a:t>WHAT YOU'D DO ABOUT IT</a:t>
-            </a:r>
-          </a:p>
-        </p:txBody>
-      </p:sp>
-      <p:sp>
-        <p:nvSpPr>
-          <p:cNvPr id="10" name="TextBox 9"/>
-          <p:cNvSpPr txBox="1"/>
-          <p:nvPr/>
-        </p:nvSpPr>
-        <p:spPr>
-          <a:xfrm>
-            <a:off x="6461607" y="2103120"/>
-            <a:ext cx="5044287" cy="3749039"/>
-          </a:xfrm>
-          <a:prstGeom prst="rect">
-            <a:avLst/>
-          </a:prstGeom>
-          <a:noFill/>
-        </p:spPr>
-        <p:txBody>
-          <a:bodyPr wrap="square">
-            <a:spAutoFit/>
-          </a:bodyPr>
-          <a:lstStyle/>
-          <a:p>
-            <a:pPr>
-              <a:defRPr>
-                <a:latin typeface="Roboto"/>
-              </a:defRPr>
-            </a:pPr>
-            <a:r>
-              <a:rPr sz="1600" b="0">
-                <a:solidFill>
-                  <a:srgbClr val="25342A"/>
-                </a:solidFill>
-                <a:latin typeface="Roboto"/>
-              </a:rPr>
-              <a:t>The full cost is $5,798 a month; $2,866 of it is shared cost the grant doesn't pay for. Worth asking for as much of it as the funder allows at renewal.</a:t>
-            </a:r>
-          </a:p>
-        </p:txBody>
-      </p:sp>
-      <p:sp>
-        <p:nvSpPr>
-          <p:cNvPr id="11" name="TextBox 10"/>
-          <p:cNvSpPr txBox="1"/>
-          <p:nvPr/>
-        </p:nvSpPr>
-        <p:spPr>
-          <a:xfrm>
-            <a:off x="457200" y="6492240"/>
-            <a:ext cx="3657600" cy="274320"/>
-          </a:xfrm>
-          <a:prstGeom prst="rect">
-            <a:avLst/>
-          </a:prstGeom>
-          <a:noFill/>
-        </p:spPr>
-        <p:txBody>
-          <a:bodyPr wrap="square">
-            <a:spAutoFit/>
-          </a:bodyPr>
-          <a:lstStyle/>
-          <a:p>
-            <a:pPr>
-              <a:defRPr>
-                <a:latin typeface="Roboto"/>
-              </a:defRPr>
-            </a:pPr>
-            <a:r>
-              <a:rPr sz="900" b="0">
-                <a:solidFill>
-                  <a:srgbClr val="5F6F63"/>
-                </a:solidFill>
-                <a:latin typeface="Roboto"/>
-              </a:rPr>
-              <a:t>program-cost.pptx</a:t>
-            </a:r>
-          </a:p>
-        </p:txBody>
-      </p:sp>
-      <p:sp>
-        <p:nvSpPr>
-          <p:cNvPr id="12" name="TextBox 11"/>
-          <p:cNvSpPr txBox="1"/>
-          <p:nvPr/>
-        </p:nvSpPr>
-        <p:spPr>
-          <a:xfrm>
-            <a:off x="4297680" y="6492240"/>
-            <a:ext cx="3657600" cy="274320"/>
-          </a:xfrm>
-          <a:prstGeom prst="rect">
-            <a:avLst/>
-          </a:prstGeom>
-          <a:noFill/>
-        </p:spPr>
-        <p:txBody>
-          <a:bodyPr wrap="square">
-            <a:spAutoFit/>
-          </a:bodyPr>
-          <a:lstStyle/>
-          <a:p>
-            <a:pPr algn="ctr">
-              <a:defRPr>
-                <a:latin typeface="Roboto"/>
-              </a:defRPr>
-            </a:pPr>
-            <a:r>
-              <a:rPr sz="900" b="0">
-                <a:solidFill>
-                  <a:srgbClr val="5F6F63"/>
-                </a:solidFill>
-                <a:latin typeface="Roboto"/>
-              </a:rPr>
-              <a:t>Data retrieved 2pm, Tue 6 Oct 2026 · Sample data</a:t>
-            </a:r>
-          </a:p>
-        </p:txBody>
-      </p:sp>
-      <p:sp>
-        <p:nvSpPr>
-          <p:cNvPr id="13" name="TextBox 12"/>
-          <p:cNvSpPr txBox="1"/>
-          <p:nvPr/>
-        </p:nvSpPr>
-        <p:spPr>
-          <a:xfrm>
-            <a:off x="8503920" y="6492240"/>
-            <a:ext cx="3200400" cy="274320"/>
-          </a:xfrm>
-          <a:prstGeom prst="rect">
-            <a:avLst/>
-          </a:prstGeom>
-          <a:noFill/>
-        </p:spPr>
-        <p:txBody>
-          <a:bodyPr wrap="square">
-            <a:spAutoFit/>
-          </a:bodyPr>
-          <a:lstStyle/>
-          <a:p>
-            <a:pPr algn="r">
-              <a:defRPr>
-                <a:latin typeface="Roboto"/>
-              </a:defRPr>
-            </a:pPr>
-            <a:r>
-              <a:rPr sz="900" b="0">
-                <a:solidFill>
-                  <a:srgbClr val="5F6F63"/>
-                </a:solidFill>
-                <a:latin typeface="Roboto"/>
-              </a:rPr>
-              <a:t>Slide 9 of 10</a:t>
+              <a:t>Slide 7 of 7</a:t>
             </a:r>
           </a:p>
         </p:txBody>
@@ -8176,6 +9402,326 @@
 </file>
 
 <file path=ppt/theme/theme1.xml><?xml version="1.0" encoding="utf-8"?>
+<a:theme xmlns:a="http://schemas.openxmlformats.org/drawingml/2006/main" name="Office Theme">
+  <a:themeElements>
+    <a:clrScheme name="Office">
+      <a:dk1>
+        <a:sysClr val="windowText" lastClr="000000"/>
+      </a:dk1>
+      <a:lt1>
+        <a:sysClr val="window" lastClr="FFFFFF"/>
+      </a:lt1>
+      <a:dk2>
+        <a:srgbClr val="25342A"/>
+      </a:dk2>
+      <a:lt2>
+        <a:srgbClr val="F4F7F2"/>
+      </a:lt2>
+      <a:accent1>
+        <a:srgbClr val="2F7A5D"/>
+      </a:accent1>
+      <a:accent2>
+        <a:srgbClr val="0E9F6E"/>
+      </a:accent2>
+      <a:accent3>
+        <a:srgbClr val="7D8790"/>
+      </a:accent3>
+      <a:accent4>
+        <a:srgbClr val="8A6D3B"/>
+      </a:accent4>
+      <a:accent5>
+        <a:srgbClr val="B42318"/>
+      </a:accent5>
+      <a:accent6>
+        <a:srgbClr val="8E9CAB"/>
+      </a:accent6>
+      <a:hlink>
+        <a:srgbClr val="0000FF"/>
+      </a:hlink>
+      <a:folHlink>
+        <a:srgbClr val="800080"/>
+      </a:folHlink>
+    </a:clrScheme>
+    <a:fontScheme name="Office">
+      <a:majorFont>
+        <a:latin typeface="Roboto"/>
+        <a:ea typeface=""/>
+        <a:cs typeface=""/>
+        <a:font script="Jpan" typeface="ＭＳ Ｐゴシック"/>
+        <a:font script="Hang" typeface="맑은 고딕"/>
+        <a:font script="Hans" typeface="宋体"/>
+        <a:font script="Hant" typeface="新細明體"/>
+        <a:font script="Arab" typeface="Times New Roman"/>
+        <a:font script="Hebr" typeface="Times New Roman"/>
+        <a:font script="Thai" typeface="Angsana New"/>
+        <a:font script="Ethi" typeface="Nyala"/>
+        <a:font script="Beng" typeface="Vrinda"/>
+        <a:font script="Gujr" typeface="Shruti"/>
+        <a:font script="Khmr" typeface="MoolBoran"/>
+        <a:font script="Knda" typeface="Tunga"/>
+        <a:font script="Guru" typeface="Raavi"/>
+        <a:font script="Cans" typeface="Euphemia"/>
+        <a:font script="Cher" typeface="Plantagenet Cherokee"/>
+        <a:font script="Yiii" typeface="Microsoft Yi Baiti"/>
+        <a:font script="Tibt" typeface="Microsoft Himalaya"/>
+        <a:font script="Thaa" typeface="MV Boli"/>
+        <a:font script="Deva" typeface="Mangal"/>
+        <a:font script="Telu" typeface="Gautami"/>
+        <a:font script="Taml" typeface="Latha"/>
+        <a:font script="Syrc" typeface="Estrangelo Edessa"/>
+        <a:font script="Orya" typeface="Kalinga"/>
+        <a:font script="Mlym" typeface="Kartika"/>
+        <a:font script="Laoo" typeface="DokChampa"/>
+        <a:font script="Sinh" typeface="Iskoola Pota"/>
+        <a:font script="Mong" typeface="Mongolian Baiti"/>
+        <a:font script="Viet" typeface="Times New Roman"/>
+        <a:font script="Uigh" typeface="Microsoft Uighur"/>
+        <a:font script="Geor" typeface="Sylfaen"/>
+      </a:majorFont>
+      <a:minorFont>
+        <a:latin typeface="Roboto"/>
+        <a:ea typeface=""/>
+        <a:cs typeface=""/>
+        <a:font script="Jpan" typeface="ＭＳ Ｐゴシック"/>
+        <a:font script="Hang" typeface="맑은 고딕"/>
+        <a:font script="Hans" typeface="宋体"/>
+        <a:font script="Hant" typeface="新細明體"/>
+        <a:font script="Arab" typeface="Arial"/>
+        <a:font script="Hebr" typeface="Arial"/>
+        <a:font script="Thai" typeface="Cordia New"/>
+        <a:font script="Ethi" typeface="Nyala"/>
+        <a:font script="Beng" typeface="Vrinda"/>
+        <a:font script="Gujr" typeface="Shruti"/>
+        <a:font script="Khmr" typeface="DaunPenh"/>
+        <a:font script="Knda" typeface="Tunga"/>
+        <a:font script="Guru" typeface="Raavi"/>
+        <a:font script="Cans" typeface="Euphemia"/>
+        <a:font script="Cher" typeface="Plantagenet Cherokee"/>
+        <a:font script="Yiii" typeface="Microsoft Yi Baiti"/>
+        <a:font script="Tibt" typeface="Microsoft Himalaya"/>
+        <a:font script="Thaa" typeface="MV Boli"/>
+        <a:font script="Deva" typeface="Mangal"/>
+        <a:font script="Telu" typeface="Gautami"/>
+        <a:font script="Taml" typeface="Latha"/>
+        <a:font script="Syrc" typeface="Estrangelo Edessa"/>
+        <a:font script="Orya" typeface="Kalinga"/>
+        <a:font script="Mlym" typeface="Kartika"/>
+        <a:font script="Laoo" typeface="DokChampa"/>
+        <a:font script="Sinh" typeface="Iskoola Pota"/>
+        <a:font script="Mong" typeface="Mongolian Baiti"/>
+        <a:font script="Viet" typeface="Arial"/>
+        <a:font script="Uigh" typeface="Microsoft Uighur"/>
+        <a:font script="Geor" typeface="Sylfaen"/>
+      </a:minorFont>
+    </a:fontScheme>
+    <a:fmtScheme name="Office">
+      <a:fillStyleLst>
+        <a:solidFill>
+          <a:schemeClr val="phClr"/>
+        </a:solidFill>
+        <a:gradFill rotWithShape="1">
+          <a:gsLst>
+            <a:gs pos="0">
+              <a:schemeClr val="phClr">
+                <a:tint val="50000"/>
+                <a:satMod val="300000"/>
+              </a:schemeClr>
+            </a:gs>
+            <a:gs pos="35000">
+              <a:schemeClr val="phClr">
+                <a:tint val="37000"/>
+                <a:satMod val="300000"/>
+              </a:schemeClr>
+            </a:gs>
+            <a:gs pos="100000">
+              <a:schemeClr val="phClr">
+                <a:tint val="15000"/>
+                <a:satMod val="350000"/>
+              </a:schemeClr>
+            </a:gs>
+          </a:gsLst>
+          <a:lin ang="16200000" scaled="1"/>
+        </a:gradFill>
+        <a:gradFill rotWithShape="1">
+          <a:gsLst>
+            <a:gs pos="0">
+              <a:schemeClr val="phClr">
+                <a:tint val="100000"/>
+                <a:shade val="100000"/>
+                <a:satMod val="130000"/>
+              </a:schemeClr>
+            </a:gs>
+            <a:gs pos="100000">
+              <a:schemeClr val="phClr">
+                <a:tint val="50000"/>
+                <a:shade val="100000"/>
+                <a:satMod val="350000"/>
+              </a:schemeClr>
+            </a:gs>
+          </a:gsLst>
+          <a:lin ang="16200000" scaled="0"/>
+        </a:gradFill>
+      </a:fillStyleLst>
+      <a:lnStyleLst>
+        <a:ln w="9525" cap="flat" cmpd="sng" algn="ctr">
+          <a:solidFill>
+            <a:schemeClr val="phClr">
+              <a:shade val="95000"/>
+              <a:satMod val="105000"/>
+            </a:schemeClr>
+          </a:solidFill>
+          <a:prstDash val="solid"/>
+        </a:ln>
+        <a:ln w="25400" cap="flat" cmpd="sng" algn="ctr">
+          <a:solidFill>
+            <a:schemeClr val="phClr"/>
+          </a:solidFill>
+          <a:prstDash val="solid"/>
+        </a:ln>
+        <a:ln w="38100" cap="flat" cmpd="sng" algn="ctr">
+          <a:solidFill>
+            <a:schemeClr val="phClr"/>
+          </a:solidFill>
+          <a:prstDash val="solid"/>
+        </a:ln>
+      </a:lnStyleLst>
+      <a:effectStyleLst>
+        <a:effectStyle>
+          <a:effectLst>
+            <a:outerShdw blurRad="40000" dist="20000" dir="5400000" rotWithShape="0">
+              <a:srgbClr val="000000">
+                <a:alpha val="38000"/>
+              </a:srgbClr>
+            </a:outerShdw>
+          </a:effectLst>
+        </a:effectStyle>
+        <a:effectStyle>
+          <a:effectLst>
+            <a:outerShdw blurRad="40000" dist="23000" dir="5400000" rotWithShape="0">
+              <a:srgbClr val="000000">
+                <a:alpha val="35000"/>
+              </a:srgbClr>
+            </a:outerShdw>
+          </a:effectLst>
+        </a:effectStyle>
+        <a:effectStyle>
+          <a:effectLst>
+            <a:outerShdw blurRad="40000" dist="23000" dir="5400000" rotWithShape="0">
+              <a:srgbClr val="000000">
+                <a:alpha val="35000"/>
+              </a:srgbClr>
+            </a:outerShdw>
+          </a:effectLst>
+          <a:scene3d>
+            <a:camera prst="orthographicFront">
+              <a:rot lat="0" lon="0" rev="0"/>
+            </a:camera>
+            <a:lightRig rig="threePt" dir="t">
+              <a:rot lat="0" lon="0" rev="1200000"/>
+            </a:lightRig>
+          </a:scene3d>
+          <a:sp3d>
+            <a:bevelT w="63500" h="25400"/>
+          </a:sp3d>
+        </a:effectStyle>
+      </a:effectStyleLst>
+      <a:bgFillStyleLst>
+        <a:solidFill>
+          <a:schemeClr val="phClr"/>
+        </a:solidFill>
+        <a:gradFill rotWithShape="1">
+          <a:gsLst>
+            <a:gs pos="0">
+              <a:schemeClr val="phClr">
+                <a:tint val="40000"/>
+                <a:satMod val="350000"/>
+              </a:schemeClr>
+            </a:gs>
+            <a:gs pos="40000">
+              <a:schemeClr val="phClr">
+                <a:tint val="45000"/>
+                <a:shade val="99000"/>
+                <a:satMod val="350000"/>
+              </a:schemeClr>
+            </a:gs>
+            <a:gs pos="100000">
+              <a:schemeClr val="phClr">
+                <a:shade val="20000"/>
+                <a:satMod val="255000"/>
+              </a:schemeClr>
+            </a:gs>
+          </a:gsLst>
+          <a:path path="circle">
+            <a:fillToRect l="50000" t="-80000" r="50000" b="180000"/>
+          </a:path>
+        </a:gradFill>
+        <a:gradFill rotWithShape="1">
+          <a:gsLst>
+            <a:gs pos="0">
+              <a:schemeClr val="phClr">
+                <a:tint val="80000"/>
+                <a:satMod val="300000"/>
+              </a:schemeClr>
+            </a:gs>
+            <a:gs pos="100000">
+              <a:schemeClr val="phClr">
+                <a:shade val="30000"/>
+                <a:satMod val="200000"/>
+              </a:schemeClr>
+            </a:gs>
+          </a:gsLst>
+          <a:path path="circle">
+            <a:fillToRect l="50000" t="50000" r="50000" b="50000"/>
+          </a:path>
+        </a:gradFill>
+      </a:bgFillStyleLst>
+    </a:fmtScheme>
+  </a:themeElements>
+  <a:objectDefaults>
+    <a:spDef>
+      <a:spPr/>
+      <a:bodyPr/>
+      <a:lstStyle/>
+      <a:style>
+        <a:lnRef idx="1">
+          <a:schemeClr val="accent1"/>
+        </a:lnRef>
+        <a:fillRef idx="3">
+          <a:schemeClr val="accent1"/>
+        </a:fillRef>
+        <a:effectRef idx="2">
+          <a:schemeClr val="accent1"/>
+        </a:effectRef>
+        <a:fontRef idx="minor">
+          <a:schemeClr val="lt1"/>
+        </a:fontRef>
+      </a:style>
+    </a:spDef>
+    <a:lnDef>
+      <a:spPr/>
+      <a:bodyPr/>
+      <a:lstStyle/>
+      <a:style>
+        <a:lnRef idx="2">
+          <a:schemeClr val="accent1"/>
+        </a:lnRef>
+        <a:fillRef idx="0">
+          <a:schemeClr val="accent1"/>
+        </a:fillRef>
+        <a:effectRef idx="1">
+          <a:schemeClr val="accent1"/>
+        </a:effectRef>
+        <a:fontRef idx="minor">
+          <a:schemeClr val="tx1"/>
+        </a:fontRef>
+      </a:style>
+    </a:lnDef>
+  </a:objectDefaults>
+  <a:extraClrSchemeLst/>
+</a:theme>
+</file>
+
+<file path=ppt/theme/theme2.xml><?xml version="1.0" encoding="utf-8"?>
 <a:theme xmlns:a="http://schemas.openxmlformats.org/drawingml/2006/main" name="Office Theme">
   <a:themeElements>
     <a:clrScheme name="Office">

--- a/media/exports/reports/2026-03/program-cost.pptx
+++ b/media/exports/reports/2026-03/program-cost.pptx
@@ -2100,7 +2100,7 @@
           <a:lstStyle/>
           <a:p>
             <a:r>
-              <a:t>What does each program really cost?. Sample Community Services Ltd. Period: March 2026. Each program's full cost: what its grant pays for, plus its fair share of the costs no single grant covers (untied program costs and administration, shared by grant spending). Pick a program and every chart and note follows it.</a:t>
+              <a:t>What does each program really cost?. Sample Community Services Ltd. Period: March 2026. In short: Housing support costs $49,107 in full in March: $24,275 more than its grant spending, once its share of shared costs is added. Each program's full cost: what its grant pays for, plus its fair share of the costs no single grant covers (untied program costs and administration, shared by grant spending). Pick a program and every chart and note follows it.</a:t>
             </a:r>
           </a:p>
         </p:txBody>
@@ -5745,7 +5745,7 @@
         <p:spPr>
           <a:xfrm>
             <a:off x="457200" y="3703320"/>
-            <a:ext cx="11277295" cy="535940"/>
+            <a:ext cx="11277295" cy="980440"/>
           </a:xfrm>
           <a:prstGeom prst="rect">
             <a:avLst/>
@@ -5770,7 +5770,7 @@
                 </a:solidFill>
                 <a:latin typeface="Roboto"/>
               </a:rPr>
-              <a:t>Period: March 2026. Each program's full cost: what its grant pays for, plus its fair share of the costs no single grant covers (untied program costs and administration, shared by grant spending). Pick a program and every chart and note follows it.</a:t>
+              <a:t>Period: March 2026. In short: Housing support costs $49,107 in full in March: $24,275 more than its grant spending, once its share of shared costs is added. Each program's full cost: what its grant pays for, plus its fair share of the costs no single grant covers (untied program costs and administration, shared by grant spending). Pick a program and every chart and note follows it.</a:t>
             </a:r>
           </a:p>
         </p:txBody>
@@ -5783,7 +5783,7 @@
         </p:nvSpPr>
         <p:spPr>
           <a:xfrm>
-            <a:off x="457200" y="4330700"/>
+            <a:off x="457200" y="4775200"/>
             <a:ext cx="11277295" cy="1097280"/>
           </a:xfrm>
           <a:prstGeom prst="rect">
@@ -5935,7 +5935,7 @@
                 </a:solidFill>
                 <a:latin typeface="Roboto"/>
               </a:rPr>
-              <a:t>Data retrieved 2pm, Tue 6 Oct 2026 · Generated 8 Oct 2026, 9:35am · Sample data · Made with Python (python-pptx)</a:t>
+              <a:t>Data retrieved 2pm, Tue 6 Oct 2026 · Generated 10 Oct 2026, 9:55pm · Sample data · Made with Python (python-pptx)</a:t>
             </a:r>
           </a:p>
         </p:txBody>
@@ -6504,7 +6504,7 @@
                 </a:solidFill>
                 <a:latin typeface="Roboto"/>
               </a:rPr>
-              <a:t>Data retrieved 2pm, Tue 6 Oct 2026 · Generated 8 Oct 2026, 9:35am · Sample data · Made with Python (python-pptx)</a:t>
+              <a:t>Data retrieved 2pm, Tue 6 Oct 2026 · Generated 10 Oct 2026, 9:55pm · Sample data · Made with Python (python-pptx)</a:t>
             </a:r>
           </a:p>
         </p:txBody>
@@ -7073,7 +7073,7 @@
                 </a:solidFill>
                 <a:latin typeface="Roboto"/>
               </a:rPr>
-              <a:t>Data retrieved 2pm, Tue 6 Oct 2026 · Generated 8 Oct 2026, 9:35am · Sample data · Made with Python (python-pptx)</a:t>
+              <a:t>Data retrieved 2pm, Tue 6 Oct 2026 · Generated 10 Oct 2026, 9:55pm · Sample data · Made with Python (python-pptx)</a:t>
             </a:r>
           </a:p>
         </p:txBody>
@@ -7642,7 +7642,7 @@
                 </a:solidFill>
                 <a:latin typeface="Roboto"/>
               </a:rPr>
-              <a:t>Data retrieved 2pm, Tue 6 Oct 2026 · Generated 8 Oct 2026, 9:35am · Sample data · Made with Python (python-pptx)</a:t>
+              <a:t>Data retrieved 2pm, Tue 6 Oct 2026 · Generated 10 Oct 2026, 9:55pm · Sample data · Made with Python (python-pptx)</a:t>
             </a:r>
           </a:p>
         </p:txBody>
@@ -8211,7 +8211,7 @@
                 </a:solidFill>
                 <a:latin typeface="Roboto"/>
               </a:rPr>
-              <a:t>Data retrieved 2pm, Tue 6 Oct 2026 · Generated 8 Oct 2026, 9:35am · Sample data · Made with Python (python-pptx)</a:t>
+              <a:t>Data retrieved 2pm, Tue 6 Oct 2026 · Generated 10 Oct 2026, 9:55pm · Sample data · Made with Python (python-pptx)</a:t>
             </a:r>
           </a:p>
         </p:txBody>
@@ -8780,7 +8780,7 @@
                 </a:solidFill>
                 <a:latin typeface="Roboto"/>
               </a:rPr>
-              <a:t>Data retrieved 2pm, Tue 6 Oct 2026 · Generated 8 Oct 2026, 9:35am · Sample data · Made with Python (python-pptx)</a:t>
+              <a:t>Data retrieved 2pm, Tue 6 Oct 2026 · Generated 10 Oct 2026, 9:55pm · Sample data · Made with Python (python-pptx)</a:t>
             </a:r>
           </a:p>
         </p:txBody>
@@ -9349,7 +9349,7 @@
                 </a:solidFill>
                 <a:latin typeface="Roboto"/>
               </a:rPr>
-              <a:t>Data retrieved 2pm, Tue 6 Oct 2026 · Generated 8 Oct 2026, 9:35am · Sample data · Made with Python (python-pptx)</a:t>
+              <a:t>Data retrieved 2pm, Tue 6 Oct 2026 · Generated 10 Oct 2026, 9:55pm · Sample data · Made with Python (python-pptx)</a:t>
             </a:r>
           </a:p>
         </p:txBody>
